--- a/presentation/BRSET_Part2_LiteratureReview.pptx
+++ b/presentation/BRSET_Part2_LiteratureReview.pptx
@@ -3101,8 +3101,8 @@
         </p:nvSpPr>
         <p:spPr>
           <a:xfrm>
-            <a:off x="502920" y="320040"/>
-            <a:ext cx="11247120" cy="822960"/>
+            <a:off x="548640" y="347472"/>
+            <a:ext cx="11155680" cy="777240"/>
           </a:xfrm>
           <a:prstGeom prst="rect">
             <a:avLst/>
@@ -3116,26 +3116,26 @@
           <a:lstStyle/>
           <a:p>
             <a:pPr>
-              <a:defRPr sz="2700" b="1">
+              <a:defRPr sz="2800" b="1">
                 <a:solidFill>
                   <a:srgbClr val="1F4E79"/>
                 </a:solidFill>
               </a:defRPr>
             </a:pPr>
             <a:r>
-              <a:t>Part 2 — BRSET → mBRSET: literature review and proposed direction</a:t>
+              <a:t>Part 2 — BRSET → mBRSET</a:t>
             </a:r>
           </a:p>
           <a:p>
             <a:pPr>
               <a:defRPr sz="1300">
                 <a:solidFill>
-                  <a:srgbClr val="5A5A5A"/>
-                </a:solidFill>
-              </a:defRPr>
-            </a:pPr>
-            <a:r>
-              <a:t>Sahith Reddy Thummala   |   For: Dr. Dong Hye Ye   |   cc: Nagur Shareef Shaik</a:t>
+                  <a:srgbClr val="6B6B6B"/>
+                </a:solidFill>
+              </a:defRPr>
+            </a:pPr>
+            <a:r>
+              <a:t>Literature review and proposed direction   |   Sahith Reddy Thummala   |   For: Dr. Dong Hye Ye</a:t>
             </a:r>
           </a:p>
         </p:txBody>
@@ -3148,8 +3148,8 @@
         </p:nvSpPr>
         <p:spPr>
           <a:xfrm>
-            <a:off x="548640" y="1554480"/>
-            <a:ext cx="11155680" cy="4297680"/>
+            <a:off x="594360" y="1417320"/>
+            <a:ext cx="11064240" cy="310896"/>
           </a:xfrm>
           <a:prstGeom prst="rect">
             <a:avLst/>
@@ -3162,122 +3162,89 @@
           </a:bodyPr>
           <a:lstStyle/>
           <a:p>
-            <a:pPr>
-              <a:spcAft>
-                <a:spcPts val="600"/>
-              </a:spcAft>
-              <a:defRPr sz="1400">
-                <a:solidFill>
-                  <a:srgbClr val="1A1A1A"/>
-                </a:solidFill>
-              </a:defRPr>
-            </a:pPr>
-            <a:r>
-              <a:t>• How this review was conducted, after your feedback that the previous one was not rigorous enough:</a:t>
-            </a:r>
-          </a:p>
-          <a:p>
-            <a:pPr lvl="1">
-              <a:spcAft>
-                <a:spcPts val="600"/>
-              </a:spcAft>
-              <a:defRPr sz="1300">
-                <a:solidFill>
-                  <a:srgbClr val="5A5A5A"/>
-                </a:solidFill>
-              </a:defRPr>
-            </a:pPr>
-            <a:r>
-              <a:t>– Peer-reviewed versions only. Where a preprint exists, the published venue is cited instead, and preprint-only work is labelled as weak evidence.</a:t>
-            </a:r>
-          </a:p>
-          <a:p>
-            <a:pPr lvl="1">
-              <a:spcAft>
-                <a:spcPts val="600"/>
-              </a:spcAft>
-              <a:defRPr sz="1300">
-                <a:solidFill>
-                  <a:srgbClr val="5A5A5A"/>
-                </a:solidFill>
-              </a:defRPr>
-            </a:pPr>
-            <a:r>
-              <a:t>– Citation counts retrieved from the Semantic Scholar Graph API by DOI (not by title matching), 7 Aug 2026. Counts are stated for every paper.</a:t>
-            </a:r>
-          </a:p>
-          <a:p>
-            <a:pPr lvl="1">
-              <a:spcAft>
-                <a:spcPts val="600"/>
-              </a:spcAft>
-              <a:defRPr sz="1300">
-                <a:solidFill>
-                  <a:srgbClr val="5A5A5A"/>
-                </a:solidFill>
-              </a:defRPr>
-            </a:pPr>
-            <a:r>
-              <a:t>– Papers were obtained and read as PDFs; results tables were extracted from the source, not from search summaries. Numbers quoted below come from those tables.</a:t>
-            </a:r>
-          </a:p>
-          <a:p>
-            <a:pPr lvl="1">
-              <a:spcAft>
-                <a:spcPts val="600"/>
-              </a:spcAft>
-              <a:defRPr sz="1300">
-                <a:solidFill>
-                  <a:srgbClr val="5A5A5A"/>
-                </a:solidFill>
-              </a:defRPr>
-            </a:pPr>
-            <a:r>
-              <a:t>– Venue standing recorded for each: CVPR / ICCV / ECCV / NeurIPS / ICML / ICLR / MICCAI / IPMI, and Medical Image Analysis / IEEE TMI / Nature-family journals.</a:t>
-            </a:r>
-          </a:p>
-          <a:p>
-            <a:pPr>
-              <a:spcAft>
-                <a:spcPts val="600"/>
-              </a:spcAft>
-              <a:defRPr sz="1400">
-                <a:solidFill>
-                  <a:srgbClr val="1A1A1A"/>
-                </a:solidFill>
-              </a:defRPr>
-            </a:pPr>
-            <a:r>
-              <a:t>• Three independent reviews were run over separate sub-questions and cross-checked: (i) unsupervised domain adaptation and test-time adaptation for real device shift, (ii) prevalence and threshold shift in medical deployment, (iii) the statistical theory of multi-view aggregation.</a:t>
-            </a:r>
-          </a:p>
-          <a:p>
-            <a:pPr>
-              <a:spcAft>
-                <a:spcPts val="600"/>
-              </a:spcAft>
-              <a:defRPr sz="1400">
-                <a:solidFill>
-                  <a:srgbClr val="1A1A1A"/>
-                </a:solidFill>
-              </a:defRPr>
-            </a:pPr>
-            <a:r>
-              <a:t>• Coverage check: every paper citing either dataset paper was enumerated through the citation graph, plus GitHub, arXiv and preprint servers, to establish what is already claimed.</a:t>
-            </a:r>
-          </a:p>
-        </p:txBody>
-      </p:sp>
-      <p:sp>
-        <p:nvSpPr>
-          <p:cNvPr id="4" name="TextBox 3"/>
+            <a:pPr algn="l">
+              <a:defRPr sz="1500" b="1">
+                <a:solidFill>
+                  <a:srgbClr val="1F4E79"/>
+                </a:solidFill>
+              </a:defRPr>
+            </a:pPr>
+            <a:r>
+              <a:t>How this review was done differently</a:t>
+            </a:r>
+          </a:p>
+        </p:txBody>
+      </p:sp>
+      <p:sp>
+        <p:nvSpPr>
+          <p:cNvPr id="4" name="Rounded Rectangle 3"/>
+          <p:cNvSpPr/>
+          <p:nvPr/>
+        </p:nvSpPr>
+        <p:spPr>
+          <a:xfrm>
+            <a:off x="594360" y="1965960"/>
+            <a:ext cx="2377440" cy="777240"/>
+          </a:xfrm>
+          <a:prstGeom prst="roundRect">
+            <a:avLst/>
+          </a:prstGeom>
+          <a:solidFill>
+            <a:srgbClr val="1F4E79"/>
+          </a:solidFill>
+          <a:ln>
+            <a:solidFill>
+              <a:srgbClr val="1F4E79"/>
+            </a:solidFill>
+          </a:ln>
+          <a:effectLst/>
+        </p:spPr>
+        <p:style>
+          <a:lnRef idx="1">
+            <a:schemeClr val="accent1"/>
+          </a:lnRef>
+          <a:fillRef idx="3">
+            <a:schemeClr val="accent1"/>
+          </a:fillRef>
+          <a:effectRef idx="2">
+            <a:schemeClr val="accent1"/>
+          </a:effectRef>
+          <a:fontRef idx="minor">
+            <a:schemeClr val="lt1"/>
+          </a:fontRef>
+        </p:style>
+        <p:txBody>
+          <a:bodyPr rtlCol="0" anchor="ctr" wrap="square"/>
+          <a:lstStyle/>
+          <a:p>
+            <a:pPr algn="ctr">
+              <a:defRPr sz="1300" b="1">
+                <a:solidFill>
+                  <a:srgbClr val="FFFFFF"/>
+                </a:solidFill>
+              </a:defRPr>
+            </a:pPr>
+            <a:r>
+              <a:rPr sz="1300" b="1">
+                <a:solidFill>
+                  <a:srgbClr val="FFFFFF"/>
+                </a:solidFill>
+              </a:rPr>
+              <a:t>Published only</a:t>
+            </a:r>
+          </a:p>
+        </p:txBody>
+      </p:sp>
+      <p:sp>
+        <p:nvSpPr>
+          <p:cNvPr id="5" name="TextBox 4"/>
           <p:cNvSpPr txBox="1"/>
           <p:nvPr/>
         </p:nvSpPr>
         <p:spPr>
           <a:xfrm>
-            <a:off x="548640" y="5943600"/>
-            <a:ext cx="11155680" cy="640080"/>
+            <a:off x="3154680" y="2020824"/>
+            <a:ext cx="8503920" cy="310896"/>
           </a:xfrm>
           <a:prstGeom prst="rect">
             <a:avLst/>
@@ -3290,15 +3257,351 @@
           </a:bodyPr>
           <a:lstStyle/>
           <a:p>
+            <a:pPr algn="l">
+              <a:defRPr sz="1200" b="0">
+                <a:solidFill>
+                  <a:srgbClr val="1A1A1A"/>
+                </a:solidFill>
+              </a:defRPr>
+            </a:pPr>
+            <a:r>
+              <a:t>Peer-reviewed version cited, not the preprint.</a:t>
+            </a:r>
+            <a:br/>
+            <a:r>
+              <a:t>Preprint-only work labelled weak evidence.</a:t>
+            </a:r>
+          </a:p>
+        </p:txBody>
+      </p:sp>
+      <p:sp>
+        <p:nvSpPr>
+          <p:cNvPr id="6" name="Rounded Rectangle 5"/>
+          <p:cNvSpPr/>
+          <p:nvPr/>
+        </p:nvSpPr>
+        <p:spPr>
+          <a:xfrm>
+            <a:off x="594360" y="2898648"/>
+            <a:ext cx="2377440" cy="777240"/>
+          </a:xfrm>
+          <a:prstGeom prst="roundRect">
+            <a:avLst/>
+          </a:prstGeom>
+          <a:solidFill>
+            <a:srgbClr val="1F4E79"/>
+          </a:solidFill>
+          <a:ln>
+            <a:solidFill>
+              <a:srgbClr val="1F4E79"/>
+            </a:solidFill>
+          </a:ln>
+          <a:effectLst/>
+        </p:spPr>
+        <p:style>
+          <a:lnRef idx="1">
+            <a:schemeClr val="accent1"/>
+          </a:lnRef>
+          <a:fillRef idx="3">
+            <a:schemeClr val="accent1"/>
+          </a:fillRef>
+          <a:effectRef idx="2">
+            <a:schemeClr val="accent1"/>
+          </a:effectRef>
+          <a:fontRef idx="minor">
+            <a:schemeClr val="lt1"/>
+          </a:fontRef>
+        </p:style>
+        <p:txBody>
+          <a:bodyPr rtlCol="0" anchor="ctr" wrap="square"/>
+          <a:lstStyle/>
+          <a:p>
+            <a:pPr algn="ctr">
+              <a:defRPr sz="1300" b="1">
+                <a:solidFill>
+                  <a:srgbClr val="FFFFFF"/>
+                </a:solidFill>
+              </a:defRPr>
+            </a:pPr>
+            <a:r>
+              <a:rPr sz="1300" b="1">
+                <a:solidFill>
+                  <a:srgbClr val="FFFFFF"/>
+                </a:solidFill>
+              </a:rPr>
+              <a:t>Counted</a:t>
+            </a:r>
+          </a:p>
+        </p:txBody>
+      </p:sp>
+      <p:sp>
+        <p:nvSpPr>
+          <p:cNvPr id="7" name="TextBox 6"/>
+          <p:cNvSpPr txBox="1"/>
+          <p:nvPr/>
+        </p:nvSpPr>
+        <p:spPr>
+          <a:xfrm>
+            <a:off x="3154680" y="2953512"/>
+            <a:ext cx="8503920" cy="310896"/>
+          </a:xfrm>
+          <a:prstGeom prst="rect">
+            <a:avLst/>
+          </a:prstGeom>
+          <a:noFill/>
+        </p:spPr>
+        <p:txBody>
+          <a:bodyPr wrap="square">
+            <a:spAutoFit/>
+          </a:bodyPr>
+          <a:lstStyle/>
+          <a:p>
+            <a:pPr algn="l">
+              <a:defRPr sz="1200" b="0">
+                <a:solidFill>
+                  <a:srgbClr val="1A1A1A"/>
+                </a:solidFill>
+              </a:defRPr>
+            </a:pPr>
+            <a:r>
+              <a:t>Citation counts pulled by DOI from the</a:t>
+            </a:r>
+            <a:br/>
+            <a:r>
+              <a:t>Semantic Scholar API, not title matching.</a:t>
+            </a:r>
+          </a:p>
+        </p:txBody>
+      </p:sp>
+      <p:sp>
+        <p:nvSpPr>
+          <p:cNvPr id="8" name="Rounded Rectangle 7"/>
+          <p:cNvSpPr/>
+          <p:nvPr/>
+        </p:nvSpPr>
+        <p:spPr>
+          <a:xfrm>
+            <a:off x="594360" y="3831335"/>
+            <a:ext cx="2377440" cy="777240"/>
+          </a:xfrm>
+          <a:prstGeom prst="roundRect">
+            <a:avLst/>
+          </a:prstGeom>
+          <a:solidFill>
+            <a:srgbClr val="1F4E79"/>
+          </a:solidFill>
+          <a:ln>
+            <a:solidFill>
+              <a:srgbClr val="1F4E79"/>
+            </a:solidFill>
+          </a:ln>
+          <a:effectLst/>
+        </p:spPr>
+        <p:style>
+          <a:lnRef idx="1">
+            <a:schemeClr val="accent1"/>
+          </a:lnRef>
+          <a:fillRef idx="3">
+            <a:schemeClr val="accent1"/>
+          </a:fillRef>
+          <a:effectRef idx="2">
+            <a:schemeClr val="accent1"/>
+          </a:effectRef>
+          <a:fontRef idx="minor">
+            <a:schemeClr val="lt1"/>
+          </a:fontRef>
+        </p:style>
+        <p:txBody>
+          <a:bodyPr rtlCol="0" anchor="ctr" wrap="square"/>
+          <a:lstStyle/>
+          <a:p>
+            <a:pPr algn="ctr">
+              <a:defRPr sz="1300" b="1">
+                <a:solidFill>
+                  <a:srgbClr val="FFFFFF"/>
+                </a:solidFill>
+              </a:defRPr>
+            </a:pPr>
+            <a:r>
+              <a:rPr sz="1300" b="1">
+                <a:solidFill>
+                  <a:srgbClr val="FFFFFF"/>
+                </a:solidFill>
+              </a:rPr>
+              <a:t>Read, not skimmed</a:t>
+            </a:r>
+          </a:p>
+        </p:txBody>
+      </p:sp>
+      <p:sp>
+        <p:nvSpPr>
+          <p:cNvPr id="9" name="TextBox 8"/>
+          <p:cNvSpPr txBox="1"/>
+          <p:nvPr/>
+        </p:nvSpPr>
+        <p:spPr>
+          <a:xfrm>
+            <a:off x="3154680" y="3886199"/>
+            <a:ext cx="8503920" cy="310896"/>
+          </a:xfrm>
+          <a:prstGeom prst="rect">
+            <a:avLst/>
+          </a:prstGeom>
+          <a:noFill/>
+        </p:spPr>
+        <p:txBody>
+          <a:bodyPr wrap="square">
+            <a:spAutoFit/>
+          </a:bodyPr>
+          <a:lstStyle/>
+          <a:p>
+            <a:pPr algn="l">
+              <a:defRPr sz="1200" b="0">
+                <a:solidFill>
+                  <a:srgbClr val="1A1A1A"/>
+                </a:solidFill>
+              </a:defRPr>
+            </a:pPr>
+            <a:r>
+              <a:t>PDFs obtained; results tables extracted</a:t>
+            </a:r>
+            <a:br/>
+            <a:r>
+              <a:t>from source, not from search summaries.</a:t>
+            </a:r>
+          </a:p>
+        </p:txBody>
+      </p:sp>
+      <p:sp>
+        <p:nvSpPr>
+          <p:cNvPr id="10" name="Rounded Rectangle 9"/>
+          <p:cNvSpPr/>
+          <p:nvPr/>
+        </p:nvSpPr>
+        <p:spPr>
+          <a:xfrm>
+            <a:off x="594360" y="4764023"/>
+            <a:ext cx="2377440" cy="777240"/>
+          </a:xfrm>
+          <a:prstGeom prst="roundRect">
+            <a:avLst/>
+          </a:prstGeom>
+          <a:solidFill>
+            <a:srgbClr val="1F4E79"/>
+          </a:solidFill>
+          <a:ln>
+            <a:solidFill>
+              <a:srgbClr val="1F4E79"/>
+            </a:solidFill>
+          </a:ln>
+          <a:effectLst/>
+        </p:spPr>
+        <p:style>
+          <a:lnRef idx="1">
+            <a:schemeClr val="accent1"/>
+          </a:lnRef>
+          <a:fillRef idx="3">
+            <a:schemeClr val="accent1"/>
+          </a:fillRef>
+          <a:effectRef idx="2">
+            <a:schemeClr val="accent1"/>
+          </a:effectRef>
+          <a:fontRef idx="minor">
+            <a:schemeClr val="lt1"/>
+          </a:fontRef>
+        </p:style>
+        <p:txBody>
+          <a:bodyPr rtlCol="0" anchor="ctr" wrap="square"/>
+          <a:lstStyle/>
+          <a:p>
+            <a:pPr algn="ctr">
+              <a:defRPr sz="1300" b="1">
+                <a:solidFill>
+                  <a:srgbClr val="FFFFFF"/>
+                </a:solidFill>
+              </a:defRPr>
+            </a:pPr>
+            <a:r>
+              <a:rPr sz="1300" b="1">
+                <a:solidFill>
+                  <a:srgbClr val="FFFFFF"/>
+                </a:solidFill>
+              </a:rPr>
+              <a:t>Exhaustive</a:t>
+            </a:r>
+          </a:p>
+        </p:txBody>
+      </p:sp>
+      <p:sp>
+        <p:nvSpPr>
+          <p:cNvPr id="11" name="TextBox 10"/>
+          <p:cNvSpPr txBox="1"/>
+          <p:nvPr/>
+        </p:nvSpPr>
+        <p:spPr>
+          <a:xfrm>
+            <a:off x="3154680" y="4818887"/>
+            <a:ext cx="8503920" cy="310896"/>
+          </a:xfrm>
+          <a:prstGeom prst="rect">
+            <a:avLst/>
+          </a:prstGeom>
+          <a:noFill/>
+        </p:spPr>
+        <p:txBody>
+          <a:bodyPr wrap="square">
+            <a:spAutoFit/>
+          </a:bodyPr>
+          <a:lstStyle/>
+          <a:p>
+            <a:pPr algn="l">
+              <a:defRPr sz="1200" b="0">
+                <a:solidFill>
+                  <a:srgbClr val="1A1A1A"/>
+                </a:solidFill>
+              </a:defRPr>
+            </a:pPr>
+            <a:r>
+              <a:t>Full citation graph of both dataset papers</a:t>
+            </a:r>
+            <a:br/>
+            <a:r>
+              <a:t>enumerated, plus GitHub and preprint servers.</a:t>
+            </a:r>
+          </a:p>
+        </p:txBody>
+      </p:sp>
+      <p:sp>
+        <p:nvSpPr>
+          <p:cNvPr id="12" name="TextBox 11"/>
+          <p:cNvSpPr txBox="1"/>
+          <p:nvPr/>
+        </p:nvSpPr>
+        <p:spPr>
+          <a:xfrm>
+            <a:off x="594360" y="5852160"/>
+            <a:ext cx="11064240" cy="594360"/>
+          </a:xfrm>
+          <a:prstGeom prst="rect">
+            <a:avLst/>
+          </a:prstGeom>
+          <a:noFill/>
+        </p:spPr>
+        <p:txBody>
+          <a:bodyPr wrap="square">
+            <a:spAutoFit/>
+          </a:bodyPr>
+          <a:lstStyle/>
+          <a:p>
             <a:pPr>
               <a:defRPr sz="1400" b="1">
                 <a:solidFill>
-                  <a:srgbClr val="1F4E79"/>
-                </a:solidFill>
-              </a:defRPr>
-            </a:pPr>
-            <a:r>
-              <a:t>The aim was not a list of related work, but to establish what is already solved, what provably cannot work, and where a real gap remains.</a:t>
+                  <a:srgbClr val="6B6B6B"/>
+                </a:solidFill>
+              </a:defRPr>
+            </a:pPr>
+            <a:r>
+              <a:t>Three independent sub-reviews, cross-checked: device adaptation · prevalence shift · aggregation theory.</a:t>
             </a:r>
           </a:p>
         </p:txBody>
@@ -3329,8 +3632,8 @@
         </p:nvSpPr>
         <p:spPr>
           <a:xfrm>
-            <a:off x="502920" y="320040"/>
-            <a:ext cx="11247120" cy="822960"/>
+            <a:off x="548640" y="347472"/>
+            <a:ext cx="11155680" cy="777240"/>
           </a:xfrm>
           <a:prstGeom prst="rect">
             <a:avLst/>
@@ -3344,26 +3647,26 @@
           <a:lstStyle/>
           <a:p>
             <a:pPr>
-              <a:defRPr sz="2700" b="1">
+              <a:defRPr sz="2800" b="1">
                 <a:solidFill>
                   <a:srgbClr val="1F4E79"/>
                 </a:solidFill>
               </a:defRPr>
             </a:pPr>
             <a:r>
-              <a:t>What the published literature establishes</a:t>
+              <a:t>What the literature establishes</a:t>
             </a:r>
           </a:p>
           <a:p>
             <a:pPr>
               <a:defRPr sz="1300">
                 <a:solidFill>
-                  <a:srgbClr val="5A5A5A"/>
-                </a:solidFill>
-              </a:defRPr>
-            </a:pPr>
-            <a:r>
-              <a:t>Peer-reviewed venue and approximate citation count given for each. Full links on the references slide.</a:t>
+                  <a:srgbClr val="6B6B6B"/>
+                </a:solidFill>
+              </a:defRPr>
+            </a:pPr>
+            <a:r>
+              <a:t>Venue and citation count for every claim.</a:t>
             </a:r>
           </a:p>
         </p:txBody>
@@ -3377,8 +3680,8 @@
           <p:nvPr/>
         </p:nvGraphicFramePr>
         <p:xfrm>
-          <a:off x="548640" y="1417320"/>
-          <a:ext cx="11155677" cy="4206240"/>
+          <a:off x="594360" y="1463040"/>
+          <a:ext cx="11064239" cy="3291840"/>
         </p:xfrm>
         <a:graphic>
           <a:graphicData uri="http://schemas.openxmlformats.org/drawingml/2006/table">
@@ -3387,35 +3690,28 @@
                 <a:tableStyleId>{5C22544A-7EE6-4342-B048-85BDC9FD1C3A}</a:tableStyleId>
               </a:tblPr>
               <a:tblGrid>
-                <a:gridCol w="6578990"/>
-                <a:gridCol w="1906953"/>
-                <a:gridCol w="1906953"/>
-                <a:gridCol w="762781"/>
+                <a:gridCol w="381525"/>
+                <a:gridCol w="5341357"/>
+                <a:gridCol w="2289153"/>
+                <a:gridCol w="2289153"/>
+                <a:gridCol w="763051"/>
               </a:tblGrid>
-              <a:tr h="525780">
+              <a:tr h="470262">
                 <a:tc>
                   <a:txBody>
                     <a:bodyPr/>
                     <a:lstStyle/>
                     <a:p>
                       <a:pPr algn="l">
-                        <a:defRPr sz="1000" b="1">
+                        <a:defRPr sz="1100" b="1">
                           <a:solidFill>
                             <a:srgbClr val="FFFFFF"/>
                           </a:solidFill>
                         </a:defRPr>
                       </a:pPr>
-                      <a:r>
-                        <a:rPr sz="1000" b="1">
-                          <a:solidFill>
-                            <a:srgbClr val="FFFFFF"/>
-                          </a:solidFill>
-                        </a:rPr>
-                        <a:t>Finding</a:t>
-                      </a:r>
                     </a:p>
                   </a:txBody>
-                  <a:tcPr marL="54864" marR="54864" marT="18288" marB="18288">
+                  <a:tcPr marL="64008" marR="64008" marT="22860" marB="22860">
                     <a:solidFill>
                       <a:srgbClr val="1F4E79"/>
                     </a:solidFill>
@@ -3427,23 +3723,23 @@
                     <a:lstStyle/>
                     <a:p>
                       <a:pPr algn="ctr">
-                        <a:defRPr sz="1000" b="1">
+                        <a:defRPr sz="1100" b="1">
                           <a:solidFill>
                             <a:srgbClr val="FFFFFF"/>
                           </a:solidFill>
                         </a:defRPr>
                       </a:pPr>
                       <a:r>
-                        <a:rPr sz="1000" b="1">
+                        <a:rPr sz="1100" b="1">
                           <a:solidFill>
                             <a:srgbClr val="FFFFFF"/>
                           </a:solidFill>
                         </a:rPr>
-                        <a:t>Evidence</a:t>
+                        <a:t>Finding</a:t>
                       </a:r>
                     </a:p>
                   </a:txBody>
-                  <a:tcPr marL="54864" marR="54864" marT="18288" marB="18288">
+                  <a:tcPr marL="64008" marR="64008" marT="22860" marB="22860">
                     <a:solidFill>
                       <a:srgbClr val="1F4E79"/>
                     </a:solidFill>
@@ -3455,23 +3751,23 @@
                     <a:lstStyle/>
                     <a:p>
                       <a:pPr algn="ctr">
-                        <a:defRPr sz="1000" b="1">
+                        <a:defRPr sz="1100" b="1">
                           <a:solidFill>
                             <a:srgbClr val="FFFFFF"/>
                           </a:solidFill>
                         </a:defRPr>
                       </a:pPr>
                       <a:r>
-                        <a:rPr sz="1000" b="1">
+                        <a:rPr sz="1100" b="1">
                           <a:solidFill>
                             <a:srgbClr val="FFFFFF"/>
                           </a:solidFill>
                         </a:rPr>
-                        <a:t>Venue</a:t>
+                        <a:t>Source</a:t>
                       </a:r>
                     </a:p>
                   </a:txBody>
-                  <a:tcPr marL="54864" marR="54864" marT="18288" marB="18288">
+                  <a:tcPr marL="64008" marR="64008" marT="22860" marB="22860">
                     <a:solidFill>
                       <a:srgbClr val="1F4E79"/>
                     </a:solidFill>
@@ -3483,14 +3779,42 @@
                     <a:lstStyle/>
                     <a:p>
                       <a:pPr algn="ctr">
-                        <a:defRPr sz="1000" b="1">
+                        <a:defRPr sz="1100" b="1">
                           <a:solidFill>
                             <a:srgbClr val="FFFFFF"/>
                           </a:solidFill>
                         </a:defRPr>
                       </a:pPr>
                       <a:r>
-                        <a:rPr sz="1000" b="1">
+                        <a:rPr sz="1100" b="1">
+                          <a:solidFill>
+                            <a:srgbClr val="FFFFFF"/>
+                          </a:solidFill>
+                        </a:rPr>
+                        <a:t>Venue</a:t>
+                      </a:r>
+                    </a:p>
+                  </a:txBody>
+                  <a:tcPr marL="64008" marR="64008" marT="22860" marB="22860">
+                    <a:solidFill>
+                      <a:srgbClr val="1F4E79"/>
+                    </a:solidFill>
+                  </a:tcPr>
+                </a:tc>
+                <a:tc>
+                  <a:txBody>
+                    <a:bodyPr/>
+                    <a:lstStyle/>
+                    <a:p>
+                      <a:pPr algn="ctr">
+                        <a:defRPr sz="1100" b="1">
+                          <a:solidFill>
+                            <a:srgbClr val="FFFFFF"/>
+                          </a:solidFill>
+                        </a:defRPr>
+                      </a:pPr>
+                      <a:r>
+                        <a:rPr sz="1100" b="1">
                           <a:solidFill>
                             <a:srgbClr val="FFFFFF"/>
                           </a:solidFill>
@@ -3499,71 +3823,37 @@
                       </a:r>
                     </a:p>
                   </a:txBody>
-                  <a:tcPr marL="54864" marR="54864" marT="18288" marB="18288">
+                  <a:tcPr marL="64008" marR="64008" marT="22860" marB="22860">
                     <a:solidFill>
                       <a:srgbClr val="1F4E79"/>
                     </a:solidFill>
                   </a:tcPr>
                 </a:tc>
               </a:tr>
-              <a:tr h="525780">
+              <a:tr h="470262">
                 <a:tc>
                   <a:txBody>
                     <a:bodyPr/>
                     <a:lstStyle/>
                     <a:p>
                       <a:pPr algn="l">
-                        <a:defRPr sz="1000" b="0">
+                        <a:defRPr sz="1100" b="0">
                           <a:solidFill>
                             <a:srgbClr val="1A1A1A"/>
                           </a:solidFill>
                         </a:defRPr>
                       </a:pPr>
                       <a:r>
-                        <a:rPr sz="1000" b="0">
+                        <a:rPr sz="1100" b="0">
                           <a:solidFill>
                             <a:srgbClr val="1A1A1A"/>
                           </a:solidFill>
                         </a:rPr>
-                        <a:t>Aggressive appearance / degradation augmentation is the single most</a:t>
-                      </a:r>
-                    </a:p>
-                    <a:p>
-                      <a:pPr algn="l">
-                        <a:defRPr sz="1000" b="0">
-                          <a:solidFill>
-                            <a:srgbClr val="1A1A1A"/>
-                          </a:solidFill>
-                        </a:defRPr>
-                      </a:pPr>
-                      <a:r>
-                        <a:rPr sz="1000" b="0">
-                          <a:solidFill>
-                            <a:srgbClr val="1A1A1A"/>
-                          </a:solidFill>
-                        </a:rPr>
-                        <a:t>effective intervention for cross-scanner shift — it beat stain</a:t>
-                      </a:r>
-                    </a:p>
-                    <a:p>
-                      <a:pPr algn="l">
-                        <a:defRPr sz="1000" b="0">
-                          <a:solidFill>
-                            <a:srgbClr val="1A1A1A"/>
-                          </a:solidFill>
-                        </a:defRPr>
-                      </a:pPr>
-                      <a:r>
-                        <a:rPr sz="1000" b="0">
-                          <a:solidFill>
-                            <a:srgbClr val="1A1A1A"/>
-                          </a:solidFill>
-                        </a:rPr>
-                        <a:t>normalisation and every adaptation method across 4 pathology tasks</a:t>
+                        <a:t>✓</a:t>
                       </a:r>
                     </a:p>
                   </a:txBody>
-                  <a:tcPr marL="54864" marR="54864" marT="18288" marB="18288">
+                  <a:tcPr marL="64008" marR="64008" marT="22860" marB="22860">
                     <a:solidFill>
                       <a:srgbClr val="FFFFFF"/>
                     </a:solidFill>
@@ -3575,23 +3865,40 @@
                     <a:lstStyle/>
                     <a:p>
                       <a:pPr algn="ctr">
-                        <a:defRPr sz="1000" b="0">
+                        <a:defRPr sz="1100" b="0">
                           <a:solidFill>
                             <a:srgbClr val="1A1A1A"/>
                           </a:solidFill>
                         </a:defRPr>
                       </a:pPr>
                       <a:r>
-                        <a:rPr sz="1000" b="0">
+                        <a:rPr sz="1100" b="0">
                           <a:solidFill>
                             <a:srgbClr val="1A1A1A"/>
                           </a:solidFill>
                         </a:rPr>
-                        <a:t>Tellez et al.</a:t>
+                        <a:t>Appearance augmentation beats every adaptation method</a:t>
+                      </a:r>
+                    </a:p>
+                    <a:p>
+                      <a:pPr algn="ctr">
+                        <a:defRPr sz="1100" b="0">
+                          <a:solidFill>
+                            <a:srgbClr val="1A1A1A"/>
+                          </a:solidFill>
+                        </a:defRPr>
+                      </a:pPr>
+                      <a:r>
+                        <a:rPr sz="1100" b="0">
+                          <a:solidFill>
+                            <a:srgbClr val="1A1A1A"/>
+                          </a:solidFill>
+                        </a:rPr>
+                        <a:t>tested for cross-scanner shift</a:t>
                       </a:r>
                     </a:p>
                   </a:txBody>
-                  <a:tcPr marL="54864" marR="54864" marT="18288" marB="18288">
+                  <a:tcPr marL="64008" marR="64008" marT="22860" marB="22860">
                     <a:solidFill>
                       <a:srgbClr val="FFFFFF"/>
                     </a:solidFill>
@@ -3603,40 +3910,23 @@
                     <a:lstStyle/>
                     <a:p>
                       <a:pPr algn="ctr">
-                        <a:defRPr sz="1000" b="0">
+                        <a:defRPr sz="1100" b="0">
                           <a:solidFill>
                             <a:srgbClr val="1A1A1A"/>
                           </a:solidFill>
                         </a:defRPr>
                       </a:pPr>
                       <a:r>
-                        <a:rPr sz="1000" b="0">
+                        <a:rPr sz="1100" b="0">
                           <a:solidFill>
                             <a:srgbClr val="1A1A1A"/>
                           </a:solidFill>
                         </a:rPr>
-                        <a:t>Medical Image</a:t>
-                      </a:r>
-                    </a:p>
-                    <a:p>
-                      <a:pPr algn="ctr">
-                        <a:defRPr sz="1000" b="0">
-                          <a:solidFill>
-                            <a:srgbClr val="1A1A1A"/>
-                          </a:solidFill>
-                        </a:defRPr>
-                      </a:pPr>
-                      <a:r>
-                        <a:rPr sz="1000" b="0">
-                          <a:solidFill>
-                            <a:srgbClr val="1A1A1A"/>
-                          </a:solidFill>
-                        </a:rPr>
-                        <a:t>Analysis 2019</a:t>
+                        <a:t>Tellez et al.</a:t>
                       </a:r>
                     </a:p>
                   </a:txBody>
-                  <a:tcPr marL="54864" marR="54864" marT="18288" marB="18288">
+                  <a:tcPr marL="64008" marR="64008" marT="22860" marB="22860">
                     <a:solidFill>
                       <a:srgbClr val="FFFFFF"/>
                     </a:solidFill>
@@ -3648,235 +3938,23 @@
                     <a:lstStyle/>
                     <a:p>
                       <a:pPr algn="ctr">
-                        <a:defRPr sz="1000" b="0">
+                        <a:defRPr sz="1100" b="0">
                           <a:solidFill>
                             <a:srgbClr val="1A1A1A"/>
                           </a:solidFill>
                         </a:defRPr>
                       </a:pPr>
                       <a:r>
-                        <a:rPr sz="1000" b="0">
+                        <a:rPr sz="1100" b="0">
                           <a:solidFill>
                             <a:srgbClr val="1A1A1A"/>
                           </a:solidFill>
                         </a:rPr>
-                        <a:t>656</a:t>
+                        <a:t>Med. Image Anal. 2019</a:t>
                       </a:r>
                     </a:p>
                   </a:txBody>
-                  <a:tcPr marL="54864" marR="54864" marT="18288" marB="18288">
-                    <a:solidFill>
-                      <a:srgbClr val="FFFFFF"/>
-                    </a:solidFill>
-                  </a:tcPr>
-                </a:tc>
-              </a:tr>
-              <a:tr h="525780">
-                <a:tc>
-                  <a:txBody>
-                    <a:bodyPr/>
-                    <a:lstStyle/>
-                    <a:p>
-                      <a:pPr algn="l">
-                        <a:defRPr sz="1000" b="0">
-                          <a:solidFill>
-                            <a:srgbClr val="1A1A1A"/>
-                          </a:solidFill>
-                        </a:defRPr>
-                      </a:pPr>
-                      <a:r>
-                        <a:rPr sz="1000" b="0">
-                          <a:solidFill>
-                            <a:srgbClr val="1A1A1A"/>
-                          </a:solidFill>
-                        </a:rPr>
-                        <a:t>For diabetic retinopathy across 6 fundus datasets, leave-one-domain-out</a:t>
-                      </a:r>
-                    </a:p>
-                    <a:p>
-                      <a:pPr algn="l">
-                        <a:defRPr sz="1000" b="0">
-                          <a:solidFill>
-                            <a:srgbClr val="1A1A1A"/>
-                          </a:solidFill>
-                        </a:defRPr>
-                      </a:pPr>
-                      <a:r>
-                        <a:rPr sz="1000" b="0">
-                          <a:solidFill>
-                            <a:srgbClr val="1A1A1A"/>
-                          </a:solidFill>
-                        </a:rPr>
-                        <a:t>AUC rises 75.9 → 82.6. The fundus augmentation component alone</a:t>
-                      </a:r>
-                    </a:p>
-                    <a:p>
-                      <a:pPr algn="l">
-                        <a:defRPr sz="1000" b="0">
-                          <a:solidFill>
-                            <a:srgbClr val="1A1A1A"/>
-                          </a:solidFill>
-                        </a:defRPr>
-                      </a:pPr>
-                      <a:r>
-                        <a:rPr sz="1000" b="0">
-                          <a:solidFill>
-                            <a:srgbClr val="1A1A1A"/>
-                          </a:solidFill>
-                        </a:rPr>
-                        <a:t>contributes +3.4 AUC points — the largest single factor</a:t>
-                      </a:r>
-                    </a:p>
-                  </a:txBody>
-                  <a:tcPr marL="54864" marR="54864" marT="18288" marB="18288">
-                    <a:solidFill>
-                      <a:srgbClr val="F2F4F7"/>
-                    </a:solidFill>
-                  </a:tcPr>
-                </a:tc>
-                <a:tc>
-                  <a:txBody>
-                    <a:bodyPr/>
-                    <a:lstStyle/>
-                    <a:p>
-                      <a:pPr algn="ctr">
-                        <a:defRPr sz="1000" b="0">
-                          <a:solidFill>
-                            <a:srgbClr val="1A1A1A"/>
-                          </a:solidFill>
-                        </a:defRPr>
-                      </a:pPr>
-                      <a:r>
-                        <a:rPr sz="1000" b="0">
-                          <a:solidFill>
-                            <a:srgbClr val="1A1A1A"/>
-                          </a:solidFill>
-                        </a:rPr>
-                        <a:t>Che et al. (GDRNet)</a:t>
-                      </a:r>
-                    </a:p>
-                  </a:txBody>
-                  <a:tcPr marL="54864" marR="54864" marT="18288" marB="18288">
-                    <a:solidFill>
-                      <a:srgbClr val="F2F4F7"/>
-                    </a:solidFill>
-                  </a:tcPr>
-                </a:tc>
-                <a:tc>
-                  <a:txBody>
-                    <a:bodyPr/>
-                    <a:lstStyle/>
-                    <a:p>
-                      <a:pPr algn="ctr">
-                        <a:defRPr sz="1000" b="0">
-                          <a:solidFill>
-                            <a:srgbClr val="1A1A1A"/>
-                          </a:solidFill>
-                        </a:defRPr>
-                      </a:pPr>
-                      <a:r>
-                        <a:rPr sz="1000" b="0">
-                          <a:solidFill>
-                            <a:srgbClr val="1A1A1A"/>
-                          </a:solidFill>
-                        </a:rPr>
-                        <a:t>MICCAI 2023</a:t>
-                      </a:r>
-                    </a:p>
-                  </a:txBody>
-                  <a:tcPr marL="54864" marR="54864" marT="18288" marB="18288">
-                    <a:solidFill>
-                      <a:srgbClr val="F2F4F7"/>
-                    </a:solidFill>
-                  </a:tcPr>
-                </a:tc>
-                <a:tc>
-                  <a:txBody>
-                    <a:bodyPr/>
-                    <a:lstStyle/>
-                    <a:p>
-                      <a:pPr algn="ctr">
-                        <a:defRPr sz="1000" b="0">
-                          <a:solidFill>
-                            <a:srgbClr val="1A1A1A"/>
-                          </a:solidFill>
-                        </a:defRPr>
-                      </a:pPr>
-                      <a:r>
-                        <a:rPr sz="1000" b="0">
-                          <a:solidFill>
-                            <a:srgbClr val="1A1A1A"/>
-                          </a:solidFill>
-                        </a:rPr>
-                        <a:t>46</a:t>
-                      </a:r>
-                    </a:p>
-                  </a:txBody>
-                  <a:tcPr marL="54864" marR="54864" marT="18288" marB="18288">
-                    <a:solidFill>
-                      <a:srgbClr val="F2F4F7"/>
-                    </a:solidFill>
-                  </a:tcPr>
-                </a:tc>
-              </a:tr>
-              <a:tr h="525780">
-                <a:tc>
-                  <a:txBody>
-                    <a:bodyPr/>
-                    <a:lstStyle/>
-                    <a:p>
-                      <a:pPr algn="l">
-                        <a:defRPr sz="1000" b="0">
-                          <a:solidFill>
-                            <a:srgbClr val="1A1A1A"/>
-                          </a:solidFill>
-                        </a:defRPr>
-                      </a:pPr>
-                      <a:r>
-                        <a:rPr sz="1000" b="0">
-                          <a:solidFill>
-                            <a:srgbClr val="1A1A1A"/>
-                          </a:solidFill>
-                        </a:rPr>
-                        <a:t>Adversarial and generative adaptation COLLAPSE on real tabletop →</a:t>
-                      </a:r>
-                    </a:p>
-                    <a:p>
-                      <a:pPr algn="l">
-                        <a:defRPr sz="1000" b="0">
-                          <a:solidFill>
-                            <a:srgbClr val="1A1A1A"/>
-                          </a:solidFill>
-                        </a:defRPr>
-                      </a:pPr>
-                      <a:r>
-                        <a:rPr sz="1000" b="0">
-                          <a:solidFill>
-                            <a:srgbClr val="1A1A1A"/>
-                          </a:solidFill>
-                        </a:rPr>
-                        <a:t>portable fundus data: DANN R² −0.025, MDD −0.010, CycleGAN no change,</a:t>
-                      </a:r>
-                    </a:p>
-                    <a:p>
-                      <a:pPr algn="l">
-                        <a:defRPr sz="1000" b="0">
-                          <a:solidFill>
-                            <a:srgbClr val="1A1A1A"/>
-                          </a:solidFill>
-                        </a:defRPr>
-                      </a:pPr>
-                      <a:r>
-                        <a:rPr sz="1000" b="0">
-                          <a:solidFill>
-                            <a:srgbClr val="1A1A1A"/>
-                          </a:solidFill>
-                        </a:rPr>
-                        <a:t>against a 0.361 baseline</a:t>
-                      </a:r>
-                    </a:p>
-                  </a:txBody>
-                  <a:tcPr marL="54864" marR="54864" marT="18288" marB="18288">
+                  <a:tcPr marL="64008" marR="64008" marT="22860" marB="22860">
                     <a:solidFill>
                       <a:srgbClr val="FFFFFF"/>
                     </a:solidFill>
@@ -3888,23 +3966,212 @@
                     <a:lstStyle/>
                     <a:p>
                       <a:pPr algn="ctr">
-                        <a:defRPr sz="1000" b="0">
+                        <a:defRPr sz="1100" b="0">
                           <a:solidFill>
                             <a:srgbClr val="1A1A1A"/>
                           </a:solidFill>
                         </a:defRPr>
                       </a:pPr>
                       <a:r>
-                        <a:rPr sz="1000" b="0">
+                        <a:rPr sz="1100" b="0">
                           <a:solidFill>
                             <a:srgbClr val="1A1A1A"/>
                           </a:solidFill>
                         </a:rPr>
-                        <a:t>Lin et al.</a:t>
+                        <a:t>656</a:t>
                       </a:r>
                     </a:p>
                   </a:txBody>
-                  <a:tcPr marL="54864" marR="54864" marT="18288" marB="18288">
+                  <a:tcPr marL="64008" marR="64008" marT="22860" marB="22860">
+                    <a:solidFill>
+                      <a:srgbClr val="FFFFFF"/>
+                    </a:solidFill>
+                  </a:tcPr>
+                </a:tc>
+              </a:tr>
+              <a:tr h="470262">
+                <a:tc>
+                  <a:txBody>
+                    <a:bodyPr/>
+                    <a:lstStyle/>
+                    <a:p>
+                      <a:pPr algn="l">
+                        <a:defRPr sz="1100" b="0">
+                          <a:solidFill>
+                            <a:srgbClr val="1A1A1A"/>
+                          </a:solidFill>
+                        </a:defRPr>
+                      </a:pPr>
+                      <a:r>
+                        <a:rPr sz="1100" b="0">
+                          <a:solidFill>
+                            <a:srgbClr val="1A1A1A"/>
+                          </a:solidFill>
+                        </a:rPr>
+                        <a:t>✓</a:t>
+                      </a:r>
+                    </a:p>
+                  </a:txBody>
+                  <a:tcPr marL="64008" marR="64008" marT="22860" marB="22860">
+                    <a:solidFill>
+                      <a:srgbClr val="F3F5F8"/>
+                    </a:solidFill>
+                  </a:tcPr>
+                </a:tc>
+                <a:tc>
+                  <a:txBody>
+                    <a:bodyPr/>
+                    <a:lstStyle/>
+                    <a:p>
+                      <a:pPr algn="ctr">
+                        <a:defRPr sz="1100" b="0">
+                          <a:solidFill>
+                            <a:srgbClr val="1A1A1A"/>
+                          </a:solidFill>
+                        </a:defRPr>
+                      </a:pPr>
+                      <a:r>
+                        <a:rPr sz="1100" b="0">
+                          <a:solidFill>
+                            <a:srgbClr val="1A1A1A"/>
+                          </a:solidFill>
+                        </a:rPr>
+                        <a:t>Fundus DR across 6 datasets: AUC 75.9 → 82.6.</a:t>
+                      </a:r>
+                    </a:p>
+                    <a:p>
+                      <a:pPr algn="ctr">
+                        <a:defRPr sz="1100" b="0">
+                          <a:solidFill>
+                            <a:srgbClr val="1A1A1A"/>
+                          </a:solidFill>
+                        </a:defRPr>
+                      </a:pPr>
+                      <a:r>
+                        <a:rPr sz="1100" b="0">
+                          <a:solidFill>
+                            <a:srgbClr val="1A1A1A"/>
+                          </a:solidFill>
+                        </a:rPr>
+                        <a:t>Augmentation alone contributes +3.4</a:t>
+                      </a:r>
+                    </a:p>
+                  </a:txBody>
+                  <a:tcPr marL="64008" marR="64008" marT="22860" marB="22860">
+                    <a:solidFill>
+                      <a:srgbClr val="F3F5F8"/>
+                    </a:solidFill>
+                  </a:tcPr>
+                </a:tc>
+                <a:tc>
+                  <a:txBody>
+                    <a:bodyPr/>
+                    <a:lstStyle/>
+                    <a:p>
+                      <a:pPr algn="ctr">
+                        <a:defRPr sz="1100" b="0">
+                          <a:solidFill>
+                            <a:srgbClr val="1A1A1A"/>
+                          </a:solidFill>
+                        </a:defRPr>
+                      </a:pPr>
+                      <a:r>
+                        <a:rPr sz="1100" b="0">
+                          <a:solidFill>
+                            <a:srgbClr val="1A1A1A"/>
+                          </a:solidFill>
+                        </a:rPr>
+                        <a:t>Che et al. (GDRNet)</a:t>
+                      </a:r>
+                    </a:p>
+                  </a:txBody>
+                  <a:tcPr marL="64008" marR="64008" marT="22860" marB="22860">
+                    <a:solidFill>
+                      <a:srgbClr val="F3F5F8"/>
+                    </a:solidFill>
+                  </a:tcPr>
+                </a:tc>
+                <a:tc>
+                  <a:txBody>
+                    <a:bodyPr/>
+                    <a:lstStyle/>
+                    <a:p>
+                      <a:pPr algn="ctr">
+                        <a:defRPr sz="1100" b="0">
+                          <a:solidFill>
+                            <a:srgbClr val="1A1A1A"/>
+                          </a:solidFill>
+                        </a:defRPr>
+                      </a:pPr>
+                      <a:r>
+                        <a:rPr sz="1100" b="0">
+                          <a:solidFill>
+                            <a:srgbClr val="1A1A1A"/>
+                          </a:solidFill>
+                        </a:rPr>
+                        <a:t>MICCAI 2023</a:t>
+                      </a:r>
+                    </a:p>
+                  </a:txBody>
+                  <a:tcPr marL="64008" marR="64008" marT="22860" marB="22860">
+                    <a:solidFill>
+                      <a:srgbClr val="F3F5F8"/>
+                    </a:solidFill>
+                  </a:tcPr>
+                </a:tc>
+                <a:tc>
+                  <a:txBody>
+                    <a:bodyPr/>
+                    <a:lstStyle/>
+                    <a:p>
+                      <a:pPr algn="ctr">
+                        <a:defRPr sz="1100" b="0">
+                          <a:solidFill>
+                            <a:srgbClr val="1A1A1A"/>
+                          </a:solidFill>
+                        </a:defRPr>
+                      </a:pPr>
+                      <a:r>
+                        <a:rPr sz="1100" b="0">
+                          <a:solidFill>
+                            <a:srgbClr val="1A1A1A"/>
+                          </a:solidFill>
+                        </a:rPr>
+                        <a:t>46</a:t>
+                      </a:r>
+                    </a:p>
+                  </a:txBody>
+                  <a:tcPr marL="64008" marR="64008" marT="22860" marB="22860">
+                    <a:solidFill>
+                      <a:srgbClr val="F3F5F8"/>
+                    </a:solidFill>
+                  </a:tcPr>
+                </a:tc>
+              </a:tr>
+              <a:tr h="470262">
+                <a:tc>
+                  <a:txBody>
+                    <a:bodyPr/>
+                    <a:lstStyle/>
+                    <a:p>
+                      <a:pPr algn="l">
+                        <a:defRPr sz="1100" b="0">
+                          <a:solidFill>
+                            <a:srgbClr val="1A1A1A"/>
+                          </a:solidFill>
+                        </a:defRPr>
+                      </a:pPr>
+                      <a:r>
+                        <a:rPr sz="1100" b="0">
+                          <a:solidFill>
+                            <a:srgbClr val="1A1A1A"/>
+                          </a:solidFill>
+                        </a:rPr>
+                        <a:t>✗</a:t>
+                      </a:r>
+                    </a:p>
+                  </a:txBody>
+                  <a:tcPr marL="64008" marR="64008" marT="22860" marB="22860">
                     <a:solidFill>
                       <a:srgbClr val="FFFFFF"/>
                     </a:solidFill>
@@ -3916,23 +4183,40 @@
                     <a:lstStyle/>
                     <a:p>
                       <a:pPr algn="ctr">
-                        <a:defRPr sz="1000" b="0">
+                        <a:defRPr sz="1100" b="0">
                           <a:solidFill>
                             <a:srgbClr val="1A1A1A"/>
                           </a:solidFill>
                         </a:defRPr>
                       </a:pPr>
                       <a:r>
-                        <a:rPr sz="1000" b="0">
+                        <a:rPr sz="1100" b="0">
                           <a:solidFill>
                             <a:srgbClr val="1A1A1A"/>
                           </a:solidFill>
                         </a:rPr>
-                        <a:t>MICCAI 2022</a:t>
+                        <a:t>DANN, MDD, CycleGAN all COLLAPSE on real</a:t>
+                      </a:r>
+                    </a:p>
+                    <a:p>
+                      <a:pPr algn="ctr">
+                        <a:defRPr sz="1100" b="0">
+                          <a:solidFill>
+                            <a:srgbClr val="1A1A1A"/>
+                          </a:solidFill>
+                        </a:defRPr>
+                      </a:pPr>
+                      <a:r>
+                        <a:rPr sz="1100" b="0">
+                          <a:solidFill>
+                            <a:srgbClr val="1A1A1A"/>
+                          </a:solidFill>
+                        </a:rPr>
+                        <a:t>tabletop → portable fundus data</a:t>
                       </a:r>
                     </a:p>
                   </a:txBody>
-                  <a:tcPr marL="54864" marR="54864" marT="18288" marB="18288">
+                  <a:tcPr marL="64008" marR="64008" marT="22860" marB="22860">
                     <a:solidFill>
                       <a:srgbClr val="FFFFFF"/>
                     </a:solidFill>
@@ -3944,218 +4228,23 @@
                     <a:lstStyle/>
                     <a:p>
                       <a:pPr algn="ctr">
-                        <a:defRPr sz="1000" b="0">
+                        <a:defRPr sz="1100" b="0">
                           <a:solidFill>
                             <a:srgbClr val="1A1A1A"/>
                           </a:solidFill>
                         </a:defRPr>
                       </a:pPr>
                       <a:r>
-                        <a:rPr sz="1000" b="0">
+                        <a:rPr sz="1100" b="0">
                           <a:solidFill>
                             <a:srgbClr val="1A1A1A"/>
                           </a:solidFill>
                         </a:rPr>
-                        <a:t>5</a:t>
+                        <a:t>Lin et al.</a:t>
                       </a:r>
                     </a:p>
                   </a:txBody>
-                  <a:tcPr marL="54864" marR="54864" marT="18288" marB="18288">
-                    <a:solidFill>
-                      <a:srgbClr val="FFFFFF"/>
-                    </a:solidFill>
-                  </a:tcPr>
-                </a:tc>
-              </a:tr>
-              <a:tr h="525780">
-                <a:tc>
-                  <a:txBody>
-                    <a:bodyPr/>
-                    <a:lstStyle/>
-                    <a:p>
-                      <a:pPr algn="l">
-                        <a:defRPr sz="1000" b="0">
-                          <a:solidFill>
-                            <a:srgbClr val="1A1A1A"/>
-                          </a:solidFill>
-                        </a:defRPr>
-                      </a:pPr>
-                      <a:r>
-                        <a:rPr sz="1000" b="0">
-                          <a:solidFill>
-                            <a:srgbClr val="1A1A1A"/>
-                          </a:solidFill>
-                        </a:rPr>
-                        <a:t>Under a fair model-selection protocol, no domain-generalization</a:t>
-                      </a:r>
-                    </a:p>
-                    <a:p>
-                      <a:pPr algn="l">
-                        <a:defRPr sz="1000" b="0">
-                          <a:solidFill>
-                            <a:srgbClr val="1A1A1A"/>
-                          </a:solidFill>
-                        </a:defRPr>
-                      </a:pPr>
-                      <a:r>
-                        <a:rPr sz="1000" b="0">
-                          <a:solidFill>
-                            <a:srgbClr val="1A1A1A"/>
-                          </a:solidFill>
-                        </a:rPr>
-                        <a:t>algorithm reliably beats plain empirical risk minimisation</a:t>
-                      </a:r>
-                    </a:p>
-                  </a:txBody>
-                  <a:tcPr marL="54864" marR="54864" marT="18288" marB="18288">
-                    <a:solidFill>
-                      <a:srgbClr val="F2F4F7"/>
-                    </a:solidFill>
-                  </a:tcPr>
-                </a:tc>
-                <a:tc>
-                  <a:txBody>
-                    <a:bodyPr/>
-                    <a:lstStyle/>
-                    <a:p>
-                      <a:pPr algn="ctr">
-                        <a:defRPr sz="1000" b="0">
-                          <a:solidFill>
-                            <a:srgbClr val="1A1A1A"/>
-                          </a:solidFill>
-                        </a:defRPr>
-                      </a:pPr>
-                      <a:r>
-                        <a:rPr sz="1000" b="0">
-                          <a:solidFill>
-                            <a:srgbClr val="1A1A1A"/>
-                          </a:solidFill>
-                        </a:rPr>
-                        <a:t>Gulrajani &amp;</a:t>
-                      </a:r>
-                    </a:p>
-                    <a:p>
-                      <a:pPr algn="ctr">
-                        <a:defRPr sz="1000" b="0">
-                          <a:solidFill>
-                            <a:srgbClr val="1A1A1A"/>
-                          </a:solidFill>
-                        </a:defRPr>
-                      </a:pPr>
-                      <a:r>
-                        <a:rPr sz="1000" b="0">
-                          <a:solidFill>
-                            <a:srgbClr val="1A1A1A"/>
-                          </a:solidFill>
-                        </a:rPr>
-                        <a:t>Lopez-Paz</a:t>
-                      </a:r>
-                    </a:p>
-                  </a:txBody>
-                  <a:tcPr marL="54864" marR="54864" marT="18288" marB="18288">
-                    <a:solidFill>
-                      <a:srgbClr val="F2F4F7"/>
-                    </a:solidFill>
-                  </a:tcPr>
-                </a:tc>
-                <a:tc>
-                  <a:txBody>
-                    <a:bodyPr/>
-                    <a:lstStyle/>
-                    <a:p>
-                      <a:pPr algn="ctr">
-                        <a:defRPr sz="1000" b="0">
-                          <a:solidFill>
-                            <a:srgbClr val="1A1A1A"/>
-                          </a:solidFill>
-                        </a:defRPr>
-                      </a:pPr>
-                      <a:r>
-                        <a:rPr sz="1000" b="0">
-                          <a:solidFill>
-                            <a:srgbClr val="1A1A1A"/>
-                          </a:solidFill>
-                        </a:rPr>
-                        <a:t>ICLR 2021</a:t>
-                      </a:r>
-                    </a:p>
-                  </a:txBody>
-                  <a:tcPr marL="54864" marR="54864" marT="18288" marB="18288">
-                    <a:solidFill>
-                      <a:srgbClr val="F2F4F7"/>
-                    </a:solidFill>
-                  </a:tcPr>
-                </a:tc>
-                <a:tc>
-                  <a:txBody>
-                    <a:bodyPr/>
-                    <a:lstStyle/>
-                    <a:p>
-                      <a:pPr algn="ctr">
-                        <a:defRPr sz="1000" b="0">
-                          <a:solidFill>
-                            <a:srgbClr val="1A1A1A"/>
-                          </a:solidFill>
-                        </a:defRPr>
-                      </a:pPr>
-                      <a:r>
-                        <a:rPr sz="1000" b="0">
-                          <a:solidFill>
-                            <a:srgbClr val="1A1A1A"/>
-                          </a:solidFill>
-                        </a:rPr>
-                        <a:t>1,504</a:t>
-                      </a:r>
-                    </a:p>
-                  </a:txBody>
-                  <a:tcPr marL="54864" marR="54864" marT="18288" marB="18288">
-                    <a:solidFill>
-                      <a:srgbClr val="F2F4F7"/>
-                    </a:solidFill>
-                  </a:tcPr>
-                </a:tc>
-              </a:tr>
-              <a:tr h="525780">
-                <a:tc>
-                  <a:txBody>
-                    <a:bodyPr/>
-                    <a:lstStyle/>
-                    <a:p>
-                      <a:pPr algn="l">
-                        <a:defRPr sz="1000" b="0">
-                          <a:solidFill>
-                            <a:srgbClr val="1A1A1A"/>
-                          </a:solidFill>
-                        </a:defRPr>
-                      </a:pPr>
-                      <a:r>
-                        <a:rPr sz="1000" b="0">
-                          <a:solidFill>
-                            <a:srgbClr val="1A1A1A"/>
-                          </a:solidFill>
-                        </a:rPr>
-                        <a:t>Test-time adaptation degrades accuracy by up to 66 points when applied</a:t>
-                      </a:r>
-                    </a:p>
-                    <a:p>
-                      <a:pPr algn="l">
-                        <a:defRPr sz="1000" b="0">
-                          <a:solidFill>
-                            <a:srgbClr val="1A1A1A"/>
-                          </a:solidFill>
-                        </a:defRPr>
-                      </a:pPr>
-                      <a:r>
-                        <a:rPr sz="1000" b="0">
-                          <a:solidFill>
-                            <a:srgbClr val="1A1A1A"/>
-                          </a:solidFill>
-                        </a:rPr>
-                        <a:t>under non-i.i.d. and prior-shifted conditions — precisely our regime</a:t>
-                      </a:r>
-                    </a:p>
-                  </a:txBody>
-                  <a:tcPr marL="54864" marR="54864" marT="18288" marB="18288">
+                  <a:tcPr marL="64008" marR="64008" marT="22860" marB="22860">
                     <a:solidFill>
                       <a:srgbClr val="FFFFFF"/>
                     </a:solidFill>
@@ -4167,23 +4256,23 @@
                     <a:lstStyle/>
                     <a:p>
                       <a:pPr algn="ctr">
-                        <a:defRPr sz="1000" b="0">
+                        <a:defRPr sz="1100" b="0">
                           <a:solidFill>
                             <a:srgbClr val="1A1A1A"/>
                           </a:solidFill>
                         </a:defRPr>
                       </a:pPr>
                       <a:r>
-                        <a:rPr sz="1000" b="0">
+                        <a:rPr sz="1100" b="0">
                           <a:solidFill>
                             <a:srgbClr val="1A1A1A"/>
                           </a:solidFill>
                         </a:rPr>
-                        <a:t>Boudiaf et al. (LAME)</a:t>
+                        <a:t>MICCAI 2022</a:t>
                       </a:r>
                     </a:p>
                   </a:txBody>
-                  <a:tcPr marL="54864" marR="54864" marT="18288" marB="18288">
+                  <a:tcPr marL="64008" marR="64008" marT="22860" marB="22860">
                     <a:solidFill>
                       <a:srgbClr val="FFFFFF"/>
                     </a:solidFill>
@@ -4195,23 +4284,212 @@
                     <a:lstStyle/>
                     <a:p>
                       <a:pPr algn="ctr">
-                        <a:defRPr sz="1000" b="0">
+                        <a:defRPr sz="1100" b="0">
                           <a:solidFill>
                             <a:srgbClr val="1A1A1A"/>
                           </a:solidFill>
                         </a:defRPr>
                       </a:pPr>
                       <a:r>
-                        <a:rPr sz="1000" b="0">
+                        <a:rPr sz="1100" b="0">
                           <a:solidFill>
                             <a:srgbClr val="1A1A1A"/>
                           </a:solidFill>
                         </a:rPr>
-                        <a:t>CVPR 2022</a:t>
+                        <a:t>5</a:t>
                       </a:r>
                     </a:p>
                   </a:txBody>
-                  <a:tcPr marL="54864" marR="54864" marT="18288" marB="18288">
+                  <a:tcPr marL="64008" marR="64008" marT="22860" marB="22860">
+                    <a:solidFill>
+                      <a:srgbClr val="FFFFFF"/>
+                    </a:solidFill>
+                  </a:tcPr>
+                </a:tc>
+              </a:tr>
+              <a:tr h="470262">
+                <a:tc>
+                  <a:txBody>
+                    <a:bodyPr/>
+                    <a:lstStyle/>
+                    <a:p>
+                      <a:pPr algn="l">
+                        <a:defRPr sz="1100" b="0">
+                          <a:solidFill>
+                            <a:srgbClr val="1A1A1A"/>
+                          </a:solidFill>
+                        </a:defRPr>
+                      </a:pPr>
+                      <a:r>
+                        <a:rPr sz="1100" b="0">
+                          <a:solidFill>
+                            <a:srgbClr val="1A1A1A"/>
+                          </a:solidFill>
+                        </a:rPr>
+                        <a:t>✗</a:t>
+                      </a:r>
+                    </a:p>
+                  </a:txBody>
+                  <a:tcPr marL="64008" marR="64008" marT="22860" marB="22860">
+                    <a:solidFill>
+                      <a:srgbClr val="F3F5F8"/>
+                    </a:solidFill>
+                  </a:tcPr>
+                </a:tc>
+                <a:tc>
+                  <a:txBody>
+                    <a:bodyPr/>
+                    <a:lstStyle/>
+                    <a:p>
+                      <a:pPr algn="ctr">
+                        <a:defRPr sz="1100" b="0">
+                          <a:solidFill>
+                            <a:srgbClr val="1A1A1A"/>
+                          </a:solidFill>
+                        </a:defRPr>
+                      </a:pPr>
+                      <a:r>
+                        <a:rPr sz="1100" b="0">
+                          <a:solidFill>
+                            <a:srgbClr val="1A1A1A"/>
+                          </a:solidFill>
+                        </a:rPr>
+                        <a:t>No domain-generalization method reliably beats</a:t>
+                      </a:r>
+                    </a:p>
+                    <a:p>
+                      <a:pPr algn="ctr">
+                        <a:defRPr sz="1100" b="0">
+                          <a:solidFill>
+                            <a:srgbClr val="1A1A1A"/>
+                          </a:solidFill>
+                        </a:defRPr>
+                      </a:pPr>
+                      <a:r>
+                        <a:rPr sz="1100" b="0">
+                          <a:solidFill>
+                            <a:srgbClr val="1A1A1A"/>
+                          </a:solidFill>
+                        </a:rPr>
+                        <a:t>plain training under fair evaluation</a:t>
+                      </a:r>
+                    </a:p>
+                  </a:txBody>
+                  <a:tcPr marL="64008" marR="64008" marT="22860" marB="22860">
+                    <a:solidFill>
+                      <a:srgbClr val="F3F5F8"/>
+                    </a:solidFill>
+                  </a:tcPr>
+                </a:tc>
+                <a:tc>
+                  <a:txBody>
+                    <a:bodyPr/>
+                    <a:lstStyle/>
+                    <a:p>
+                      <a:pPr algn="ctr">
+                        <a:defRPr sz="1100" b="0">
+                          <a:solidFill>
+                            <a:srgbClr val="1A1A1A"/>
+                          </a:solidFill>
+                        </a:defRPr>
+                      </a:pPr>
+                      <a:r>
+                        <a:rPr sz="1100" b="0">
+                          <a:solidFill>
+                            <a:srgbClr val="1A1A1A"/>
+                          </a:solidFill>
+                        </a:rPr>
+                        <a:t>Gulrajani &amp; Lopez-Paz</a:t>
+                      </a:r>
+                    </a:p>
+                  </a:txBody>
+                  <a:tcPr marL="64008" marR="64008" marT="22860" marB="22860">
+                    <a:solidFill>
+                      <a:srgbClr val="F3F5F8"/>
+                    </a:solidFill>
+                  </a:tcPr>
+                </a:tc>
+                <a:tc>
+                  <a:txBody>
+                    <a:bodyPr/>
+                    <a:lstStyle/>
+                    <a:p>
+                      <a:pPr algn="ctr">
+                        <a:defRPr sz="1100" b="0">
+                          <a:solidFill>
+                            <a:srgbClr val="1A1A1A"/>
+                          </a:solidFill>
+                        </a:defRPr>
+                      </a:pPr>
+                      <a:r>
+                        <a:rPr sz="1100" b="0">
+                          <a:solidFill>
+                            <a:srgbClr val="1A1A1A"/>
+                          </a:solidFill>
+                        </a:rPr>
+                        <a:t>ICLR 2021</a:t>
+                      </a:r>
+                    </a:p>
+                  </a:txBody>
+                  <a:tcPr marL="64008" marR="64008" marT="22860" marB="22860">
+                    <a:solidFill>
+                      <a:srgbClr val="F3F5F8"/>
+                    </a:solidFill>
+                  </a:tcPr>
+                </a:tc>
+                <a:tc>
+                  <a:txBody>
+                    <a:bodyPr/>
+                    <a:lstStyle/>
+                    <a:p>
+                      <a:pPr algn="ctr">
+                        <a:defRPr sz="1100" b="0">
+                          <a:solidFill>
+                            <a:srgbClr val="1A1A1A"/>
+                          </a:solidFill>
+                        </a:defRPr>
+                      </a:pPr>
+                      <a:r>
+                        <a:rPr sz="1100" b="0">
+                          <a:solidFill>
+                            <a:srgbClr val="1A1A1A"/>
+                          </a:solidFill>
+                        </a:rPr>
+                        <a:t>1,504</a:t>
+                      </a:r>
+                    </a:p>
+                  </a:txBody>
+                  <a:tcPr marL="64008" marR="64008" marT="22860" marB="22860">
+                    <a:solidFill>
+                      <a:srgbClr val="F3F5F8"/>
+                    </a:solidFill>
+                  </a:tcPr>
+                </a:tc>
+              </a:tr>
+              <a:tr h="470262">
+                <a:tc>
+                  <a:txBody>
+                    <a:bodyPr/>
+                    <a:lstStyle/>
+                    <a:p>
+                      <a:pPr algn="l">
+                        <a:defRPr sz="1100" b="0">
+                          <a:solidFill>
+                            <a:srgbClr val="1A1A1A"/>
+                          </a:solidFill>
+                        </a:defRPr>
+                      </a:pPr>
+                      <a:r>
+                        <a:rPr sz="1100" b="0">
+                          <a:solidFill>
+                            <a:srgbClr val="1A1A1A"/>
+                          </a:solidFill>
+                        </a:rPr>
+                        <a:t>✗</a:t>
+                      </a:r>
+                    </a:p>
+                  </a:txBody>
+                  <a:tcPr marL="64008" marR="64008" marT="22860" marB="22860">
                     <a:solidFill>
                       <a:srgbClr val="FFFFFF"/>
                     </a:solidFill>
@@ -4223,235 +4501,40 @@
                     <a:lstStyle/>
                     <a:p>
                       <a:pPr algn="ctr">
-                        <a:defRPr sz="1000" b="0">
+                        <a:defRPr sz="1100" b="0">
                           <a:solidFill>
                             <a:srgbClr val="1A1A1A"/>
                           </a:solidFill>
                         </a:defRPr>
                       </a:pPr>
                       <a:r>
-                        <a:rPr sz="1000" b="0">
+                        <a:rPr sz="1100" b="0">
                           <a:solidFill>
                             <a:srgbClr val="1A1A1A"/>
                           </a:solidFill>
                         </a:rPr>
-                        <a:t>250</a:t>
-                      </a:r>
-                    </a:p>
-                  </a:txBody>
-                  <a:tcPr marL="54864" marR="54864" marT="18288" marB="18288">
-                    <a:solidFill>
-                      <a:srgbClr val="FFFFFF"/>
-                    </a:solidFill>
-                  </a:tcPr>
-                </a:tc>
-              </a:tr>
-              <a:tr h="525780">
-                <a:tc>
-                  <a:txBody>
-                    <a:bodyPr/>
-                    <a:lstStyle/>
-                    <a:p>
-                      <a:pPr algn="l">
-                        <a:defRPr sz="1000" b="0">
-                          <a:solidFill>
-                            <a:srgbClr val="1A1A1A"/>
-                          </a:solidFill>
-                        </a:defRPr>
-                      </a:pPr>
-                      <a:r>
-                        <a:rPr sz="1000" b="0">
-                          <a:solidFill>
-                            <a:srgbClr val="1A1A1A"/>
-                          </a:solidFill>
-                        </a:rPr>
-                        <a:t>Unsupervised correction of the prediction distribution restores the</a:t>
-                      </a:r>
-                    </a:p>
-                    <a:p>
-                      <a:pPr algn="l">
-                        <a:defRPr sz="1000" b="0">
-                          <a:solidFill>
-                            <a:srgbClr val="1A1A1A"/>
-                          </a:solidFill>
-                        </a:defRPr>
-                      </a:pPr>
-                      <a:r>
-                        <a:rPr sz="1000" b="0">
-                          <a:solidFill>
-                            <a:srgbClr val="1A1A1A"/>
-                          </a:solidFill>
-                        </a:rPr>
-                        <a:t>operating point across 4 mammography scanners with NO target labels</a:t>
-                      </a:r>
-                    </a:p>
-                    <a:p>
-                      <a:pPr algn="l">
-                        <a:defRPr sz="1000" b="0">
-                          <a:solidFill>
-                            <a:srgbClr val="1A1A1A"/>
-                          </a:solidFill>
-                        </a:defRPr>
-                      </a:pPr>
-                      <a:r>
-                        <a:rPr sz="1000" b="0">
-                          <a:solidFill>
-                            <a:srgbClr val="1A1A1A"/>
-                          </a:solidFill>
-                        </a:rPr>
-                        <a:t>(Youden 0.295 → 0.651), but assumes prevalence is preserved</a:t>
-                      </a:r>
-                    </a:p>
-                  </a:txBody>
-                  <a:tcPr marL="54864" marR="54864" marT="18288" marB="18288">
-                    <a:solidFill>
-                      <a:srgbClr val="F2F4F7"/>
-                    </a:solidFill>
-                  </a:tcPr>
-                </a:tc>
-                <a:tc>
-                  <a:txBody>
-                    <a:bodyPr/>
-                    <a:lstStyle/>
-                    <a:p>
-                      <a:pPr algn="ctr">
-                        <a:defRPr sz="1000" b="0">
-                          <a:solidFill>
-                            <a:srgbClr val="1A1A1A"/>
-                          </a:solidFill>
-                        </a:defRPr>
-                      </a:pPr>
-                      <a:r>
-                        <a:rPr sz="1000" b="0">
-                          <a:solidFill>
-                            <a:srgbClr val="1A1A1A"/>
-                          </a:solidFill>
-                        </a:rPr>
-                        <a:t>Roschewitz et al.</a:t>
-                      </a:r>
-                    </a:p>
-                  </a:txBody>
-                  <a:tcPr marL="54864" marR="54864" marT="18288" marB="18288">
-                    <a:solidFill>
-                      <a:srgbClr val="F2F4F7"/>
-                    </a:solidFill>
-                  </a:tcPr>
-                </a:tc>
-                <a:tc>
-                  <a:txBody>
-                    <a:bodyPr/>
-                    <a:lstStyle/>
-                    <a:p>
-                      <a:pPr algn="ctr">
-                        <a:defRPr sz="1000" b="0">
-                          <a:solidFill>
-                            <a:srgbClr val="1A1A1A"/>
-                          </a:solidFill>
-                        </a:defRPr>
-                      </a:pPr>
-                      <a:r>
-                        <a:rPr sz="1000" b="0">
-                          <a:solidFill>
-                            <a:srgbClr val="1A1A1A"/>
-                          </a:solidFill>
-                        </a:rPr>
-                        <a:t>Nature</a:t>
+                        <a:t>Test-time adaptation loses up to 66 points under</a:t>
                       </a:r>
                     </a:p>
                     <a:p>
                       <a:pPr algn="ctr">
-                        <a:defRPr sz="1000" b="0">
+                        <a:defRPr sz="1100" b="0">
                           <a:solidFill>
                             <a:srgbClr val="1A1A1A"/>
                           </a:solidFill>
                         </a:defRPr>
                       </a:pPr>
                       <a:r>
-                        <a:rPr sz="1000" b="0">
+                        <a:rPr sz="1100" b="0">
                           <a:solidFill>
                             <a:srgbClr val="1A1A1A"/>
                           </a:solidFill>
                         </a:rPr>
-                        <a:t>Communications 2023</a:t>
+                        <a:t>prior shift — our exact regime</a:t>
                       </a:r>
                     </a:p>
                   </a:txBody>
-                  <a:tcPr marL="54864" marR="54864" marT="18288" marB="18288">
-                    <a:solidFill>
-                      <a:srgbClr val="F2F4F7"/>
-                    </a:solidFill>
-                  </a:tcPr>
-                </a:tc>
-                <a:tc>
-                  <a:txBody>
-                    <a:bodyPr/>
-                    <a:lstStyle/>
-                    <a:p>
-                      <a:pPr algn="ctr">
-                        <a:defRPr sz="1000" b="0">
-                          <a:solidFill>
-                            <a:srgbClr val="1A1A1A"/>
-                          </a:solidFill>
-                        </a:defRPr>
-                      </a:pPr>
-                      <a:r>
-                        <a:rPr sz="1000" b="0">
-                          <a:solidFill>
-                            <a:srgbClr val="1A1A1A"/>
-                          </a:solidFill>
-                        </a:rPr>
-                        <a:t>42</a:t>
-                      </a:r>
-                    </a:p>
-                  </a:txBody>
-                  <a:tcPr marL="54864" marR="54864" marT="18288" marB="18288">
-                    <a:solidFill>
-                      <a:srgbClr val="F2F4F7"/>
-                    </a:solidFill>
-                  </a:tcPr>
-                </a:tc>
-              </a:tr>
-              <a:tr h="525780">
-                <a:tc>
-                  <a:txBody>
-                    <a:bodyPr/>
-                    <a:lstStyle/>
-                    <a:p>
-                      <a:pPr algn="l">
-                        <a:defRPr sz="1000" b="0">
-                          <a:solidFill>
-                            <a:srgbClr val="1A1A1A"/>
-                          </a:solidFill>
-                        </a:defRPr>
-                      </a:pPr>
-                      <a:r>
-                        <a:rPr sz="1000" b="0">
-                          <a:solidFill>
-                            <a:srgbClr val="1A1A1A"/>
-                          </a:solidFill>
-                        </a:rPr>
-                        <a:t>Prevalence shift alone breaks calibration, decision thresholds and</a:t>
-                      </a:r>
-                    </a:p>
-                    <a:p>
-                      <a:pPr algn="l">
-                        <a:defRPr sz="1000" b="0">
-                          <a:solidFill>
-                            <a:srgbClr val="1A1A1A"/>
-                          </a:solidFill>
-                        </a:defRPr>
-                      </a:pPr>
-                      <a:r>
-                        <a:rPr sz="1000" b="0">
-                          <a:solidFill>
-                            <a:srgbClr val="1A1A1A"/>
-                          </a:solidFill>
-                        </a:rPr>
-                        <a:t>metric interpretation across 30 medical classification tasks</a:t>
-                      </a:r>
-                    </a:p>
-                  </a:txBody>
-                  <a:tcPr marL="54864" marR="54864" marT="18288" marB="18288">
+                  <a:tcPr marL="64008" marR="64008" marT="22860" marB="22860">
                     <a:solidFill>
                       <a:srgbClr val="FFFFFF"/>
                     </a:solidFill>
@@ -4463,23 +4546,23 @@
                     <a:lstStyle/>
                     <a:p>
                       <a:pPr algn="ctr">
-                        <a:defRPr sz="1000" b="0">
+                        <a:defRPr sz="1100" b="0">
                           <a:solidFill>
                             <a:srgbClr val="1A1A1A"/>
                           </a:solidFill>
                         </a:defRPr>
                       </a:pPr>
                       <a:r>
-                        <a:rPr sz="1000" b="0">
+                        <a:rPr sz="1100" b="0">
                           <a:solidFill>
                             <a:srgbClr val="1A1A1A"/>
                           </a:solidFill>
                         </a:rPr>
-                        <a:t>Godau et al.</a:t>
+                        <a:t>Boudiaf et al. (LAME)</a:t>
                       </a:r>
                     </a:p>
                   </a:txBody>
-                  <a:tcPr marL="54864" marR="54864" marT="18288" marB="18288">
+                  <a:tcPr marL="64008" marR="64008" marT="22860" marB="22860">
                     <a:solidFill>
                       <a:srgbClr val="FFFFFF"/>
                     </a:solidFill>
@@ -4491,40 +4574,23 @@
                     <a:lstStyle/>
                     <a:p>
                       <a:pPr algn="ctr">
-                        <a:defRPr sz="1000" b="0">
+                        <a:defRPr sz="1100" b="0">
                           <a:solidFill>
                             <a:srgbClr val="1A1A1A"/>
                           </a:solidFill>
                         </a:defRPr>
                       </a:pPr>
                       <a:r>
-                        <a:rPr sz="1000" b="0">
+                        <a:rPr sz="1100" b="0">
                           <a:solidFill>
                             <a:srgbClr val="1A1A1A"/>
                           </a:solidFill>
                         </a:rPr>
-                        <a:t>MICCAI 2023 →</a:t>
-                      </a:r>
-                    </a:p>
-                    <a:p>
-                      <a:pPr algn="ctr">
-                        <a:defRPr sz="1000" b="0">
-                          <a:solidFill>
-                            <a:srgbClr val="1A1A1A"/>
-                          </a:solidFill>
-                        </a:defRPr>
-                      </a:pPr>
-                      <a:r>
-                        <a:rPr sz="1000" b="0">
-                          <a:solidFill>
-                            <a:srgbClr val="1A1A1A"/>
-                          </a:solidFill>
-                        </a:rPr>
-                        <a:t>Med. Image Anal. 2025</a:t>
+                        <a:t>CVPR 2022</a:t>
                       </a:r>
                     </a:p>
                   </a:txBody>
-                  <a:tcPr marL="54864" marR="54864" marT="18288" marB="18288">
+                  <a:tcPr marL="64008" marR="64008" marT="22860" marB="22860">
                     <a:solidFill>
                       <a:srgbClr val="FFFFFF"/>
                     </a:solidFill>
@@ -4536,25 +4602,184 @@
                     <a:lstStyle/>
                     <a:p>
                       <a:pPr algn="ctr">
-                        <a:defRPr sz="1000" b="0">
+                        <a:defRPr sz="1100" b="0">
                           <a:solidFill>
                             <a:srgbClr val="1A1A1A"/>
                           </a:solidFill>
                         </a:defRPr>
                       </a:pPr>
                       <a:r>
-                        <a:rPr sz="1000" b="0">
+                        <a:rPr sz="1100" b="0">
                           <a:solidFill>
                             <a:srgbClr val="1A1A1A"/>
                           </a:solidFill>
                         </a:rPr>
-                        <a:t>15</a:t>
+                        <a:t>250</a:t>
                       </a:r>
                     </a:p>
                   </a:txBody>
-                  <a:tcPr marL="54864" marR="54864" marT="18288" marB="18288">
+                  <a:tcPr marL="64008" marR="64008" marT="22860" marB="22860">
                     <a:solidFill>
                       <a:srgbClr val="FFFFFF"/>
+                    </a:solidFill>
+                  </a:tcPr>
+                </a:tc>
+              </a:tr>
+              <a:tr h="470268">
+                <a:tc>
+                  <a:txBody>
+                    <a:bodyPr/>
+                    <a:lstStyle/>
+                    <a:p>
+                      <a:pPr algn="l">
+                        <a:defRPr sz="1100" b="0">
+                          <a:solidFill>
+                            <a:srgbClr val="1A1A1A"/>
+                          </a:solidFill>
+                        </a:defRPr>
+                      </a:pPr>
+                      <a:r>
+                        <a:rPr sz="1100" b="0">
+                          <a:solidFill>
+                            <a:srgbClr val="1A1A1A"/>
+                          </a:solidFill>
+                        </a:rPr>
+                        <a:t>~</a:t>
+                      </a:r>
+                    </a:p>
+                  </a:txBody>
+                  <a:tcPr marL="64008" marR="64008" marT="22860" marB="22860">
+                    <a:solidFill>
+                      <a:srgbClr val="F3F5F8"/>
+                    </a:solidFill>
+                  </a:tcPr>
+                </a:tc>
+                <a:tc>
+                  <a:txBody>
+                    <a:bodyPr/>
+                    <a:lstStyle/>
+                    <a:p>
+                      <a:pPr algn="ctr">
+                        <a:defRPr sz="1100" b="0">
+                          <a:solidFill>
+                            <a:srgbClr val="1A1A1A"/>
+                          </a:solidFill>
+                        </a:defRPr>
+                      </a:pPr>
+                      <a:r>
+                        <a:rPr sz="1100" b="0">
+                          <a:solidFill>
+                            <a:srgbClr val="1A1A1A"/>
+                          </a:solidFill>
+                        </a:rPr>
+                        <a:t>Threshold can be fixed with no target labels, but the</a:t>
+                      </a:r>
+                    </a:p>
+                    <a:p>
+                      <a:pPr algn="ctr">
+                        <a:defRPr sz="1100" b="0">
+                          <a:solidFill>
+                            <a:srgbClr val="1A1A1A"/>
+                          </a:solidFill>
+                        </a:defRPr>
+                      </a:pPr>
+                      <a:r>
+                        <a:rPr sz="1100" b="0">
+                          <a:solidFill>
+                            <a:srgbClr val="1A1A1A"/>
+                          </a:solidFill>
+                        </a:rPr>
+                        <a:t>method assumes prevalence is unchanged</a:t>
+                      </a:r>
+                    </a:p>
+                  </a:txBody>
+                  <a:tcPr marL="64008" marR="64008" marT="22860" marB="22860">
+                    <a:solidFill>
+                      <a:srgbClr val="F3F5F8"/>
+                    </a:solidFill>
+                  </a:tcPr>
+                </a:tc>
+                <a:tc>
+                  <a:txBody>
+                    <a:bodyPr/>
+                    <a:lstStyle/>
+                    <a:p>
+                      <a:pPr algn="ctr">
+                        <a:defRPr sz="1100" b="0">
+                          <a:solidFill>
+                            <a:srgbClr val="1A1A1A"/>
+                          </a:solidFill>
+                        </a:defRPr>
+                      </a:pPr>
+                      <a:r>
+                        <a:rPr sz="1100" b="0">
+                          <a:solidFill>
+                            <a:srgbClr val="1A1A1A"/>
+                          </a:solidFill>
+                        </a:rPr>
+                        <a:t>Roschewitz et al.</a:t>
+                      </a:r>
+                    </a:p>
+                  </a:txBody>
+                  <a:tcPr marL="64008" marR="64008" marT="22860" marB="22860">
+                    <a:solidFill>
+                      <a:srgbClr val="F3F5F8"/>
+                    </a:solidFill>
+                  </a:tcPr>
+                </a:tc>
+                <a:tc>
+                  <a:txBody>
+                    <a:bodyPr/>
+                    <a:lstStyle/>
+                    <a:p>
+                      <a:pPr algn="ctr">
+                        <a:defRPr sz="1100" b="0">
+                          <a:solidFill>
+                            <a:srgbClr val="1A1A1A"/>
+                          </a:solidFill>
+                        </a:defRPr>
+                      </a:pPr>
+                      <a:r>
+                        <a:rPr sz="1100" b="0">
+                          <a:solidFill>
+                            <a:srgbClr val="1A1A1A"/>
+                          </a:solidFill>
+                        </a:rPr>
+                        <a:t>Nature Comms 2023</a:t>
+                      </a:r>
+                    </a:p>
+                  </a:txBody>
+                  <a:tcPr marL="64008" marR="64008" marT="22860" marB="22860">
+                    <a:solidFill>
+                      <a:srgbClr val="F3F5F8"/>
+                    </a:solidFill>
+                  </a:tcPr>
+                </a:tc>
+                <a:tc>
+                  <a:txBody>
+                    <a:bodyPr/>
+                    <a:lstStyle/>
+                    <a:p>
+                      <a:pPr algn="ctr">
+                        <a:defRPr sz="1100" b="0">
+                          <a:solidFill>
+                            <a:srgbClr val="1A1A1A"/>
+                          </a:solidFill>
+                        </a:defRPr>
+                      </a:pPr>
+                      <a:r>
+                        <a:rPr sz="1100" b="0">
+                          <a:solidFill>
+                            <a:srgbClr val="1A1A1A"/>
+                          </a:solidFill>
+                        </a:rPr>
+                        <a:t>42</a:t>
+                      </a:r>
+                    </a:p>
+                  </a:txBody>
+                  <a:tcPr marL="64008" marR="64008" marT="22860" marB="22860">
+                    <a:solidFill>
+                      <a:srgbClr val="F3F5F8"/>
                     </a:solidFill>
                   </a:tcPr>
                 </a:tc>
@@ -4571,8 +4796,8 @@
         </p:nvSpPr>
         <p:spPr>
           <a:xfrm>
-            <a:off x="548640" y="5806440"/>
-            <a:ext cx="11155680" cy="640080"/>
+            <a:off x="594360" y="4983480"/>
+            <a:ext cx="3657600" cy="310896"/>
           </a:xfrm>
           <a:prstGeom prst="rect">
             <a:avLst/>
@@ -4585,6 +4810,111 @@
           </a:bodyPr>
           <a:lstStyle/>
           <a:p>
+            <a:pPr algn="l">
+              <a:defRPr sz="1200" b="1">
+                <a:solidFill>
+                  <a:srgbClr val="1E7A3C"/>
+                </a:solidFill>
+              </a:defRPr>
+            </a:pPr>
+            <a:r>
+              <a:t>✓  strongest evidence</a:t>
+            </a:r>
+          </a:p>
+        </p:txBody>
+      </p:sp>
+      <p:sp>
+        <p:nvSpPr>
+          <p:cNvPr id="5" name="TextBox 4"/>
+          <p:cNvSpPr txBox="1"/>
+          <p:nvPr/>
+        </p:nvSpPr>
+        <p:spPr>
+          <a:xfrm>
+            <a:off x="3931920" y="4983480"/>
+            <a:ext cx="3657600" cy="310896"/>
+          </a:xfrm>
+          <a:prstGeom prst="rect">
+            <a:avLst/>
+          </a:prstGeom>
+          <a:noFill/>
+        </p:spPr>
+        <p:txBody>
+          <a:bodyPr wrap="square">
+            <a:spAutoFit/>
+          </a:bodyPr>
+          <a:lstStyle/>
+          <a:p>
+            <a:pPr algn="l">
+              <a:defRPr sz="1200" b="1">
+                <a:solidFill>
+                  <a:srgbClr val="B33A1A"/>
+                </a:solidFill>
+              </a:defRPr>
+            </a:pPr>
+            <a:r>
+              <a:t>✗  published evidence of failure</a:t>
+            </a:r>
+          </a:p>
+        </p:txBody>
+      </p:sp>
+      <p:sp>
+        <p:nvSpPr>
+          <p:cNvPr id="6" name="TextBox 5"/>
+          <p:cNvSpPr txBox="1"/>
+          <p:nvPr/>
+        </p:nvSpPr>
+        <p:spPr>
+          <a:xfrm>
+            <a:off x="7680960" y="4983480"/>
+            <a:ext cx="3931920" cy="310896"/>
+          </a:xfrm>
+          <a:prstGeom prst="rect">
+            <a:avLst/>
+          </a:prstGeom>
+          <a:noFill/>
+        </p:spPr>
+        <p:txBody>
+          <a:bodyPr wrap="square">
+            <a:spAutoFit/>
+          </a:bodyPr>
+          <a:lstStyle/>
+          <a:p>
+            <a:pPr algn="l">
+              <a:defRPr sz="1200" b="1">
+                <a:solidFill>
+                  <a:srgbClr val="C88600"/>
+                </a:solidFill>
+              </a:defRPr>
+            </a:pPr>
+            <a:r>
+              <a:t>~  works, but assumptions break here</a:t>
+            </a:r>
+          </a:p>
+        </p:txBody>
+      </p:sp>
+      <p:sp>
+        <p:nvSpPr>
+          <p:cNvPr id="7" name="TextBox 6"/>
+          <p:cNvSpPr txBox="1"/>
+          <p:nvPr/>
+        </p:nvSpPr>
+        <p:spPr>
+          <a:xfrm>
+            <a:off x="594360" y="5577840"/>
+            <a:ext cx="11064240" cy="594360"/>
+          </a:xfrm>
+          <a:prstGeom prst="rect">
+            <a:avLst/>
+          </a:prstGeom>
+          <a:noFill/>
+        </p:spPr>
+        <p:txBody>
+          <a:bodyPr wrap="square">
+            <a:spAutoFit/>
+          </a:bodyPr>
+          <a:lstStyle/>
+          <a:p>
             <a:pPr>
               <a:defRPr sz="1400" b="1">
                 <a:solidFill>
@@ -4593,7 +4923,7 @@
               </a:defRPr>
             </a:pPr>
             <a:r>
-              <a:t>Two conclusions: augmentation has the strongest evidence for raising AUC under device shift, and the popular adaptation families have published evidence of failing on exactly our problem.</a:t>
+              <a:t>Augmentation is the only intervention with peer-reviewed evidence of raising AUC under real fundus device shift.</a:t>
             </a:r>
           </a:p>
         </p:txBody>
@@ -4624,8 +4954,8 @@
         </p:nvSpPr>
         <p:spPr>
           <a:xfrm>
-            <a:off x="502920" y="320040"/>
-            <a:ext cx="11247120" cy="822960"/>
+            <a:off x="548640" y="347472"/>
+            <a:ext cx="11155680" cy="777240"/>
           </a:xfrm>
           <a:prstGeom prst="rect">
             <a:avLst/>
@@ -4639,725 +4969,90 @@
           <a:lstStyle/>
           <a:p>
             <a:pPr>
-              <a:defRPr sz="2700" b="1">
+              <a:defRPr sz="2800" b="1">
                 <a:solidFill>
                   <a:srgbClr val="1F4E79"/>
                 </a:solidFill>
               </a:defRPr>
             </a:pPr>
             <a:r>
-              <a:t>What we established ourselves — measurements, not reading</a:t>
+              <a:t>What the gap is actually made of</a:t>
             </a:r>
           </a:p>
           <a:p>
             <a:pPr>
               <a:defRPr sz="1300">
                 <a:solidFill>
-                  <a:srgbClr val="5A5A5A"/>
-                </a:solidFill>
-              </a:defRPr>
-            </a:pPr>
-            <a:r>
-              <a:t>Each of these was computed on our own data and is reproducible from the repository.</a:t>
-            </a:r>
-          </a:p>
-        </p:txBody>
-      </p:sp>
-      <p:graphicFrame>
-        <p:nvGraphicFramePr>
-          <p:cNvPr id="3" name="Table 2"/>
-          <p:cNvGraphicFramePr>
-            <a:graphicFrameLocks noGrp="1"/>
-          </p:cNvGraphicFramePr>
+                  <a:srgbClr val="6B6B6B"/>
+                </a:solidFill>
+              </a:defRPr>
+            </a:pPr>
+            <a:r>
+              <a:t>Diabetic retinopathy, F1 on mBRSET. Every figure measured on our own data.</a:t>
+            </a:r>
+          </a:p>
+        </p:txBody>
+      </p:sp>
+      <p:sp>
+        <p:nvSpPr>
+          <p:cNvPr id="3" name="Rounded Rectangle 2"/>
+          <p:cNvSpPr/>
           <p:nvPr/>
-        </p:nvGraphicFramePr>
-        <p:xfrm>
-          <a:off x="548640" y="1463040"/>
-          <a:ext cx="11155679" cy="3566160"/>
-        </p:xfrm>
-        <a:graphic>
-          <a:graphicData uri="http://schemas.openxmlformats.org/drawingml/2006/table">
-            <a:tbl>
-              <a:tblPr firstRow="1" bandRow="1">
-                <a:tableStyleId>{5C22544A-7EE6-4342-B048-85BDC9FD1C3A}</a:tableStyleId>
-              </a:tblPr>
-              <a:tblGrid>
-                <a:gridCol w="2743199"/>
-                <a:gridCol w="3840480"/>
-                <a:gridCol w="4572000"/>
-              </a:tblGrid>
-              <a:tr h="713232">
-                <a:tc>
-                  <a:txBody>
-                    <a:bodyPr/>
-                    <a:lstStyle/>
-                    <a:p>
-                      <a:pPr algn="l">
-                        <a:defRPr sz="1000" b="1">
-                          <a:solidFill>
-                            <a:srgbClr val="FFFFFF"/>
-                          </a:solidFill>
-                        </a:defRPr>
-                      </a:pPr>
-                      <a:r>
-                        <a:rPr sz="1000" b="1">
-                          <a:solidFill>
-                            <a:srgbClr val="FFFFFF"/>
-                          </a:solidFill>
-                        </a:rPr>
-                        <a:t>Question</a:t>
-                      </a:r>
-                    </a:p>
-                  </a:txBody>
-                  <a:tcPr marL="54864" marR="54864" marT="18288" marB="18288">
-                    <a:solidFill>
-                      <a:srgbClr val="1F4E79"/>
-                    </a:solidFill>
-                  </a:tcPr>
-                </a:tc>
-                <a:tc>
-                  <a:txBody>
-                    <a:bodyPr/>
-                    <a:lstStyle/>
-                    <a:p>
-                      <a:pPr algn="ctr">
-                        <a:defRPr sz="1000" b="1">
-                          <a:solidFill>
-                            <a:srgbClr val="FFFFFF"/>
-                          </a:solidFill>
-                        </a:defRPr>
-                      </a:pPr>
-                      <a:r>
-                        <a:rPr sz="1000" b="1">
-                          <a:solidFill>
-                            <a:srgbClr val="FFFFFF"/>
-                          </a:solidFill>
-                        </a:rPr>
-                        <a:t>What we did</a:t>
-                      </a:r>
-                    </a:p>
-                  </a:txBody>
-                  <a:tcPr marL="54864" marR="54864" marT="18288" marB="18288">
-                    <a:solidFill>
-                      <a:srgbClr val="1F4E79"/>
-                    </a:solidFill>
-                  </a:tcPr>
-                </a:tc>
-                <a:tc>
-                  <a:txBody>
-                    <a:bodyPr/>
-                    <a:lstStyle/>
-                    <a:p>
-                      <a:pPr algn="ctr">
-                        <a:defRPr sz="1000" b="1">
-                          <a:solidFill>
-                            <a:srgbClr val="FFFFFF"/>
-                          </a:solidFill>
-                        </a:defRPr>
-                      </a:pPr>
-                      <a:r>
-                        <a:rPr sz="1000" b="1">
-                          <a:solidFill>
-                            <a:srgbClr val="FFFFFF"/>
-                          </a:solidFill>
-                        </a:rPr>
-                        <a:t>Result</a:t>
-                      </a:r>
-                    </a:p>
-                  </a:txBody>
-                  <a:tcPr marL="54864" marR="54864" marT="18288" marB="18288">
-                    <a:solidFill>
-                      <a:srgbClr val="1F4E79"/>
-                    </a:solidFill>
-                  </a:tcPr>
-                </a:tc>
-              </a:tr>
-              <a:tr h="713232">
-                <a:tc>
-                  <a:txBody>
-                    <a:bodyPr/>
-                    <a:lstStyle/>
-                    <a:p>
-                      <a:pPr algn="l">
-                        <a:defRPr sz="1000" b="0">
-                          <a:solidFill>
-                            <a:srgbClr val="1A1A1A"/>
-                          </a:solidFill>
-                        </a:defRPr>
-                      </a:pPr>
-                      <a:r>
-                        <a:rPr sz="1000" b="0">
-                          <a:solidFill>
-                            <a:srgbClr val="1A1A1A"/>
-                          </a:solidFill>
-                        </a:rPr>
-                        <a:t>Is the shift a prevalence shift or a</a:t>
-                      </a:r>
-                    </a:p>
-                    <a:p>
-                      <a:pPr algn="l">
-                        <a:defRPr sz="1000" b="0">
-                          <a:solidFill>
-                            <a:srgbClr val="1A1A1A"/>
-                          </a:solidFill>
-                        </a:defRPr>
-                      </a:pPr>
-                      <a:r>
-                        <a:rPr sz="1000" b="0">
-                          <a:solidFill>
-                            <a:srgbClr val="1A1A1A"/>
-                          </a:solidFill>
-                        </a:rPr>
-                        <a:t>genuine model failure?</a:t>
-                      </a:r>
-                    </a:p>
-                  </a:txBody>
-                  <a:tcPr marL="54864" marR="54864" marT="18288" marB="18288">
-                    <a:solidFill>
-                      <a:srgbClr val="FFFFFF"/>
-                    </a:solidFill>
-                  </a:tcPr>
-                </a:tc>
-                <a:tc>
-                  <a:txBody>
-                    <a:bodyPr/>
-                    <a:lstStyle/>
-                    <a:p>
-                      <a:pPr algn="ctr">
-                        <a:defRPr sz="1000" b="0">
-                          <a:solidFill>
-                            <a:srgbClr val="1A1A1A"/>
-                          </a:solidFill>
-                        </a:defRPr>
-                      </a:pPr>
-                      <a:r>
-                        <a:rPr sz="1000" b="0">
-                          <a:solidFill>
-                            <a:srgbClr val="1A1A1A"/>
-                          </a:solidFill>
-                        </a:rPr>
-                        <a:t>Compared class-conditional score behaviour;</a:t>
-                      </a:r>
-                    </a:p>
-                    <a:p>
-                      <a:pPr algn="ctr">
-                        <a:defRPr sz="1000" b="0">
-                          <a:solidFill>
-                            <a:srgbClr val="1A1A1A"/>
-                          </a:solidFill>
-                        </a:defRPr>
-                      </a:pPr>
-                      <a:r>
-                        <a:rPr sz="1000" b="0">
-                          <a:solidFill>
-                            <a:srgbClr val="1A1A1A"/>
-                          </a:solidFill>
-                        </a:rPr>
-                        <a:t>applied the ROC invariance property</a:t>
-                      </a:r>
-                    </a:p>
-                  </a:txBody>
-                  <a:tcPr marL="54864" marR="54864" marT="18288" marB="18288">
-                    <a:solidFill>
-                      <a:srgbClr val="FFFFFF"/>
-                    </a:solidFill>
-                  </a:tcPr>
-                </a:tc>
-                <a:tc>
-                  <a:txBody>
-                    <a:bodyPr/>
-                    <a:lstStyle/>
-                    <a:p>
-                      <a:pPr algn="ctr">
-                        <a:defRPr sz="1000" b="0">
-                          <a:solidFill>
-                            <a:srgbClr val="1A1A1A"/>
-                          </a:solidFill>
-                        </a:defRPr>
-                      </a:pPr>
-                      <a:r>
-                        <a:rPr sz="1000" b="0">
-                          <a:solidFill>
-                            <a:srgbClr val="1A1A1A"/>
-                          </a:solidFill>
-                        </a:rPr>
-                        <a:t>NOT prevalence shift. ROC is provably invariant</a:t>
-                      </a:r>
-                    </a:p>
-                    <a:p>
-                      <a:pPr algn="ctr">
-                        <a:defRPr sz="1000" b="0">
-                          <a:solidFill>
-                            <a:srgbClr val="1A1A1A"/>
-                          </a:solidFill>
-                        </a:defRPr>
-                      </a:pPr>
-                      <a:r>
-                        <a:rPr sz="1000" b="0">
-                          <a:solidFill>
-                            <a:srgbClr val="1A1A1A"/>
-                          </a:solidFill>
-                        </a:rPr>
-                        <a:t>to class distribution (Fawcett 2006, 21,726 cites),</a:t>
-                      </a:r>
-                    </a:p>
-                    <a:p>
-                      <a:pPr algn="ctr">
-                        <a:defRPr sz="1000" b="0">
-                          <a:solidFill>
-                            <a:srgbClr val="1A1A1A"/>
-                          </a:solidFill>
-                        </a:defRPr>
-                      </a:pPr>
-                      <a:r>
-                        <a:rPr sz="1000" b="0">
-                          <a:solidFill>
-                            <a:srgbClr val="1A1A1A"/>
-                          </a:solidFill>
-                        </a:rPr>
-                        <a:t>yet AUC fell 0.988 → 0.909</a:t>
-                      </a:r>
-                    </a:p>
-                  </a:txBody>
-                  <a:tcPr marL="54864" marR="54864" marT="18288" marB="18288">
-                    <a:solidFill>
-                      <a:srgbClr val="FFFFFF"/>
-                    </a:solidFill>
-                  </a:tcPr>
-                </a:tc>
-              </a:tr>
-              <a:tr h="713232">
-                <a:tc>
-                  <a:txBody>
-                    <a:bodyPr/>
-                    <a:lstStyle/>
-                    <a:p>
-                      <a:pPr algn="l">
-                        <a:defRPr sz="1000" b="0">
-                          <a:solidFill>
-                            <a:srgbClr val="1A1A1A"/>
-                          </a:solidFill>
-                        </a:defRPr>
-                      </a:pPr>
-                      <a:r>
-                        <a:rPr sz="1000" b="0">
-                          <a:solidFill>
-                            <a:srgbClr val="1A1A1A"/>
-                          </a:solidFill>
-                        </a:rPr>
-                        <a:t>How much of the collapse is the</a:t>
-                      </a:r>
-                    </a:p>
-                    <a:p>
-                      <a:pPr algn="l">
-                        <a:defRPr sz="1000" b="0">
-                          <a:solidFill>
-                            <a:srgbClr val="1A1A1A"/>
-                          </a:solidFill>
-                        </a:defRPr>
-                      </a:pPr>
-                      <a:r>
-                        <a:rPr sz="1000" b="0">
-                          <a:solidFill>
-                            <a:srgbClr val="1A1A1A"/>
-                          </a:solidFill>
-                        </a:rPr>
-                        <a:t>decision cutoff?</a:t>
-                      </a:r>
-                    </a:p>
-                  </a:txBody>
-                  <a:tcPr marL="54864" marR="54864" marT="18288" marB="18288">
-                    <a:solidFill>
-                      <a:srgbClr val="F2F4F7"/>
-                    </a:solidFill>
-                  </a:tcPr>
-                </a:tc>
-                <a:tc>
-                  <a:txBody>
-                    <a:bodyPr/>
-                    <a:lstStyle/>
-                    <a:p>
-                      <a:pPr algn="ctr">
-                        <a:defRPr sz="1000" b="0">
-                          <a:solidFill>
-                            <a:srgbClr val="1A1A1A"/>
-                          </a:solidFill>
-                        </a:defRPr>
-                      </a:pPr>
-                      <a:r>
-                        <a:rPr sz="1000" b="0">
-                          <a:solidFill>
-                            <a:srgbClr val="1A1A1A"/>
-                          </a:solidFill>
-                        </a:rPr>
-                        <a:t>Closed-form Bayes mapping of the optimal</a:t>
-                      </a:r>
-                    </a:p>
-                    <a:p>
-                      <a:pPr algn="ctr">
-                        <a:defRPr sz="1000" b="0">
-                          <a:solidFill>
-                            <a:srgbClr val="1A1A1A"/>
-                          </a:solidFill>
-                        </a:defRPr>
-                      </a:pPr>
-                      <a:r>
-                        <a:rPr sz="1000" b="0">
-                          <a:solidFill>
-                            <a:srgbClr val="1A1A1A"/>
-                          </a:solidFill>
-                        </a:rPr>
-                        <a:t>cutoff under a prior change</a:t>
-                      </a:r>
-                    </a:p>
-                  </a:txBody>
-                  <a:tcPr marL="54864" marR="54864" marT="18288" marB="18288">
-                    <a:solidFill>
-                      <a:srgbClr val="F2F4F7"/>
-                    </a:solidFill>
-                  </a:tcPr>
-                </a:tc>
-                <a:tc>
-                  <a:txBody>
-                    <a:bodyPr/>
-                    <a:lstStyle/>
-                    <a:p>
-                      <a:pPr algn="ctr">
-                        <a:defRPr sz="1000" b="0">
-                          <a:solidFill>
-                            <a:srgbClr val="1A1A1A"/>
-                          </a:solidFill>
-                        </a:defRPr>
-                      </a:pPr>
-                      <a:r>
-                        <a:rPr sz="1000" b="0">
-                          <a:solidFill>
-                            <a:srgbClr val="1A1A1A"/>
-                          </a:solidFill>
-                        </a:rPr>
-                        <a:t>77% of the 0.61 → 0.19 cutoff move is explained</a:t>
-                      </a:r>
-                    </a:p>
-                    <a:p>
-                      <a:pPr algn="ctr">
-                        <a:defRPr sz="1000" b="0">
-                          <a:solidFill>
-                            <a:srgbClr val="1A1A1A"/>
-                          </a:solidFill>
-                        </a:defRPr>
-                      </a:pPr>
-                      <a:r>
-                        <a:rPr sz="1000" b="0">
-                          <a:solidFill>
-                            <a:srgbClr val="1A1A1A"/>
-                          </a:solidFill>
-                        </a:rPr>
-                        <a:t>by disease rate alone (6.6% → 23.3%)</a:t>
-                      </a:r>
-                    </a:p>
-                  </a:txBody>
-                  <a:tcPr marL="54864" marR="54864" marT="18288" marB="18288">
-                    <a:solidFill>
-                      <a:srgbClr val="F2F4F7"/>
-                    </a:solidFill>
-                  </a:tcPr>
-                </a:tc>
-              </a:tr>
-              <a:tr h="713232">
-                <a:tc>
-                  <a:txBody>
-                    <a:bodyPr/>
-                    <a:lstStyle/>
-                    <a:p>
-                      <a:pPr algn="l">
-                        <a:defRPr sz="1000" b="0">
-                          <a:solidFill>
-                            <a:srgbClr val="1A1A1A"/>
-                          </a:solidFill>
-                        </a:defRPr>
-                      </a:pPr>
-                      <a:r>
-                        <a:rPr sz="1000" b="0">
-                          <a:solidFill>
-                            <a:srgbClr val="1A1A1A"/>
-                          </a:solidFill>
-                        </a:rPr>
-                        <a:t>Can any calibration method close</a:t>
-                      </a:r>
-                    </a:p>
-                    <a:p>
-                      <a:pPr algn="l">
-                        <a:defRPr sz="1000" b="0">
-                          <a:solidFill>
-                            <a:srgbClr val="1A1A1A"/>
-                          </a:solidFill>
-                        </a:defRPr>
-                      </a:pPr>
-                      <a:r>
-                        <a:rPr sz="1000" b="0">
-                          <a:solidFill>
-                            <a:srgbClr val="1A1A1A"/>
-                          </a:solidFill>
-                        </a:rPr>
-                        <a:t>the remaining gap?</a:t>
-                      </a:r>
-                    </a:p>
-                  </a:txBody>
-                  <a:tcPr marL="54864" marR="54864" marT="18288" marB="18288">
-                    <a:solidFill>
-                      <a:srgbClr val="FFFFFF"/>
-                    </a:solidFill>
-                  </a:tcPr>
-                </a:tc>
-                <a:tc>
-                  <a:txBody>
-                    <a:bodyPr/>
-                    <a:lstStyle/>
-                    <a:p>
-                      <a:pPr algn="ctr">
-                        <a:defRPr sz="1000" b="0">
-                          <a:solidFill>
-                            <a:srgbClr val="1A1A1A"/>
-                          </a:solidFill>
-                        </a:defRPr>
-                      </a:pPr>
-                      <a:r>
-                        <a:rPr sz="1000" b="0">
-                          <a:solidFill>
-                            <a:srgbClr val="1A1A1A"/>
-                          </a:solidFill>
-                        </a:rPr>
-                        <a:t>Swept every attainable cutoff on the target</a:t>
-                      </a:r>
-                    </a:p>
-                    <a:p>
-                      <a:pPr algn="ctr">
-                        <a:defRPr sz="1000" b="0">
-                          <a:solidFill>
-                            <a:srgbClr val="1A1A1A"/>
-                          </a:solidFill>
-                        </a:defRPr>
-                      </a:pPr>
-                      <a:r>
-                        <a:rPr sz="1000" b="0">
-                          <a:solidFill>
-                            <a:srgbClr val="1A1A1A"/>
-                          </a:solidFill>
-                        </a:rPr>
-                        <a:t>test set to find the true maximum F1</a:t>
-                      </a:r>
-                    </a:p>
-                  </a:txBody>
-                  <a:tcPr marL="54864" marR="54864" marT="18288" marB="18288">
-                    <a:solidFill>
-                      <a:srgbClr val="FFFFFF"/>
-                    </a:solidFill>
-                  </a:tcPr>
-                </a:tc>
-                <a:tc>
-                  <a:txBody>
-                    <a:bodyPr/>
-                    <a:lstStyle/>
-                    <a:p>
-                      <a:pPr algn="ctr">
-                        <a:defRPr sz="1000" b="0">
-                          <a:solidFill>
-                            <a:srgbClr val="1A1A1A"/>
-                          </a:solidFill>
-                        </a:defRPr>
-                      </a:pPr>
-                      <a:r>
-                        <a:rPr sz="1000" b="0">
-                          <a:solidFill>
-                            <a:srgbClr val="1A1A1A"/>
-                          </a:solidFill>
-                        </a:rPr>
-                        <a:t>No. Ceiling is F1 0.765 (DR) / 0.671 (ME).</a:t>
-                      </a:r>
-                    </a:p>
-                    <a:p>
-                      <a:pPr algn="ctr">
-                        <a:defRPr sz="1000" b="0">
-                          <a:solidFill>
-                            <a:srgbClr val="1A1A1A"/>
-                          </a:solidFill>
-                        </a:defRPr>
-                      </a:pPr>
-                      <a:r>
-                        <a:rPr sz="1000" b="0">
-                          <a:solidFill>
-                            <a:srgbClr val="1A1A1A"/>
-                          </a:solidFill>
-                        </a:rPr>
-                        <a:t>Proof by set inclusion: monotone post-processing</a:t>
-                      </a:r>
-                    </a:p>
-                    <a:p>
-                      <a:pPr algn="ctr">
-                        <a:defRPr sz="1000" b="0">
-                          <a:solidFill>
-                            <a:srgbClr val="1A1A1A"/>
-                          </a:solidFill>
-                        </a:defRPr>
-                      </a:pPr>
-                      <a:r>
-                        <a:rPr sz="1000" b="0">
-                          <a:solidFill>
-                            <a:srgbClr val="1A1A1A"/>
-                          </a:solidFill>
-                        </a:rPr>
-                        <a:t>cannot exceed it</a:t>
-                      </a:r>
-                    </a:p>
-                  </a:txBody>
-                  <a:tcPr marL="54864" marR="54864" marT="18288" marB="18288">
-                    <a:solidFill>
-                      <a:srgbClr val="FFFFFF"/>
-                    </a:solidFill>
-                  </a:tcPr>
-                </a:tc>
-              </a:tr>
-              <a:tr h="713232">
-                <a:tc>
-                  <a:txBody>
-                    <a:bodyPr/>
-                    <a:lstStyle/>
-                    <a:p>
-                      <a:pPr algn="l">
-                        <a:defRPr sz="1000" b="0">
-                          <a:solidFill>
-                            <a:srgbClr val="1A1A1A"/>
-                          </a:solidFill>
-                        </a:defRPr>
-                      </a:pPr>
-                      <a:r>
-                        <a:rPr sz="1000" b="0">
-                          <a:solidFill>
-                            <a:srgbClr val="1A1A1A"/>
-                          </a:solidFill>
-                        </a:rPr>
-                        <a:t>Would averaging a patient's images</a:t>
-                      </a:r>
-                    </a:p>
-                    <a:p>
-                      <a:pPr algn="l">
-                        <a:defRPr sz="1000" b="0">
-                          <a:solidFill>
-                            <a:srgbClr val="1A1A1A"/>
-                          </a:solidFill>
-                        </a:defRPr>
-                      </a:pPr>
-                      <a:r>
-                        <a:rPr sz="1000" b="0">
-                          <a:solidFill>
-                            <a:srgbClr val="1A1A1A"/>
-                          </a:solidFill>
-                        </a:rPr>
-                        <a:t>raise AUC, and by how much?</a:t>
-                      </a:r>
-                    </a:p>
-                  </a:txBody>
-                  <a:tcPr marL="54864" marR="54864" marT="18288" marB="18288">
-                    <a:solidFill>
-                      <a:srgbClr val="F2F4F7"/>
-                    </a:solidFill>
-                  </a:tcPr>
-                </a:tc>
-                <a:tc>
-                  <a:txBody>
-                    <a:bodyPr/>
-                    <a:lstStyle/>
-                    <a:p>
-                      <a:pPr algn="ctr">
-                        <a:defRPr sz="1000" b="0">
-                          <a:solidFill>
-                            <a:srgbClr val="1A1A1A"/>
-                          </a:solidFill>
-                        </a:defRPr>
-                      </a:pPr>
-                      <a:r>
-                        <a:rPr sz="1000" b="0">
-                          <a:solidFill>
-                            <a:srgbClr val="1A1A1A"/>
-                          </a:solidFill>
-                        </a:rPr>
-                        <a:t>Derived AUC_K = Φ(z₁·√(K/(1+(K−1)ρ))) and</a:t>
-                      </a:r>
-                    </a:p>
-                    <a:p>
-                      <a:pPr algn="ctr">
-                        <a:defRPr sz="1000" b="0">
-                          <a:solidFill>
-                            <a:srgbClr val="1A1A1A"/>
-                          </a:solidFill>
-                        </a:defRPr>
-                      </a:pPr>
-                      <a:r>
-                        <a:rPr sz="1000" b="0">
-                          <a:solidFill>
-                            <a:srgbClr val="1A1A1A"/>
-                          </a:solidFill>
-                        </a:rPr>
-                        <a:t>measured ρ by variance decomposition</a:t>
-                      </a:r>
-                    </a:p>
-                  </a:txBody>
-                  <a:tcPr marL="54864" marR="54864" marT="18288" marB="18288">
-                    <a:solidFill>
-                      <a:srgbClr val="F2F4F7"/>
-                    </a:solidFill>
-                  </a:tcPr>
-                </a:tc>
-                <a:tc>
-                  <a:txBody>
-                    <a:bodyPr/>
-                    <a:lstStyle/>
-                    <a:p>
-                      <a:pPr algn="ctr">
-                        <a:defRPr sz="1000" b="0">
-                          <a:solidFill>
-                            <a:srgbClr val="1A1A1A"/>
-                          </a:solidFill>
-                        </a:defRPr>
-                      </a:pPr>
-                      <a:r>
-                        <a:rPr sz="1000" b="0">
-                          <a:solidFill>
-                            <a:srgbClr val="1A1A1A"/>
-                          </a:solidFill>
-                        </a:rPr>
-                        <a:t>ρ = 0.363 (patient), 0.481 (eye).</a:t>
-                      </a:r>
-                    </a:p>
-                    <a:p>
-                      <a:pPr algn="ctr">
-                        <a:defRPr sz="1000" b="0">
-                          <a:solidFill>
-                            <a:srgbClr val="1A1A1A"/>
-                          </a:solidFill>
-                        </a:defRPr>
-                      </a:pPr>
-                      <a:r>
-                        <a:rPr sz="1000" b="0">
-                          <a:solidFill>
-                            <a:srgbClr val="1A1A1A"/>
-                          </a:solidFill>
-                        </a:rPr>
-                        <a:t>Predicted 0.909 → 0.968</a:t>
-                      </a:r>
-                    </a:p>
-                  </a:txBody>
-                  <a:tcPr marL="54864" marR="54864" marT="18288" marB="18288">
-                    <a:solidFill>
-                      <a:srgbClr val="F2F4F7"/>
-                    </a:solidFill>
-                  </a:tcPr>
-                </a:tc>
-              </a:tr>
-            </a:tbl>
-          </a:graphicData>
-        </a:graphic>
-      </p:graphicFrame>
+        </p:nvSpPr>
+        <p:spPr>
+          <a:xfrm>
+            <a:off x="822960" y="2286000"/>
+            <a:ext cx="3790603" cy="868680"/>
+          </a:xfrm>
+          <a:prstGeom prst="roundRect">
+            <a:avLst/>
+          </a:prstGeom>
+          <a:solidFill>
+            <a:srgbClr val="1E7A3C"/>
+          </a:solidFill>
+          <a:ln>
+            <a:solidFill>
+              <a:srgbClr val="1E7A3C"/>
+            </a:solidFill>
+          </a:ln>
+          <a:effectLst/>
+        </p:spPr>
+        <p:style>
+          <a:lnRef idx="1">
+            <a:schemeClr val="accent1"/>
+          </a:lnRef>
+          <a:fillRef idx="3">
+            <a:schemeClr val="accent1"/>
+          </a:fillRef>
+          <a:effectRef idx="2">
+            <a:schemeClr val="accent1"/>
+          </a:effectRef>
+          <a:fontRef idx="minor">
+            <a:schemeClr val="lt1"/>
+          </a:fontRef>
+        </p:style>
+        <p:txBody>
+          <a:bodyPr rtlCol="0" anchor="ctr" wrap="square"/>
+          <a:lstStyle/>
+          <a:p>
+            <a:pPr algn="ctr">
+              <a:defRPr sz="1500" b="1">
+                <a:solidFill>
+                  <a:srgbClr val="FFFFFF"/>
+                </a:solidFill>
+              </a:defRPr>
+            </a:pPr>
+            <a:r>
+              <a:rPr sz="1500" b="1">
+                <a:solidFill>
+                  <a:srgbClr val="FFFFFF"/>
+                </a:solidFill>
+              </a:rPr>
+              <a:t>+0.056</a:t>
+            </a:r>
+          </a:p>
+        </p:txBody>
+      </p:sp>
       <p:sp>
         <p:nvSpPr>
           <p:cNvPr id="4" name="TextBox 3"/>
@@ -5366,8 +5061,8 @@
         </p:nvSpPr>
         <p:spPr>
           <a:xfrm>
-            <a:off x="548640" y="5257800"/>
-            <a:ext cx="11155680" cy="548639"/>
+            <a:off x="822960" y="3264408"/>
+            <a:ext cx="3790603" cy="310896"/>
           </a:xfrm>
           <a:prstGeom prst="rect">
             <a:avLst/>
@@ -5380,32 +5075,93 @@
           </a:bodyPr>
           <a:lstStyle/>
           <a:p>
-            <a:pPr>
-              <a:spcAft>
-                <a:spcPts val="600"/>
-              </a:spcAft>
-              <a:defRPr sz="1300">
+            <a:pPr algn="ctr">
+              <a:defRPr sz="1150" b="0">
                 <a:solidFill>
                   <a:srgbClr val="1A1A1A"/>
                 </a:solidFill>
               </a:defRPr>
             </a:pPr>
             <a:r>
-              <a:t>• The fourth row is the important one: the entire multi-view proposal reduces to a single measurable quantity, so it could be tested before any implementation.</a:t>
-            </a:r>
-          </a:p>
-        </p:txBody>
-      </p:sp>
-      <p:sp>
-        <p:nvSpPr>
-          <p:cNvPr id="5" name="TextBox 4"/>
+              <a:t>fixed by</a:t>
+            </a:r>
+            <a:br/>
+            <a:r>
+              <a:t>retuning the cutoff</a:t>
+            </a:r>
+          </a:p>
+        </p:txBody>
+      </p:sp>
+      <p:sp>
+        <p:nvSpPr>
+          <p:cNvPr id="5" name="Rounded Rectangle 4"/>
+          <p:cNvSpPr/>
+          <p:nvPr/>
+        </p:nvSpPr>
+        <p:spPr>
+          <a:xfrm>
+            <a:off x="4613563" y="2286000"/>
+            <a:ext cx="3249088" cy="868680"/>
+          </a:xfrm>
+          <a:prstGeom prst="roundRect">
+            <a:avLst/>
+          </a:prstGeom>
+          <a:solidFill>
+            <a:srgbClr val="C88600"/>
+          </a:solidFill>
+          <a:ln>
+            <a:solidFill>
+              <a:srgbClr val="C88600"/>
+            </a:solidFill>
+          </a:ln>
+          <a:effectLst/>
+        </p:spPr>
+        <p:style>
+          <a:lnRef idx="1">
+            <a:schemeClr val="accent1"/>
+          </a:lnRef>
+          <a:fillRef idx="3">
+            <a:schemeClr val="accent1"/>
+          </a:fillRef>
+          <a:effectRef idx="2">
+            <a:schemeClr val="accent1"/>
+          </a:effectRef>
+          <a:fontRef idx="minor">
+            <a:schemeClr val="lt1"/>
+          </a:fontRef>
+        </p:style>
+        <p:txBody>
+          <a:bodyPr rtlCol="0" anchor="ctr" wrap="square"/>
+          <a:lstStyle/>
+          <a:p>
+            <a:pPr algn="ctr">
+              <a:defRPr sz="1500" b="1">
+                <a:solidFill>
+                  <a:srgbClr val="FFFFFF"/>
+                </a:solidFill>
+              </a:defRPr>
+            </a:pPr>
+            <a:r>
+              <a:rPr sz="1500" b="1">
+                <a:solidFill>
+                  <a:srgbClr val="FFFFFF"/>
+                </a:solidFill>
+              </a:rPr>
+              <a:t>+0.048</a:t>
+            </a:r>
+          </a:p>
+        </p:txBody>
+      </p:sp>
+      <p:sp>
+        <p:nvSpPr>
+          <p:cNvPr id="6" name="TextBox 5"/>
           <p:cNvSpPr txBox="1"/>
           <p:nvPr/>
         </p:nvSpPr>
         <p:spPr>
           <a:xfrm>
-            <a:off x="548640" y="5852160"/>
-            <a:ext cx="11155680" cy="640080"/>
+            <a:off x="4613563" y="3264408"/>
+            <a:ext cx="3249088" cy="310896"/>
           </a:xfrm>
           <a:prstGeom prst="rect">
             <a:avLst/>
@@ -5418,6 +5174,368 @@
           </a:bodyPr>
           <a:lstStyle/>
           <a:p>
+            <a:pPr algn="ctr">
+              <a:defRPr sz="1150" b="0">
+                <a:solidFill>
+                  <a:srgbClr val="1A1A1A"/>
+                </a:solidFill>
+              </a:defRPr>
+            </a:pPr>
+            <a:r>
+              <a:t>still reachable</a:t>
+            </a:r>
+            <a:br/>
+            <a:r>
+              <a:t>by a better cutoff</a:t>
+            </a:r>
+          </a:p>
+        </p:txBody>
+      </p:sp>
+      <p:sp>
+        <p:nvSpPr>
+          <p:cNvPr id="7" name="Rounded Rectangle 6"/>
+          <p:cNvSpPr/>
+          <p:nvPr/>
+        </p:nvSpPr>
+        <p:spPr>
+          <a:xfrm>
+            <a:off x="7862652" y="2286000"/>
+            <a:ext cx="3384467" cy="868680"/>
+          </a:xfrm>
+          <a:prstGeom prst="roundRect">
+            <a:avLst/>
+          </a:prstGeom>
+          <a:solidFill>
+            <a:srgbClr val="B33A1A"/>
+          </a:solidFill>
+          <a:ln>
+            <a:solidFill>
+              <a:srgbClr val="B33A1A"/>
+            </a:solidFill>
+          </a:ln>
+          <a:effectLst/>
+        </p:spPr>
+        <p:style>
+          <a:lnRef idx="1">
+            <a:schemeClr val="accent1"/>
+          </a:lnRef>
+          <a:fillRef idx="3">
+            <a:schemeClr val="accent1"/>
+          </a:fillRef>
+          <a:effectRef idx="2">
+            <a:schemeClr val="accent1"/>
+          </a:effectRef>
+          <a:fontRef idx="minor">
+            <a:schemeClr val="lt1"/>
+          </a:fontRef>
+        </p:style>
+        <p:txBody>
+          <a:bodyPr rtlCol="0" anchor="ctr" wrap="square"/>
+          <a:lstStyle/>
+          <a:p>
+            <a:pPr algn="ctr">
+              <a:defRPr sz="1500" b="1">
+                <a:solidFill>
+                  <a:srgbClr val="FFFFFF"/>
+                </a:solidFill>
+              </a:defRPr>
+            </a:pPr>
+            <a:r>
+              <a:rPr sz="1500" b="1">
+                <a:solidFill>
+                  <a:srgbClr val="FFFFFF"/>
+                </a:solidFill>
+              </a:rPr>
+              <a:t>+0.050</a:t>
+            </a:r>
+          </a:p>
+        </p:txBody>
+      </p:sp>
+      <p:sp>
+        <p:nvSpPr>
+          <p:cNvPr id="8" name="TextBox 7"/>
+          <p:cNvSpPr txBox="1"/>
+          <p:nvPr/>
+        </p:nvSpPr>
+        <p:spPr>
+          <a:xfrm>
+            <a:off x="7862652" y="3264408"/>
+            <a:ext cx="3384467" cy="310896"/>
+          </a:xfrm>
+          <a:prstGeom prst="rect">
+            <a:avLst/>
+          </a:prstGeom>
+          <a:noFill/>
+        </p:spPr>
+        <p:txBody>
+          <a:bodyPr wrap="square">
+            <a:spAutoFit/>
+          </a:bodyPr>
+          <a:lstStyle/>
+          <a:p>
+            <a:pPr algn="ctr">
+              <a:defRPr sz="1150" b="0">
+                <a:solidFill>
+                  <a:srgbClr val="1A1A1A"/>
+                </a:solidFill>
+              </a:defRPr>
+            </a:pPr>
+            <a:r>
+              <a:t>needs better ranking</a:t>
+            </a:r>
+            <a:br/>
+            <a:r>
+              <a:t>(higher AUC)</a:t>
+            </a:r>
+          </a:p>
+        </p:txBody>
+      </p:sp>
+      <p:sp>
+        <p:nvSpPr>
+          <p:cNvPr id="9" name="TextBox 8"/>
+          <p:cNvSpPr txBox="1"/>
+          <p:nvPr/>
+        </p:nvSpPr>
+        <p:spPr>
+          <a:xfrm>
+            <a:off x="45720" y="1627632"/>
+            <a:ext cx="1554480" cy="310896"/>
+          </a:xfrm>
+          <a:prstGeom prst="rect">
+            <a:avLst/>
+          </a:prstGeom>
+          <a:noFill/>
+        </p:spPr>
+        <p:txBody>
+          <a:bodyPr wrap="square">
+            <a:spAutoFit/>
+          </a:bodyPr>
+          <a:lstStyle/>
+          <a:p>
+            <a:pPr algn="ctr">
+              <a:defRPr sz="1100" b="1">
+                <a:solidFill>
+                  <a:srgbClr val="1F4E79"/>
+                </a:solidFill>
+              </a:defRPr>
+            </a:pPr>
+            <a:r>
+              <a:t>0.661</a:t>
+            </a:r>
+            <a:br/>
+            <a:r>
+              <a:t>source cutoff</a:t>
+            </a:r>
+          </a:p>
+        </p:txBody>
+      </p:sp>
+      <p:sp>
+        <p:nvSpPr>
+          <p:cNvPr id="10" name="TextBox 9"/>
+          <p:cNvSpPr txBox="1"/>
+          <p:nvPr/>
+        </p:nvSpPr>
+        <p:spPr>
+          <a:xfrm>
+            <a:off x="3836323" y="1627632"/>
+            <a:ext cx="1554480" cy="310896"/>
+          </a:xfrm>
+          <a:prstGeom prst="rect">
+            <a:avLst/>
+          </a:prstGeom>
+          <a:noFill/>
+        </p:spPr>
+        <p:txBody>
+          <a:bodyPr wrap="square">
+            <a:spAutoFit/>
+          </a:bodyPr>
+          <a:lstStyle/>
+          <a:p>
+            <a:pPr algn="ctr">
+              <a:defRPr sz="1100" b="1">
+                <a:solidFill>
+                  <a:srgbClr val="1F4E79"/>
+                </a:solidFill>
+              </a:defRPr>
+            </a:pPr>
+            <a:r>
+              <a:t>0.717</a:t>
+            </a:r>
+            <a:br/>
+            <a:r>
+              <a:t>where we are</a:t>
+            </a:r>
+          </a:p>
+        </p:txBody>
+      </p:sp>
+      <p:sp>
+        <p:nvSpPr>
+          <p:cNvPr id="11" name="TextBox 10"/>
+          <p:cNvSpPr txBox="1"/>
+          <p:nvPr/>
+        </p:nvSpPr>
+        <p:spPr>
+          <a:xfrm>
+            <a:off x="7085412" y="1627632"/>
+            <a:ext cx="1554480" cy="310896"/>
+          </a:xfrm>
+          <a:prstGeom prst="rect">
+            <a:avLst/>
+          </a:prstGeom>
+          <a:noFill/>
+        </p:spPr>
+        <p:txBody>
+          <a:bodyPr wrap="square">
+            <a:spAutoFit/>
+          </a:bodyPr>
+          <a:lstStyle/>
+          <a:p>
+            <a:pPr algn="ctr">
+              <a:defRPr sz="1100" b="1">
+                <a:solidFill>
+                  <a:srgbClr val="1F4E79"/>
+                </a:solidFill>
+              </a:defRPr>
+            </a:pPr>
+            <a:r>
+              <a:t>0.765</a:t>
+            </a:r>
+            <a:br/>
+            <a:r>
+              <a:t>best any cutoff</a:t>
+            </a:r>
+          </a:p>
+        </p:txBody>
+      </p:sp>
+      <p:sp>
+        <p:nvSpPr>
+          <p:cNvPr id="12" name="TextBox 11"/>
+          <p:cNvSpPr txBox="1"/>
+          <p:nvPr/>
+        </p:nvSpPr>
+        <p:spPr>
+          <a:xfrm>
+            <a:off x="10469880" y="1627632"/>
+            <a:ext cx="1554480" cy="310896"/>
+          </a:xfrm>
+          <a:prstGeom prst="rect">
+            <a:avLst/>
+          </a:prstGeom>
+          <a:noFill/>
+        </p:spPr>
+        <p:txBody>
+          <a:bodyPr wrap="square">
+            <a:spAutoFit/>
+          </a:bodyPr>
+          <a:lstStyle/>
+          <a:p>
+            <a:pPr algn="ctr">
+              <a:defRPr sz="1100" b="1">
+                <a:solidFill>
+                  <a:srgbClr val="1F4E79"/>
+                </a:solidFill>
+              </a:defRPr>
+            </a:pPr>
+            <a:r>
+              <a:t>0.815</a:t>
+            </a:r>
+            <a:br/>
+            <a:r>
+              <a:t>trained on mBRSET</a:t>
+            </a:r>
+          </a:p>
+        </p:txBody>
+      </p:sp>
+      <p:sp>
+        <p:nvSpPr>
+          <p:cNvPr id="13" name="TextBox 12"/>
+          <p:cNvSpPr txBox="1"/>
+          <p:nvPr/>
+        </p:nvSpPr>
+        <p:spPr>
+          <a:xfrm>
+            <a:off x="594360" y="3977639"/>
+            <a:ext cx="11064240" cy="1874520"/>
+          </a:xfrm>
+          <a:prstGeom prst="rect">
+            <a:avLst/>
+          </a:prstGeom>
+          <a:noFill/>
+        </p:spPr>
+        <p:txBody>
+          <a:bodyPr wrap="square">
+            <a:spAutoFit/>
+          </a:bodyPr>
+          <a:lstStyle/>
+          <a:p>
+            <a:pPr>
+              <a:spcAft>
+                <a:spcPts val="900"/>
+              </a:spcAft>
+              <a:defRPr sz="1300">
+                <a:solidFill>
+                  <a:srgbClr val="1A1A1A"/>
+                </a:solidFill>
+              </a:defRPr>
+            </a:pPr>
+            <a:r>
+              <a:t>• Threshold retuning alone recovered a third of the loss — no retraining.</a:t>
+            </a:r>
+          </a:p>
+          <a:p>
+            <a:pPr>
+              <a:spcAft>
+                <a:spcPts val="900"/>
+              </a:spcAft>
+              <a:defRPr sz="1300">
+                <a:solidFill>
+                  <a:srgbClr val="1A1A1A"/>
+                </a:solidFill>
+              </a:defRPr>
+            </a:pPr>
+            <a:r>
+              <a:t>• The 0.765 ceiling was measured by sweeping every attainable cutoff. Monotone post-processing cannot exceed it, by set inclusion — so calibration, temperature scaling and label-shift correction are provably ruled out from here.</a:t>
+            </a:r>
+          </a:p>
+          <a:p>
+            <a:pPr>
+              <a:spcAft>
+                <a:spcPts val="900"/>
+              </a:spcAft>
+              <a:defRPr sz="1300">
+                <a:solidFill>
+                  <a:srgbClr val="1A1A1A"/>
+                </a:solidFill>
+              </a:defRPr>
+            </a:pPr>
+            <a:r>
+              <a:t>• The shift is not label shift: ROC is invariant to class distribution (Fawcett 2006, 21,726 cites), yet our AUC fell 0.988 → 0.909.</a:t>
+            </a:r>
+          </a:p>
+        </p:txBody>
+      </p:sp>
+      <p:sp>
+        <p:nvSpPr>
+          <p:cNvPr id="14" name="TextBox 13"/>
+          <p:cNvSpPr txBox="1"/>
+          <p:nvPr/>
+        </p:nvSpPr>
+        <p:spPr>
+          <a:xfrm>
+            <a:off x="594360" y="5897880"/>
+            <a:ext cx="11064240" cy="594360"/>
+          </a:xfrm>
+          <a:prstGeom prst="rect">
+            <a:avLst/>
+          </a:prstGeom>
+          <a:noFill/>
+        </p:spPr>
+        <p:txBody>
+          <a:bodyPr wrap="square">
+            <a:spAutoFit/>
+          </a:bodyPr>
+          <a:lstStyle/>
+          <a:p>
             <a:pPr>
               <a:defRPr sz="1400" b="1">
                 <a:solidFill>
@@ -5426,7 +5544,7 @@
               </a:defRPr>
             </a:pPr>
             <a:r>
-              <a:t>The decomposition — prevalence vs. calibration vs. ranking — is computable in closed form. Most cross-device papers report one number and attribute all of it to the model.</a:t>
+              <a:t>Most cross-device papers report one number and blame the model. The split is computable.</a:t>
             </a:r>
           </a:p>
         </p:txBody>
@@ -5457,8 +5575,8 @@
         </p:nvSpPr>
         <p:spPr>
           <a:xfrm>
-            <a:off x="502920" y="320040"/>
-            <a:ext cx="11247120" cy="822960"/>
+            <a:off x="548640" y="347472"/>
+            <a:ext cx="11155680" cy="777240"/>
           </a:xfrm>
           <a:prstGeom prst="rect">
             <a:avLst/>
@@ -5472,514 +5590,90 @@
           <a:lstStyle/>
           <a:p>
             <a:pPr>
-              <a:defRPr sz="2700" b="1">
+              <a:defRPr sz="2800" b="1">
                 <a:solidFill>
                   <a:srgbClr val="1F4E79"/>
                 </a:solidFill>
               </a:defRPr>
             </a:pPr>
             <a:r>
-              <a:t>We tested our own proposal before building it — and it failed</a:t>
+              <a:t>We tested our own proposal before building it</a:t>
             </a:r>
           </a:p>
           <a:p>
             <a:pPr>
               <a:defRPr sz="1300">
                 <a:solidFill>
-                  <a:srgbClr val="5A5A5A"/>
-                </a:solidFill>
-              </a:defRPr>
-            </a:pPr>
-            <a:r>
-              <a:t>The theory gave a falsifiable prediction. We checked it against data we already had, in minutes rather than a week.</a:t>
-            </a:r>
-          </a:p>
-        </p:txBody>
-      </p:sp>
-      <p:graphicFrame>
-        <p:nvGraphicFramePr>
-          <p:cNvPr id="3" name="Table 2"/>
-          <p:cNvGraphicFramePr>
-            <a:graphicFrameLocks noGrp="1"/>
-          </p:cNvGraphicFramePr>
+                  <a:srgbClr val="6B6B6B"/>
+                </a:solidFill>
+              </a:defRPr>
+            </a:pPr>
+            <a:r>
+              <a:t>Theory reduced multi-view aggregation to one measurable quantity, so it could be falsified in minutes.</a:t>
+            </a:r>
+          </a:p>
+        </p:txBody>
+      </p:sp>
+      <p:sp>
+        <p:nvSpPr>
+          <p:cNvPr id="3" name="Rounded Rectangle 2"/>
+          <p:cNvSpPr/>
           <p:nvPr/>
-        </p:nvGraphicFramePr>
-        <p:xfrm>
-          <a:off x="548640" y="1508760"/>
-          <a:ext cx="11155679" cy="1371600"/>
-        </p:xfrm>
-        <a:graphic>
-          <a:graphicData uri="http://schemas.openxmlformats.org/drawingml/2006/table">
-            <a:tbl>
-              <a:tblPr firstRow="1" bandRow="1">
-                <a:tableStyleId>{5C22544A-7EE6-4342-B048-85BDC9FD1C3A}</a:tableStyleId>
-              </a:tblPr>
-              <a:tblGrid>
-                <a:gridCol w="5000822"/>
-                <a:gridCol w="2308071"/>
-                <a:gridCol w="2500411"/>
-                <a:gridCol w="1346375"/>
-              </a:tblGrid>
-              <a:tr h="342900">
-                <a:tc>
-                  <a:txBody>
-                    <a:bodyPr/>
-                    <a:lstStyle/>
-                    <a:p>
-                      <a:pPr algn="l">
-                        <a:defRPr sz="1150" b="1">
-                          <a:solidFill>
-                            <a:srgbClr val="FFFFFF"/>
-                          </a:solidFill>
-                        </a:defRPr>
-                      </a:pPr>
-                      <a:r>
-                        <a:rPr sz="1150" b="1">
-                          <a:solidFill>
-                            <a:srgbClr val="FFFFFF"/>
-                          </a:solidFill>
-                        </a:rPr>
-                        <a:t>Aggregation of a patient's images</a:t>
-                      </a:r>
-                    </a:p>
-                  </a:txBody>
-                  <a:tcPr marL="54864" marR="54864" marT="18288" marB="18288">
-                    <a:solidFill>
-                      <a:srgbClr val="1F4E79"/>
-                    </a:solidFill>
-                  </a:tcPr>
-                </a:tc>
-                <a:tc>
-                  <a:txBody>
-                    <a:bodyPr/>
-                    <a:lstStyle/>
-                    <a:p>
-                      <a:pPr algn="ctr">
-                        <a:defRPr sz="1150" b="1">
-                          <a:solidFill>
-                            <a:srgbClr val="FFFFFF"/>
-                          </a:solidFill>
-                        </a:defRPr>
-                      </a:pPr>
-                      <a:r>
-                        <a:rPr sz="1150" b="1">
-                          <a:solidFill>
-                            <a:srgbClr val="FFFFFF"/>
-                          </a:solidFill>
-                        </a:rPr>
-                        <a:t>Predicted by theory</a:t>
-                      </a:r>
-                    </a:p>
-                  </a:txBody>
-                  <a:tcPr marL="54864" marR="54864" marT="18288" marB="18288">
-                    <a:solidFill>
-                      <a:srgbClr val="1F4E79"/>
-                    </a:solidFill>
-                  </a:tcPr>
-                </a:tc>
-                <a:tc>
-                  <a:txBody>
-                    <a:bodyPr/>
-                    <a:lstStyle/>
-                    <a:p>
-                      <a:pPr algn="ctr">
-                        <a:defRPr sz="1150" b="1">
-                          <a:solidFill>
-                            <a:srgbClr val="FFFFFF"/>
-                          </a:solidFill>
-                        </a:defRPr>
-                      </a:pPr>
-                      <a:r>
-                        <a:rPr sz="1150" b="1">
-                          <a:solidFill>
-                            <a:srgbClr val="FFFFFF"/>
-                          </a:solidFill>
-                        </a:rPr>
-                        <a:t>Actually measured</a:t>
-                      </a:r>
-                    </a:p>
-                  </a:txBody>
-                  <a:tcPr marL="54864" marR="54864" marT="18288" marB="18288">
-                    <a:solidFill>
-                      <a:srgbClr val="1F4E79"/>
-                    </a:solidFill>
-                  </a:tcPr>
-                </a:tc>
-                <a:tc>
-                  <a:txBody>
-                    <a:bodyPr/>
-                    <a:lstStyle/>
-                    <a:p>
-                      <a:pPr algn="ctr">
-                        <a:defRPr sz="1150" b="1">
-                          <a:solidFill>
-                            <a:srgbClr val="FFFFFF"/>
-                          </a:solidFill>
-                        </a:defRPr>
-                      </a:pPr>
-                      <a:r>
-                        <a:rPr sz="1150" b="1">
-                          <a:solidFill>
-                            <a:srgbClr val="FFFFFF"/>
-                          </a:solidFill>
-                        </a:rPr>
-                        <a:t>Verdict</a:t>
-                      </a:r>
-                    </a:p>
-                  </a:txBody>
-                  <a:tcPr marL="54864" marR="54864" marT="18288" marB="18288">
-                    <a:solidFill>
-                      <a:srgbClr val="1F4E79"/>
-                    </a:solidFill>
-                  </a:tcPr>
-                </a:tc>
-              </a:tr>
-              <a:tr h="342900">
-                <a:tc>
-                  <a:txBody>
-                    <a:bodyPr/>
-                    <a:lstStyle/>
-                    <a:p>
-                      <a:pPr algn="l">
-                        <a:defRPr sz="1150" b="1">
-                          <a:solidFill>
-                            <a:srgbClr val="1A1A1A"/>
-                          </a:solidFill>
-                        </a:defRPr>
-                      </a:pPr>
-                      <a:r>
-                        <a:rPr sz="1150" b="1">
-                          <a:solidFill>
-                            <a:srgbClr val="1A1A1A"/>
-                          </a:solidFill>
-                        </a:rPr>
-                        <a:t>Diabetic retinopathy, 4 images per patient</a:t>
-                      </a:r>
-                    </a:p>
-                  </a:txBody>
-                  <a:tcPr marL="54864" marR="54864" marT="18288" marB="18288">
-                    <a:solidFill>
-                      <a:srgbClr val="FDECEC"/>
-                    </a:solidFill>
-                  </a:tcPr>
-                </a:tc>
-                <a:tc>
-                  <a:txBody>
-                    <a:bodyPr/>
-                    <a:lstStyle/>
-                    <a:p>
-                      <a:pPr algn="ctr">
-                        <a:defRPr sz="1150" b="1">
-                          <a:solidFill>
-                            <a:srgbClr val="1A1A1A"/>
-                          </a:solidFill>
-                        </a:defRPr>
-                      </a:pPr>
-                      <a:r>
-                        <a:rPr sz="1150" b="1">
-                          <a:solidFill>
-                            <a:srgbClr val="1A1A1A"/>
-                          </a:solidFill>
-                        </a:rPr>
-                        <a:t>0.968</a:t>
-                      </a:r>
-                    </a:p>
-                  </a:txBody>
-                  <a:tcPr marL="54864" marR="54864" marT="18288" marB="18288">
-                    <a:solidFill>
-                      <a:srgbClr val="FDECEC"/>
-                    </a:solidFill>
-                  </a:tcPr>
-                </a:tc>
-                <a:tc>
-                  <a:txBody>
-                    <a:bodyPr/>
-                    <a:lstStyle/>
-                    <a:p>
-                      <a:pPr algn="ctr">
-                        <a:defRPr sz="1150" b="1">
-                          <a:solidFill>
-                            <a:srgbClr val="1A1A1A"/>
-                          </a:solidFill>
-                        </a:defRPr>
-                      </a:pPr>
-                      <a:r>
-                        <a:rPr sz="1150" b="1">
-                          <a:solidFill>
-                            <a:srgbClr val="1A1A1A"/>
-                          </a:solidFill>
-                        </a:rPr>
-                        <a:t>0.842</a:t>
-                      </a:r>
-                    </a:p>
-                  </a:txBody>
-                  <a:tcPr marL="54864" marR="54864" marT="18288" marB="18288">
-                    <a:solidFill>
-                      <a:srgbClr val="FDECEC"/>
-                    </a:solidFill>
-                  </a:tcPr>
-                </a:tc>
-                <a:tc>
-                  <a:txBody>
-                    <a:bodyPr/>
-                    <a:lstStyle/>
-                    <a:p>
-                      <a:pPr algn="ctr">
-                        <a:defRPr sz="1150" b="1">
-                          <a:solidFill>
-                            <a:srgbClr val="1A1A1A"/>
-                          </a:solidFill>
-                        </a:defRPr>
-                      </a:pPr>
-                      <a:r>
-                        <a:rPr sz="1150" b="1">
-                          <a:solidFill>
-                            <a:srgbClr val="1A1A1A"/>
-                          </a:solidFill>
-                        </a:rPr>
-                        <a:t>Failed</a:t>
-                      </a:r>
-                    </a:p>
-                  </a:txBody>
-                  <a:tcPr marL="54864" marR="54864" marT="18288" marB="18288">
-                    <a:solidFill>
-                      <a:srgbClr val="FDECEC"/>
-                    </a:solidFill>
-                  </a:tcPr>
-                </a:tc>
-              </a:tr>
-              <a:tr h="342900">
-                <a:tc>
-                  <a:txBody>
-                    <a:bodyPr/>
-                    <a:lstStyle/>
-                    <a:p>
-                      <a:pPr algn="l">
-                        <a:defRPr sz="1150" b="1">
-                          <a:solidFill>
-                            <a:srgbClr val="1A1A1A"/>
-                          </a:solidFill>
-                        </a:defRPr>
-                      </a:pPr>
-                      <a:r>
-                        <a:rPr sz="1150" b="1">
-                          <a:solidFill>
-                            <a:srgbClr val="1A1A1A"/>
-                          </a:solidFill>
-                        </a:rPr>
-                        <a:t>Diabetic retinopathy, 2 images per eye</a:t>
-                      </a:r>
-                    </a:p>
-                  </a:txBody>
-                  <a:tcPr marL="54864" marR="54864" marT="18288" marB="18288">
-                    <a:solidFill>
-                      <a:srgbClr val="FDECEC"/>
-                    </a:solidFill>
-                  </a:tcPr>
-                </a:tc>
-                <a:tc>
-                  <a:txBody>
-                    <a:bodyPr/>
-                    <a:lstStyle/>
-                    <a:p>
-                      <a:pPr algn="ctr">
-                        <a:defRPr sz="1150" b="1">
-                          <a:solidFill>
-                            <a:srgbClr val="1A1A1A"/>
-                          </a:solidFill>
-                        </a:defRPr>
-                      </a:pPr>
-                      <a:r>
-                        <a:rPr sz="1150" b="1">
-                          <a:solidFill>
-                            <a:srgbClr val="1A1A1A"/>
-                          </a:solidFill>
-                        </a:rPr>
-                        <a:t>0.940</a:t>
-                      </a:r>
-                    </a:p>
-                  </a:txBody>
-                  <a:tcPr marL="54864" marR="54864" marT="18288" marB="18288">
-                    <a:solidFill>
-                      <a:srgbClr val="FDECEC"/>
-                    </a:solidFill>
-                  </a:tcPr>
-                </a:tc>
-                <a:tc>
-                  <a:txBody>
-                    <a:bodyPr/>
-                    <a:lstStyle/>
-                    <a:p>
-                      <a:pPr algn="ctr">
-                        <a:defRPr sz="1150" b="1">
-                          <a:solidFill>
-                            <a:srgbClr val="1A1A1A"/>
-                          </a:solidFill>
-                        </a:defRPr>
-                      </a:pPr>
-                      <a:r>
-                        <a:rPr sz="1150" b="1">
-                          <a:solidFill>
-                            <a:srgbClr val="1A1A1A"/>
-                          </a:solidFill>
-                        </a:rPr>
-                        <a:t>0.883</a:t>
-                      </a:r>
-                    </a:p>
-                  </a:txBody>
-                  <a:tcPr marL="54864" marR="54864" marT="18288" marB="18288">
-                    <a:solidFill>
-                      <a:srgbClr val="FDECEC"/>
-                    </a:solidFill>
-                  </a:tcPr>
-                </a:tc>
-                <a:tc>
-                  <a:txBody>
-                    <a:bodyPr/>
-                    <a:lstStyle/>
-                    <a:p>
-                      <a:pPr algn="ctr">
-                        <a:defRPr sz="1150" b="1">
-                          <a:solidFill>
-                            <a:srgbClr val="1A1A1A"/>
-                          </a:solidFill>
-                        </a:defRPr>
-                      </a:pPr>
-                      <a:r>
-                        <a:rPr sz="1150" b="1">
-                          <a:solidFill>
-                            <a:srgbClr val="1A1A1A"/>
-                          </a:solidFill>
-                        </a:rPr>
-                        <a:t>Failed</a:t>
-                      </a:r>
-                    </a:p>
-                  </a:txBody>
-                  <a:tcPr marL="54864" marR="54864" marT="18288" marB="18288">
-                    <a:solidFill>
-                      <a:srgbClr val="FDECEC"/>
-                    </a:solidFill>
-                  </a:tcPr>
-                </a:tc>
-              </a:tr>
-              <a:tr h="342900">
-                <a:tc>
-                  <a:txBody>
-                    <a:bodyPr/>
-                    <a:lstStyle/>
-                    <a:p>
-                      <a:pPr algn="l">
-                        <a:defRPr sz="1150" b="0">
-                          <a:solidFill>
-                            <a:srgbClr val="1A1A1A"/>
-                          </a:solidFill>
-                        </a:defRPr>
-                      </a:pPr>
-                      <a:r>
-                        <a:rPr sz="1150" b="0">
-                          <a:solidFill>
-                            <a:srgbClr val="1A1A1A"/>
-                          </a:solidFill>
-                        </a:rPr>
-                        <a:t>Macular edema, max over 4 images</a:t>
-                      </a:r>
-                    </a:p>
-                  </a:txBody>
-                  <a:tcPr marL="54864" marR="54864" marT="18288" marB="18288">
-                    <a:solidFill>
-                      <a:srgbClr val="FFFFFF"/>
-                    </a:solidFill>
-                  </a:tcPr>
-                </a:tc>
-                <a:tc>
-                  <a:txBody>
-                    <a:bodyPr/>
-                    <a:lstStyle/>
-                    <a:p>
-                      <a:pPr algn="ctr">
-                        <a:defRPr sz="1150" b="0">
-                          <a:solidFill>
-                            <a:srgbClr val="1A1A1A"/>
-                          </a:solidFill>
-                        </a:defRPr>
-                      </a:pPr>
-                      <a:r>
-                        <a:rPr sz="1150" b="0">
-                          <a:solidFill>
-                            <a:srgbClr val="1A1A1A"/>
-                          </a:solidFill>
-                        </a:rPr>
-                        <a:t>—</a:t>
-                      </a:r>
-                    </a:p>
-                  </a:txBody>
-                  <a:tcPr marL="54864" marR="54864" marT="18288" marB="18288">
-                    <a:solidFill>
-                      <a:srgbClr val="FFFFFF"/>
-                    </a:solidFill>
-                  </a:tcPr>
-                </a:tc>
-                <a:tc>
-                  <a:txBody>
-                    <a:bodyPr/>
-                    <a:lstStyle/>
-                    <a:p>
-                      <a:pPr algn="ctr">
-                        <a:defRPr sz="1150" b="0">
-                          <a:solidFill>
-                            <a:srgbClr val="1A1A1A"/>
-                          </a:solidFill>
-                        </a:defRPr>
-                      </a:pPr>
-                      <a:r>
-                        <a:rPr sz="1150" b="0">
-                          <a:solidFill>
-                            <a:srgbClr val="1A1A1A"/>
-                          </a:solidFill>
-                        </a:rPr>
-                        <a:t>0.969  (from 0.933)</a:t>
-                      </a:r>
-                    </a:p>
-                  </a:txBody>
-                  <a:tcPr marL="54864" marR="54864" marT="18288" marB="18288">
-                    <a:solidFill>
-                      <a:srgbClr val="FFFFFF"/>
-                    </a:solidFill>
-                  </a:tcPr>
-                </a:tc>
-                <a:tc>
-                  <a:txBody>
-                    <a:bodyPr/>
-                    <a:lstStyle/>
-                    <a:p>
-                      <a:pPr algn="ctr">
-                        <a:defRPr sz="1150" b="0">
-                          <a:solidFill>
-                            <a:srgbClr val="1A1A1A"/>
-                          </a:solidFill>
-                        </a:defRPr>
-                      </a:pPr>
-                      <a:r>
-                        <a:rPr sz="1150" b="0">
-                          <a:solidFill>
-                            <a:srgbClr val="1A1A1A"/>
-                          </a:solidFill>
-                        </a:rPr>
-                        <a:t>Worked</a:t>
-                      </a:r>
-                    </a:p>
-                  </a:txBody>
-                  <a:tcPr marL="54864" marR="54864" marT="18288" marB="18288">
-                    <a:solidFill>
-                      <a:srgbClr val="FFFFFF"/>
-                    </a:solidFill>
-                  </a:tcPr>
-                </a:tc>
-              </a:tr>
-            </a:tbl>
-          </a:graphicData>
-        </a:graphic>
-      </p:graphicFrame>
+        </p:nvSpPr>
+        <p:spPr>
+          <a:xfrm>
+            <a:off x="822960" y="1417320"/>
+            <a:ext cx="4846320" cy="566928"/>
+          </a:xfrm>
+          <a:prstGeom prst="roundRect">
+            <a:avLst/>
+          </a:prstGeom>
+          <a:solidFill>
+            <a:srgbClr val="ECEFF4"/>
+          </a:solidFill>
+          <a:ln>
+            <a:solidFill>
+              <a:srgbClr val="ECEFF4"/>
+            </a:solidFill>
+          </a:ln>
+          <a:effectLst/>
+        </p:spPr>
+        <p:style>
+          <a:lnRef idx="1">
+            <a:schemeClr val="accent1"/>
+          </a:lnRef>
+          <a:fillRef idx="3">
+            <a:schemeClr val="accent1"/>
+          </a:fillRef>
+          <a:effectRef idx="2">
+            <a:schemeClr val="accent1"/>
+          </a:effectRef>
+          <a:fontRef idx="minor">
+            <a:schemeClr val="lt1"/>
+          </a:fontRef>
+        </p:style>
+        <p:txBody>
+          <a:bodyPr rtlCol="0" anchor="ctr" wrap="square"/>
+          <a:lstStyle/>
+          <a:p>
+            <a:pPr algn="ctr">
+              <a:defRPr sz="1400" b="1">
+                <a:solidFill>
+                  <a:srgbClr val="1A1A1A"/>
+                </a:solidFill>
+              </a:defRPr>
+            </a:pPr>
+            <a:r>
+              <a:rPr sz="1400" b="1">
+                <a:solidFill>
+                  <a:srgbClr val="1A1A1A"/>
+                </a:solidFill>
+              </a:rPr>
+              <a:t>AUC_K  =  Φ( z₁ · √( K / (1 + (K−1)ρ) ) )</a:t>
+            </a:r>
+          </a:p>
+        </p:txBody>
+      </p:sp>
       <p:sp>
         <p:nvSpPr>
           <p:cNvPr id="4" name="TextBox 3"/>
@@ -5988,8 +5682,8 @@
         </p:nvSpPr>
         <p:spPr>
           <a:xfrm>
-            <a:off x="548640" y="3108960"/>
-            <a:ext cx="11155680" cy="2697479"/>
+            <a:off x="5806440" y="1481328"/>
+            <a:ext cx="5669280" cy="310896"/>
           </a:xfrm>
           <a:prstGeom prst="rect">
             <a:avLst/>
@@ -6002,63 +5696,19 @@
           </a:bodyPr>
           <a:lstStyle/>
           <a:p>
-            <a:pPr>
-              <a:spcAft>
-                <a:spcPts val="600"/>
-              </a:spcAft>
-              <a:defRPr sz="1250">
+            <a:pPr algn="l">
+              <a:defRPr sz="1200" b="0">
                 <a:solidFill>
                   <a:srgbClr val="1A1A1A"/>
                 </a:solidFill>
               </a:defRPr>
             </a:pPr>
             <a:r>
-              <a:t>• Why it failed, and it is a mechanism we can state precisely:</a:t>
-            </a:r>
-          </a:p>
-          <a:p>
-            <a:pPr lvl="1">
-              <a:spcAft>
-                <a:spcPts val="600"/>
-              </a:spcAft>
-              <a:defRPr sz="1150">
-                <a:solidFill>
-                  <a:srgbClr val="5A5A5A"/>
-                </a:solidFill>
-              </a:defRPr>
-            </a:pPr>
-            <a:r>
-              <a:t>– The theory assumes every image in a patient's group carries the same label. 14.5% of patients have one eye affected and the other clear, so averaging pulls the diseased eye's score down toward the healthy one and the patient looks healthier than they are.</a:t>
-            </a:r>
-          </a:p>
-          <a:p>
-            <a:pPr lvl="1">
-              <a:spcAft>
-                <a:spcPts val="600"/>
-              </a:spcAft>
-              <a:defRPr sz="1150">
-                <a:solidFill>
-                  <a:srgbClr val="5A5A5A"/>
-                </a:solidFill>
-              </a:defRPr>
-            </a:pPr>
-            <a:r>
-              <a:t>– Independently, the theory predicts mean-pooling is the wrong operator when a bag is heterogeneous — an explicit counterexample takes AUC from 0.75 to 0.50 under mean-pooling while the median gives 1.00. The published literature agrees: the best reported multi-view gain in medical imaging is +0.015 AUC (Wu et al., MIDL 2020), and naive fusion there scored WORSE than the best single view.</a:t>
-            </a:r>
-          </a:p>
-          <a:p>
-            <a:pPr>
-              <a:spcAft>
-                <a:spcPts val="600"/>
-              </a:spcAft>
-              <a:defRPr sz="1250">
-                <a:solidFill>
-                  <a:srgbClr val="1A1A1A"/>
-                </a:solidFill>
-              </a:defRPr>
-            </a:pPr>
-            <a:r>
-              <a:t>• Macular edema behaves differently and consistently with theory: it is a focal finding that appears strongly in one image, so a maximum — not a mean — is the correct aggregator, and it gives +0.036 AUC.</a:t>
+              <a:t>ρ = within-patient score correlation.</a:t>
+            </a:r>
+            <a:br/>
+            <a:r>
+              <a:t>Measured, not assumed: ρ = 0.363</a:t>
             </a:r>
           </a:p>
         </p:txBody>
@@ -6071,8 +5721,8 @@
         </p:nvSpPr>
         <p:spPr>
           <a:xfrm>
-            <a:off x="548640" y="5852160"/>
-            <a:ext cx="11155680" cy="640080"/>
+            <a:off x="822960" y="2331720"/>
+            <a:ext cx="2743200" cy="310896"/>
           </a:xfrm>
           <a:prstGeom prst="rect">
             <a:avLst/>
@@ -6085,15 +5735,852 @@
           </a:bodyPr>
           <a:lstStyle/>
           <a:p>
+            <a:pPr algn="ctr">
+              <a:defRPr sz="1300" b="1">
+                <a:solidFill>
+                  <a:srgbClr val="6B6B6B"/>
+                </a:solidFill>
+              </a:defRPr>
+            </a:pPr>
+            <a:r>
+              <a:t>PREDICTED</a:t>
+            </a:r>
+          </a:p>
+        </p:txBody>
+      </p:sp>
+      <p:sp>
+        <p:nvSpPr>
+          <p:cNvPr id="6" name="TextBox 5"/>
+          <p:cNvSpPr txBox="1"/>
+          <p:nvPr/>
+        </p:nvSpPr>
+        <p:spPr>
+          <a:xfrm>
+            <a:off x="5120640" y="2331720"/>
+            <a:ext cx="2743200" cy="310896"/>
+          </a:xfrm>
+          <a:prstGeom prst="rect">
+            <a:avLst/>
+          </a:prstGeom>
+          <a:noFill/>
+        </p:spPr>
+        <p:txBody>
+          <a:bodyPr wrap="square">
+            <a:spAutoFit/>
+          </a:bodyPr>
+          <a:lstStyle/>
+          <a:p>
+            <a:pPr algn="ctr">
+              <a:defRPr sz="1300" b="1">
+                <a:solidFill>
+                  <a:srgbClr val="6B6B6B"/>
+                </a:solidFill>
+              </a:defRPr>
+            </a:pPr>
+            <a:r>
+              <a:t>MEASURED</a:t>
+            </a:r>
+          </a:p>
+        </p:txBody>
+      </p:sp>
+      <p:sp>
+        <p:nvSpPr>
+          <p:cNvPr id="7" name="TextBox 6"/>
+          <p:cNvSpPr txBox="1"/>
+          <p:nvPr/>
+        </p:nvSpPr>
+        <p:spPr>
+          <a:xfrm>
+            <a:off x="594360" y="2834639"/>
+            <a:ext cx="3108960" cy="310896"/>
+          </a:xfrm>
+          <a:prstGeom prst="rect">
+            <a:avLst/>
+          </a:prstGeom>
+          <a:noFill/>
+        </p:spPr>
+        <p:txBody>
+          <a:bodyPr wrap="square">
+            <a:spAutoFit/>
+          </a:bodyPr>
+          <a:lstStyle/>
+          <a:p>
+            <a:pPr algn="l">
+              <a:defRPr sz="1150" b="0">
+                <a:solidFill>
+                  <a:srgbClr val="1A1A1A"/>
+                </a:solidFill>
+              </a:defRPr>
+            </a:pPr>
+            <a:r>
+              <a:t>Diabetic retinopathy</a:t>
+            </a:r>
+            <a:br/>
+            <a:r>
+              <a:t>4 images / patient</a:t>
+            </a:r>
+          </a:p>
+        </p:txBody>
+      </p:sp>
+      <p:sp>
+        <p:nvSpPr>
+          <p:cNvPr id="8" name="Rounded Rectangle 7"/>
+          <p:cNvSpPr/>
+          <p:nvPr/>
+        </p:nvSpPr>
+        <p:spPr>
+          <a:xfrm>
+            <a:off x="3794760" y="2788920"/>
+            <a:ext cx="1371600" cy="548640"/>
+          </a:xfrm>
+          <a:prstGeom prst="roundRect">
+            <a:avLst/>
+          </a:prstGeom>
+          <a:solidFill>
+            <a:srgbClr val="D8DDE6"/>
+          </a:solidFill>
+          <a:ln>
+            <a:solidFill>
+              <a:srgbClr val="D8DDE6"/>
+            </a:solidFill>
+          </a:ln>
+          <a:effectLst/>
+        </p:spPr>
+        <p:style>
+          <a:lnRef idx="1">
+            <a:schemeClr val="accent1"/>
+          </a:lnRef>
+          <a:fillRef idx="3">
+            <a:schemeClr val="accent1"/>
+          </a:fillRef>
+          <a:effectRef idx="2">
+            <a:schemeClr val="accent1"/>
+          </a:effectRef>
+          <a:fontRef idx="minor">
+            <a:schemeClr val="lt1"/>
+          </a:fontRef>
+        </p:style>
+        <p:txBody>
+          <a:bodyPr rtlCol="0" anchor="ctr" wrap="square"/>
+          <a:lstStyle/>
+          <a:p>
+            <a:pPr algn="ctr">
+              <a:defRPr sz="1400" b="1">
+                <a:solidFill>
+                  <a:srgbClr val="1A1A1A"/>
+                </a:solidFill>
+              </a:defRPr>
+            </a:pPr>
+            <a:r>
+              <a:rPr sz="1400" b="1">
+                <a:solidFill>
+                  <a:srgbClr val="1A1A1A"/>
+                </a:solidFill>
+              </a:rPr>
+              <a:t>0.968</a:t>
+            </a:r>
+          </a:p>
+        </p:txBody>
+      </p:sp>
+      <p:sp>
+        <p:nvSpPr>
+          <p:cNvPr id="9" name="Right Arrow 8"/>
+          <p:cNvSpPr/>
+          <p:nvPr/>
+        </p:nvSpPr>
+        <p:spPr>
+          <a:xfrm>
+            <a:off x="5349240" y="2962656"/>
+            <a:ext cx="640080" cy="201168"/>
+          </a:xfrm>
+          <a:prstGeom prst="rightArrow">
+            <a:avLst/>
+          </a:prstGeom>
+          <a:solidFill>
+            <a:srgbClr val="6B6B6B"/>
+          </a:solidFill>
+          <a:ln>
+            <a:noFill/>
+          </a:ln>
+          <a:effectLst/>
+        </p:spPr>
+        <p:style>
+          <a:lnRef idx="1">
+            <a:schemeClr val="accent1"/>
+          </a:lnRef>
+          <a:fillRef idx="3">
+            <a:schemeClr val="accent1"/>
+          </a:fillRef>
+          <a:effectRef idx="2">
+            <a:schemeClr val="accent1"/>
+          </a:effectRef>
+          <a:fontRef idx="minor">
+            <a:schemeClr val="lt1"/>
+          </a:fontRef>
+        </p:style>
+        <p:txBody>
+          <a:bodyPr rtlCol="0" anchor="ctr"/>
+          <a:lstStyle/>
+          <a:p>
+            <a:pPr algn="ctr"/>
+          </a:p>
+        </p:txBody>
+      </p:sp>
+      <p:sp>
+        <p:nvSpPr>
+          <p:cNvPr id="10" name="Rounded Rectangle 9"/>
+          <p:cNvSpPr/>
+          <p:nvPr/>
+        </p:nvSpPr>
+        <p:spPr>
+          <a:xfrm>
+            <a:off x="6172200" y="2788920"/>
+            <a:ext cx="1371600" cy="548640"/>
+          </a:xfrm>
+          <a:prstGeom prst="roundRect">
+            <a:avLst/>
+          </a:prstGeom>
+          <a:solidFill>
+            <a:srgbClr val="B33A1A"/>
+          </a:solidFill>
+          <a:ln>
+            <a:solidFill>
+              <a:srgbClr val="B33A1A"/>
+            </a:solidFill>
+          </a:ln>
+          <a:effectLst/>
+        </p:spPr>
+        <p:style>
+          <a:lnRef idx="1">
+            <a:schemeClr val="accent1"/>
+          </a:lnRef>
+          <a:fillRef idx="3">
+            <a:schemeClr val="accent1"/>
+          </a:fillRef>
+          <a:effectRef idx="2">
+            <a:schemeClr val="accent1"/>
+          </a:effectRef>
+          <a:fontRef idx="minor">
+            <a:schemeClr val="lt1"/>
+          </a:fontRef>
+        </p:style>
+        <p:txBody>
+          <a:bodyPr rtlCol="0" anchor="ctr" wrap="square"/>
+          <a:lstStyle/>
+          <a:p>
+            <a:pPr algn="ctr">
+              <a:defRPr sz="1400" b="1">
+                <a:solidFill>
+                  <a:srgbClr val="FFFFFF"/>
+                </a:solidFill>
+              </a:defRPr>
+            </a:pPr>
+            <a:r>
+              <a:rPr sz="1400" b="1">
+                <a:solidFill>
+                  <a:srgbClr val="FFFFFF"/>
+                </a:solidFill>
+              </a:rPr>
+              <a:t>0.842</a:t>
+            </a:r>
+          </a:p>
+        </p:txBody>
+      </p:sp>
+      <p:sp>
+        <p:nvSpPr>
+          <p:cNvPr id="11" name="TextBox 10"/>
+          <p:cNvSpPr txBox="1"/>
+          <p:nvPr/>
+        </p:nvSpPr>
+        <p:spPr>
+          <a:xfrm>
+            <a:off x="7772400" y="2834639"/>
+            <a:ext cx="3840480" cy="310896"/>
+          </a:xfrm>
+          <a:prstGeom prst="rect">
+            <a:avLst/>
+          </a:prstGeom>
+          <a:noFill/>
+        </p:spPr>
+        <p:txBody>
+          <a:bodyPr wrap="square">
+            <a:spAutoFit/>
+          </a:bodyPr>
+          <a:lstStyle/>
+          <a:p>
+            <a:pPr algn="l">
+              <a:defRPr sz="1200" b="1">
+                <a:solidFill>
+                  <a:srgbClr val="B33A1A"/>
+                </a:solidFill>
+              </a:defRPr>
+            </a:pPr>
+            <a:r>
+              <a:t>prediction failed</a:t>
+            </a:r>
+          </a:p>
+        </p:txBody>
+      </p:sp>
+      <p:sp>
+        <p:nvSpPr>
+          <p:cNvPr id="12" name="TextBox 11"/>
+          <p:cNvSpPr txBox="1"/>
+          <p:nvPr/>
+        </p:nvSpPr>
+        <p:spPr>
+          <a:xfrm>
+            <a:off x="594360" y="3547872"/>
+            <a:ext cx="3108960" cy="310896"/>
+          </a:xfrm>
+          <a:prstGeom prst="rect">
+            <a:avLst/>
+          </a:prstGeom>
+          <a:noFill/>
+        </p:spPr>
+        <p:txBody>
+          <a:bodyPr wrap="square">
+            <a:spAutoFit/>
+          </a:bodyPr>
+          <a:lstStyle/>
+          <a:p>
+            <a:pPr algn="l">
+              <a:defRPr sz="1150" b="0">
+                <a:solidFill>
+                  <a:srgbClr val="1A1A1A"/>
+                </a:solidFill>
+              </a:defRPr>
+            </a:pPr>
+            <a:r>
+              <a:t>Diabetic retinopathy</a:t>
+            </a:r>
+            <a:br/>
+            <a:r>
+              <a:t>2 images / eye</a:t>
+            </a:r>
+          </a:p>
+        </p:txBody>
+      </p:sp>
+      <p:sp>
+        <p:nvSpPr>
+          <p:cNvPr id="13" name="Rounded Rectangle 12"/>
+          <p:cNvSpPr/>
+          <p:nvPr/>
+        </p:nvSpPr>
+        <p:spPr>
+          <a:xfrm>
+            <a:off x="3794760" y="3502152"/>
+            <a:ext cx="1371600" cy="548640"/>
+          </a:xfrm>
+          <a:prstGeom prst="roundRect">
+            <a:avLst/>
+          </a:prstGeom>
+          <a:solidFill>
+            <a:srgbClr val="D8DDE6"/>
+          </a:solidFill>
+          <a:ln>
+            <a:solidFill>
+              <a:srgbClr val="D8DDE6"/>
+            </a:solidFill>
+          </a:ln>
+          <a:effectLst/>
+        </p:spPr>
+        <p:style>
+          <a:lnRef idx="1">
+            <a:schemeClr val="accent1"/>
+          </a:lnRef>
+          <a:fillRef idx="3">
+            <a:schemeClr val="accent1"/>
+          </a:fillRef>
+          <a:effectRef idx="2">
+            <a:schemeClr val="accent1"/>
+          </a:effectRef>
+          <a:fontRef idx="minor">
+            <a:schemeClr val="lt1"/>
+          </a:fontRef>
+        </p:style>
+        <p:txBody>
+          <a:bodyPr rtlCol="0" anchor="ctr" wrap="square"/>
+          <a:lstStyle/>
+          <a:p>
+            <a:pPr algn="ctr">
+              <a:defRPr sz="1400" b="1">
+                <a:solidFill>
+                  <a:srgbClr val="1A1A1A"/>
+                </a:solidFill>
+              </a:defRPr>
+            </a:pPr>
+            <a:r>
+              <a:rPr sz="1400" b="1">
+                <a:solidFill>
+                  <a:srgbClr val="1A1A1A"/>
+                </a:solidFill>
+              </a:rPr>
+              <a:t>0.940</a:t>
+            </a:r>
+          </a:p>
+        </p:txBody>
+      </p:sp>
+      <p:sp>
+        <p:nvSpPr>
+          <p:cNvPr id="14" name="Right Arrow 13"/>
+          <p:cNvSpPr/>
+          <p:nvPr/>
+        </p:nvSpPr>
+        <p:spPr>
+          <a:xfrm>
+            <a:off x="5349240" y="3675888"/>
+            <a:ext cx="640080" cy="201168"/>
+          </a:xfrm>
+          <a:prstGeom prst="rightArrow">
+            <a:avLst/>
+          </a:prstGeom>
+          <a:solidFill>
+            <a:srgbClr val="6B6B6B"/>
+          </a:solidFill>
+          <a:ln>
+            <a:noFill/>
+          </a:ln>
+          <a:effectLst/>
+        </p:spPr>
+        <p:style>
+          <a:lnRef idx="1">
+            <a:schemeClr val="accent1"/>
+          </a:lnRef>
+          <a:fillRef idx="3">
+            <a:schemeClr val="accent1"/>
+          </a:fillRef>
+          <a:effectRef idx="2">
+            <a:schemeClr val="accent1"/>
+          </a:effectRef>
+          <a:fontRef idx="minor">
+            <a:schemeClr val="lt1"/>
+          </a:fontRef>
+        </p:style>
+        <p:txBody>
+          <a:bodyPr rtlCol="0" anchor="ctr"/>
+          <a:lstStyle/>
+          <a:p>
+            <a:pPr algn="ctr"/>
+          </a:p>
+        </p:txBody>
+      </p:sp>
+      <p:sp>
+        <p:nvSpPr>
+          <p:cNvPr id="15" name="Rounded Rectangle 14"/>
+          <p:cNvSpPr/>
+          <p:nvPr/>
+        </p:nvSpPr>
+        <p:spPr>
+          <a:xfrm>
+            <a:off x="6172200" y="3502152"/>
+            <a:ext cx="1371600" cy="548640"/>
+          </a:xfrm>
+          <a:prstGeom prst="roundRect">
+            <a:avLst/>
+          </a:prstGeom>
+          <a:solidFill>
+            <a:srgbClr val="B33A1A"/>
+          </a:solidFill>
+          <a:ln>
+            <a:solidFill>
+              <a:srgbClr val="B33A1A"/>
+            </a:solidFill>
+          </a:ln>
+          <a:effectLst/>
+        </p:spPr>
+        <p:style>
+          <a:lnRef idx="1">
+            <a:schemeClr val="accent1"/>
+          </a:lnRef>
+          <a:fillRef idx="3">
+            <a:schemeClr val="accent1"/>
+          </a:fillRef>
+          <a:effectRef idx="2">
+            <a:schemeClr val="accent1"/>
+          </a:effectRef>
+          <a:fontRef idx="minor">
+            <a:schemeClr val="lt1"/>
+          </a:fontRef>
+        </p:style>
+        <p:txBody>
+          <a:bodyPr rtlCol="0" anchor="ctr" wrap="square"/>
+          <a:lstStyle/>
+          <a:p>
+            <a:pPr algn="ctr">
+              <a:defRPr sz="1400" b="1">
+                <a:solidFill>
+                  <a:srgbClr val="FFFFFF"/>
+                </a:solidFill>
+              </a:defRPr>
+            </a:pPr>
+            <a:r>
+              <a:rPr sz="1400" b="1">
+                <a:solidFill>
+                  <a:srgbClr val="FFFFFF"/>
+                </a:solidFill>
+              </a:rPr>
+              <a:t>0.883</a:t>
+            </a:r>
+          </a:p>
+        </p:txBody>
+      </p:sp>
+      <p:sp>
+        <p:nvSpPr>
+          <p:cNvPr id="16" name="TextBox 15"/>
+          <p:cNvSpPr txBox="1"/>
+          <p:nvPr/>
+        </p:nvSpPr>
+        <p:spPr>
+          <a:xfrm>
+            <a:off x="7772400" y="3547872"/>
+            <a:ext cx="3840480" cy="310896"/>
+          </a:xfrm>
+          <a:prstGeom prst="rect">
+            <a:avLst/>
+          </a:prstGeom>
+          <a:noFill/>
+        </p:spPr>
+        <p:txBody>
+          <a:bodyPr wrap="square">
+            <a:spAutoFit/>
+          </a:bodyPr>
+          <a:lstStyle/>
+          <a:p>
+            <a:pPr algn="l">
+              <a:defRPr sz="1200" b="1">
+                <a:solidFill>
+                  <a:srgbClr val="B33A1A"/>
+                </a:solidFill>
+              </a:defRPr>
+            </a:pPr>
+            <a:r>
+              <a:t>prediction failed</a:t>
+            </a:r>
+          </a:p>
+        </p:txBody>
+      </p:sp>
+      <p:sp>
+        <p:nvSpPr>
+          <p:cNvPr id="17" name="TextBox 16"/>
+          <p:cNvSpPr txBox="1"/>
+          <p:nvPr/>
+        </p:nvSpPr>
+        <p:spPr>
+          <a:xfrm>
+            <a:off x="594360" y="4261104"/>
+            <a:ext cx="3108960" cy="310896"/>
+          </a:xfrm>
+          <a:prstGeom prst="rect">
+            <a:avLst/>
+          </a:prstGeom>
+          <a:noFill/>
+        </p:spPr>
+        <p:txBody>
+          <a:bodyPr wrap="square">
+            <a:spAutoFit/>
+          </a:bodyPr>
+          <a:lstStyle/>
+          <a:p>
+            <a:pPr algn="l">
+              <a:defRPr sz="1150" b="0">
+                <a:solidFill>
+                  <a:srgbClr val="1A1A1A"/>
+                </a:solidFill>
+              </a:defRPr>
+            </a:pPr>
+            <a:r>
+              <a:t>Macular edema</a:t>
+            </a:r>
+            <a:br/>
+            <a:r>
+              <a:t>max over 4 images</a:t>
+            </a:r>
+          </a:p>
+        </p:txBody>
+      </p:sp>
+      <p:sp>
+        <p:nvSpPr>
+          <p:cNvPr id="18" name="Rounded Rectangle 17"/>
+          <p:cNvSpPr/>
+          <p:nvPr/>
+        </p:nvSpPr>
+        <p:spPr>
+          <a:xfrm>
+            <a:off x="3794760" y="4215384"/>
+            <a:ext cx="1371600" cy="548640"/>
+          </a:xfrm>
+          <a:prstGeom prst="roundRect">
+            <a:avLst/>
+          </a:prstGeom>
+          <a:solidFill>
+            <a:srgbClr val="D8DDE6"/>
+          </a:solidFill>
+          <a:ln>
+            <a:solidFill>
+              <a:srgbClr val="D8DDE6"/>
+            </a:solidFill>
+          </a:ln>
+          <a:effectLst/>
+        </p:spPr>
+        <p:style>
+          <a:lnRef idx="1">
+            <a:schemeClr val="accent1"/>
+          </a:lnRef>
+          <a:fillRef idx="3">
+            <a:schemeClr val="accent1"/>
+          </a:fillRef>
+          <a:effectRef idx="2">
+            <a:schemeClr val="accent1"/>
+          </a:effectRef>
+          <a:fontRef idx="minor">
+            <a:schemeClr val="lt1"/>
+          </a:fontRef>
+        </p:style>
+        <p:txBody>
+          <a:bodyPr rtlCol="0" anchor="ctr" wrap="square"/>
+          <a:lstStyle/>
+          <a:p>
+            <a:pPr algn="ctr">
+              <a:defRPr sz="1400" b="1">
+                <a:solidFill>
+                  <a:srgbClr val="1A1A1A"/>
+                </a:solidFill>
+              </a:defRPr>
+            </a:pPr>
+            <a:r>
+              <a:rPr sz="1400" b="1">
+                <a:solidFill>
+                  <a:srgbClr val="1A1A1A"/>
+                </a:solidFill>
+              </a:rPr>
+              <a:t>—</a:t>
+            </a:r>
+          </a:p>
+        </p:txBody>
+      </p:sp>
+      <p:sp>
+        <p:nvSpPr>
+          <p:cNvPr id="19" name="Right Arrow 18"/>
+          <p:cNvSpPr/>
+          <p:nvPr/>
+        </p:nvSpPr>
+        <p:spPr>
+          <a:xfrm>
+            <a:off x="5349240" y="4389120"/>
+            <a:ext cx="640080" cy="201168"/>
+          </a:xfrm>
+          <a:prstGeom prst="rightArrow">
+            <a:avLst/>
+          </a:prstGeom>
+          <a:solidFill>
+            <a:srgbClr val="6B6B6B"/>
+          </a:solidFill>
+          <a:ln>
+            <a:noFill/>
+          </a:ln>
+          <a:effectLst/>
+        </p:spPr>
+        <p:style>
+          <a:lnRef idx="1">
+            <a:schemeClr val="accent1"/>
+          </a:lnRef>
+          <a:fillRef idx="3">
+            <a:schemeClr val="accent1"/>
+          </a:fillRef>
+          <a:effectRef idx="2">
+            <a:schemeClr val="accent1"/>
+          </a:effectRef>
+          <a:fontRef idx="minor">
+            <a:schemeClr val="lt1"/>
+          </a:fontRef>
+        </p:style>
+        <p:txBody>
+          <a:bodyPr rtlCol="0" anchor="ctr"/>
+          <a:lstStyle/>
+          <a:p>
+            <a:pPr algn="ctr"/>
+          </a:p>
+        </p:txBody>
+      </p:sp>
+      <p:sp>
+        <p:nvSpPr>
+          <p:cNvPr id="20" name="Rounded Rectangle 19"/>
+          <p:cNvSpPr/>
+          <p:nvPr/>
+        </p:nvSpPr>
+        <p:spPr>
+          <a:xfrm>
+            <a:off x="6172200" y="4215384"/>
+            <a:ext cx="1371600" cy="548640"/>
+          </a:xfrm>
+          <a:prstGeom prst="roundRect">
+            <a:avLst/>
+          </a:prstGeom>
+          <a:solidFill>
+            <a:srgbClr val="1E7A3C"/>
+          </a:solidFill>
+          <a:ln>
+            <a:solidFill>
+              <a:srgbClr val="1E7A3C"/>
+            </a:solidFill>
+          </a:ln>
+          <a:effectLst/>
+        </p:spPr>
+        <p:style>
+          <a:lnRef idx="1">
+            <a:schemeClr val="accent1"/>
+          </a:lnRef>
+          <a:fillRef idx="3">
+            <a:schemeClr val="accent1"/>
+          </a:fillRef>
+          <a:effectRef idx="2">
+            <a:schemeClr val="accent1"/>
+          </a:effectRef>
+          <a:fontRef idx="minor">
+            <a:schemeClr val="lt1"/>
+          </a:fontRef>
+        </p:style>
+        <p:txBody>
+          <a:bodyPr rtlCol="0" anchor="ctr" wrap="square"/>
+          <a:lstStyle/>
+          <a:p>
+            <a:pPr algn="ctr">
+              <a:defRPr sz="1400" b="1">
+                <a:solidFill>
+                  <a:srgbClr val="FFFFFF"/>
+                </a:solidFill>
+              </a:defRPr>
+            </a:pPr>
+            <a:r>
+              <a:rPr sz="1400" b="1">
+                <a:solidFill>
+                  <a:srgbClr val="FFFFFF"/>
+                </a:solidFill>
+              </a:rPr>
+              <a:t>0.969</a:t>
+            </a:r>
+          </a:p>
+        </p:txBody>
+      </p:sp>
+      <p:sp>
+        <p:nvSpPr>
+          <p:cNvPr id="21" name="TextBox 20"/>
+          <p:cNvSpPr txBox="1"/>
+          <p:nvPr/>
+        </p:nvSpPr>
+        <p:spPr>
+          <a:xfrm>
+            <a:off x="7772400" y="4261104"/>
+            <a:ext cx="3840480" cy="310896"/>
+          </a:xfrm>
+          <a:prstGeom prst="rect">
+            <a:avLst/>
+          </a:prstGeom>
+          <a:noFill/>
+        </p:spPr>
+        <p:txBody>
+          <a:bodyPr wrap="square">
+            <a:spAutoFit/>
+          </a:bodyPr>
+          <a:lstStyle/>
+          <a:p>
+            <a:pPr algn="l">
+              <a:defRPr sz="1200" b="1">
+                <a:solidFill>
+                  <a:srgbClr val="1E7A3C"/>
+                </a:solidFill>
+              </a:defRPr>
+            </a:pPr>
+            <a:r>
+              <a:t>worked — and theory says why</a:t>
+            </a:r>
+          </a:p>
+        </p:txBody>
+      </p:sp>
+      <p:sp>
+        <p:nvSpPr>
+          <p:cNvPr id="22" name="TextBox 21"/>
+          <p:cNvSpPr txBox="1"/>
+          <p:nvPr/>
+        </p:nvSpPr>
+        <p:spPr>
+          <a:xfrm>
+            <a:off x="594360" y="5029200"/>
+            <a:ext cx="11064240" cy="914400"/>
+          </a:xfrm>
+          <a:prstGeom prst="rect">
+            <a:avLst/>
+          </a:prstGeom>
+          <a:noFill/>
+        </p:spPr>
+        <p:txBody>
+          <a:bodyPr wrap="square">
+            <a:spAutoFit/>
+          </a:bodyPr>
+          <a:lstStyle/>
+          <a:p>
+            <a:pPr>
+              <a:spcAft>
+                <a:spcPts val="900"/>
+              </a:spcAft>
+              <a:defRPr sz="1300">
+                <a:solidFill>
+                  <a:srgbClr val="1A1A1A"/>
+                </a:solidFill>
+              </a:defRPr>
+            </a:pPr>
+            <a:r>
+              <a:t>• Why: 14.5% of patients have one eye affected and one clear, so averaging pulls the diseased eye toward the healthy one. Mean-pooling is provably wrong for heterogeneous groups.</a:t>
+            </a:r>
+          </a:p>
+          <a:p>
+            <a:pPr>
+              <a:spcAft>
+                <a:spcPts val="900"/>
+              </a:spcAft>
+              <a:defRPr sz="1300">
+                <a:solidFill>
+                  <a:srgbClr val="1A1A1A"/>
+                </a:solidFill>
+              </a:defRPr>
+            </a:pPr>
+            <a:r>
+              <a:t>• Macular edema is focal — it shows strongly in one image — so a maximum is the correct operator, and it delivers +0.036 AUC.</a:t>
+            </a:r>
+          </a:p>
+        </p:txBody>
+      </p:sp>
+      <p:sp>
+        <p:nvSpPr>
+          <p:cNvPr id="23" name="TextBox 22"/>
+          <p:cNvSpPr txBox="1"/>
+          <p:nvPr/>
+        </p:nvSpPr>
+        <p:spPr>
+          <a:xfrm>
+            <a:off x="594360" y="5989320"/>
+            <a:ext cx="11064240" cy="594360"/>
+          </a:xfrm>
+          <a:prstGeom prst="rect">
+            <a:avLst/>
+          </a:prstGeom>
+          <a:noFill/>
+        </p:spPr>
+        <p:txBody>
+          <a:bodyPr wrap="square">
+            <a:spAutoFit/>
+          </a:bodyPr>
+          <a:lstStyle/>
+          <a:p>
             <a:pPr>
               <a:defRPr sz="1400" b="1">
                 <a:solidFill>
-                  <a:srgbClr val="A53A1A"/>
-                </a:solidFill>
-              </a:defRPr>
-            </a:pPr>
-            <a:r>
-              <a:t>Reporting this rather than burying it: the prediction was wrong, the reason is understood, and the cost of finding out was minutes.</a:t>
+                  <a:srgbClr val="B33A1A"/>
+                </a:solidFill>
+              </a:defRPr>
+            </a:pPr>
+            <a:r>
+              <a:t>Reported, not buried. The prediction was wrong, the mechanism is understood, and it cost minutes.</a:t>
             </a:r>
           </a:p>
         </p:txBody>
@@ -6124,8 +6611,8 @@
         </p:nvSpPr>
         <p:spPr>
           <a:xfrm>
-            <a:off x="502920" y="320040"/>
-            <a:ext cx="11247120" cy="822960"/>
+            <a:off x="548640" y="347472"/>
+            <a:ext cx="11155680" cy="777240"/>
           </a:xfrm>
           <a:prstGeom prst="rect">
             <a:avLst/>
@@ -6139,41 +6626,64 @@
           <a:lstStyle/>
           <a:p>
             <a:pPr>
-              <a:defRPr sz="2700" b="1">
+              <a:defRPr sz="2800" b="1">
                 <a:solidFill>
                   <a:srgbClr val="1F4E79"/>
                 </a:solidFill>
               </a:defRPr>
             </a:pPr>
             <a:r>
-              <a:t>Where the real gap is, and what we propose</a:t>
-            </a:r>
-          </a:p>
-          <a:p>
-            <a:pPr>
-              <a:defRPr sz="1300">
-                <a:solidFill>
-                  <a:srgbClr val="5A5A5A"/>
-                </a:solidFill>
-              </a:defRPr>
-            </a:pPr>
-            <a:r>
-              <a:t>Positioned against the two efforts closest to ours, both identified during the review.</a:t>
+              <a:t>Where the gap is, and what we propose</a:t>
+            </a:r>
+          </a:p>
+        </p:txBody>
+      </p:sp>
+      <p:sp>
+        <p:nvSpPr>
+          <p:cNvPr id="3" name="TextBox 2"/>
+          <p:cNvSpPr txBox="1"/>
+          <p:nvPr/>
+        </p:nvSpPr>
+        <p:spPr>
+          <a:xfrm>
+            <a:off x="594360" y="1280160"/>
+            <a:ext cx="11064240" cy="310896"/>
+          </a:xfrm>
+          <a:prstGeom prst="rect">
+            <a:avLst/>
+          </a:prstGeom>
+          <a:noFill/>
+        </p:spPr>
+        <p:txBody>
+          <a:bodyPr wrap="square">
+            <a:spAutoFit/>
+          </a:bodyPr>
+          <a:lstStyle/>
+          <a:p>
+            <a:pPr algn="l">
+              <a:defRPr sz="1400" b="1">
+                <a:solidFill>
+                  <a:srgbClr val="1F4E79"/>
+                </a:solidFill>
+              </a:defRPr>
+            </a:pPr>
+            <a:r>
+              <a:t>Nearest existing work — and what each leaves open</a:t>
             </a:r>
           </a:p>
         </p:txBody>
       </p:sp>
       <p:graphicFrame>
         <p:nvGraphicFramePr>
-          <p:cNvPr id="3" name="Table 2"/>
+          <p:cNvPr id="4" name="Table 3"/>
           <p:cNvGraphicFramePr>
             <a:graphicFrameLocks noGrp="1"/>
           </p:cNvGraphicFramePr>
           <p:nvPr/>
         </p:nvGraphicFramePr>
         <p:xfrm>
-          <a:off x="548640" y="1463040"/>
-          <a:ext cx="11155680" cy="1737360"/>
+          <a:off x="594360" y="1691640"/>
+          <a:ext cx="11064237" cy="1371600"/>
         </p:xfrm>
         <a:graphic>
           <a:graphicData uri="http://schemas.openxmlformats.org/drawingml/2006/table">
@@ -6182,34 +6692,34 @@
                 <a:tableStyleId>{5C22544A-7EE6-4342-B048-85BDC9FD1C3A}</a:tableStyleId>
               </a:tblPr>
               <a:tblGrid>
-                <a:gridCol w="3657600"/>
-                <a:gridCol w="3657600"/>
-                <a:gridCol w="3840480"/>
+                <a:gridCol w="3291839"/>
+                <a:gridCol w="3291839"/>
+                <a:gridCol w="4480559"/>
               </a:tblGrid>
-              <a:tr h="579120">
+              <a:tr h="457200">
                 <a:tc>
                   <a:txBody>
                     <a:bodyPr/>
                     <a:lstStyle/>
                     <a:p>
                       <a:pPr algn="l">
-                        <a:defRPr sz="1000" b="1">
+                        <a:defRPr sz="1100" b="1">
                           <a:solidFill>
                             <a:srgbClr val="FFFFFF"/>
                           </a:solidFill>
                         </a:defRPr>
                       </a:pPr>
                       <a:r>
-                        <a:rPr sz="1000" b="1">
+                        <a:rPr sz="1100" b="1">
                           <a:solidFill>
                             <a:srgbClr val="FFFFFF"/>
                           </a:solidFill>
                         </a:rPr>
-                        <a:t>Nearby work</a:t>
+                        <a:t>Work</a:t>
                       </a:r>
                     </a:p>
                   </a:txBody>
-                  <a:tcPr marL="54864" marR="54864" marT="18288" marB="18288">
+                  <a:tcPr marL="64008" marR="64008" marT="22860" marB="22860">
                     <a:solidFill>
                       <a:srgbClr val="1F4E79"/>
                     </a:solidFill>
@@ -6221,23 +6731,23 @@
                     <a:lstStyle/>
                     <a:p>
                       <a:pPr algn="ctr">
-                        <a:defRPr sz="1000" b="1">
+                        <a:defRPr sz="1100" b="1">
                           <a:solidFill>
                             <a:srgbClr val="FFFFFF"/>
                           </a:solidFill>
                         </a:defRPr>
                       </a:pPr>
                       <a:r>
-                        <a:rPr sz="1000" b="1">
+                        <a:rPr sz="1100" b="1">
                           <a:solidFill>
                             <a:srgbClr val="FFFFFF"/>
                           </a:solidFill>
                         </a:rPr>
-                        <a:t>What it does</a:t>
+                        <a:t>Does</a:t>
                       </a:r>
                     </a:p>
                   </a:txBody>
-                  <a:tcPr marL="54864" marR="54864" marT="18288" marB="18288">
+                  <a:tcPr marL="64008" marR="64008" marT="22860" marB="22860">
                     <a:solidFill>
                       <a:srgbClr val="1F4E79"/>
                     </a:solidFill>
@@ -6249,87 +6759,70 @@
                     <a:lstStyle/>
                     <a:p>
                       <a:pPr algn="ctr">
-                        <a:defRPr sz="1000" b="1">
+                        <a:defRPr sz="1100" b="1">
                           <a:solidFill>
                             <a:srgbClr val="FFFFFF"/>
                           </a:solidFill>
                         </a:defRPr>
                       </a:pPr>
                       <a:r>
-                        <a:rPr sz="1000" b="1">
+                        <a:rPr sz="1100" b="1">
                           <a:solidFill>
                             <a:srgbClr val="FFFFFF"/>
                           </a:solidFill>
                         </a:rPr>
-                        <a:t>What it leaves open</a:t>
+                        <a:t>Leaves open</a:t>
                       </a:r>
                     </a:p>
                   </a:txBody>
-                  <a:tcPr marL="54864" marR="54864" marT="18288" marB="18288">
+                  <a:tcPr marL="64008" marR="64008" marT="22860" marB="22860">
                     <a:solidFill>
                       <a:srgbClr val="1F4E79"/>
                     </a:solidFill>
                   </a:tcPr>
                 </a:tc>
               </a:tr>
-              <a:tr h="579120">
+              <a:tr h="457200">
                 <a:tc>
                   <a:txBody>
                     <a:bodyPr/>
                     <a:lstStyle/>
                     <a:p>
                       <a:pPr algn="l">
-                        <a:defRPr sz="1000" b="0">
+                        <a:defRPr sz="1100" b="0">
                           <a:solidFill>
                             <a:srgbClr val="1A1A1A"/>
                           </a:solidFill>
                         </a:defRPr>
                       </a:pPr>
                       <a:r>
-                        <a:rPr sz="1000" b="0">
+                        <a:rPr sz="1100" b="0">
                           <a:solidFill>
                             <a:srgbClr val="1A1A1A"/>
                           </a:solidFill>
                         </a:rPr>
-                        <a:t>RetSyn — Shuai, Wu, Tang, Restrepo, Morley,</a:t>
+                        <a:t>RetSyn — J. Biomed. Inform. 2025</a:t>
                       </a:r>
                     </a:p>
                     <a:p>
                       <a:pPr algn="l">
-                        <a:defRPr sz="1000" b="0">
+                        <a:defRPr sz="1100" b="0">
                           <a:solidFill>
                             <a:srgbClr val="1A1A1A"/>
                           </a:solidFill>
                         </a:defRPr>
                       </a:pPr>
                       <a:r>
-                        <a:rPr sz="1000" b="0">
+                        <a:rPr sz="1100" b="0">
                           <a:solidFill>
                             <a:srgbClr val="1A1A1A"/>
                           </a:solidFill>
                         </a:rPr>
-                        <a:t>Nakayama.  J. Biomedical Informatics 2025.</a:t>
-                      </a:r>
-                    </a:p>
-                    <a:p>
-                      <a:pPr algn="l">
-                        <a:defRPr sz="1000" b="0">
-                          <a:solidFill>
-                            <a:srgbClr val="1A1A1A"/>
-                          </a:solidFill>
-                        </a:defRPr>
-                      </a:pPr>
-                      <a:r>
-                        <a:rPr sz="1000" b="0">
-                          <a:solidFill>
-                            <a:srgbClr val="1A1A1A"/>
-                          </a:solidFill>
-                        </a:rPr>
-                        <a:t>Same senior author as both datasets.</a:t>
+                        <a:t>(same senior author as both datasets)</a:t>
                       </a:r>
                     </a:p>
                   </a:txBody>
-                  <a:tcPr marL="54864" marR="54864" marT="18288" marB="18288">
+                  <a:tcPr marL="64008" marR="64008" marT="22860" marB="22860">
                     <a:solidFill>
                       <a:srgbClr val="FFFFFF"/>
                     </a:solidFill>
@@ -6341,40 +6834,23 @@
                     <a:lstStyle/>
                     <a:p>
                       <a:pPr algn="ctr">
-                        <a:defRPr sz="1000" b="0">
+                        <a:defRPr sz="1100" b="0">
                           <a:solidFill>
                             <a:srgbClr val="1A1A1A"/>
                           </a:solidFill>
                         </a:defRPr>
                       </a:pPr>
                       <a:r>
-                        <a:rPr sz="1000" b="0">
+                        <a:rPr sz="1100" b="0">
                           <a:solidFill>
                             <a:srgbClr val="1A1A1A"/>
                           </a:solidFill>
                         </a:rPr>
-                        <a:t>Quality- and class-conditioned synthetic data</a:t>
-                      </a:r>
-                    </a:p>
-                    <a:p>
-                      <a:pPr algn="ctr">
-                        <a:defRPr sz="1000" b="0">
-                          <a:solidFill>
-                            <a:srgbClr val="1A1A1A"/>
-                          </a:solidFill>
-                        </a:defRPr>
-                      </a:pPr>
-                      <a:r>
-                        <a:rPr sz="1000" b="0">
-                          <a:solidFill>
-                            <a:srgbClr val="1A1A1A"/>
-                          </a:solidFill>
-                        </a:rPr>
-                        <a:t>for tabletop → portable DR screening</a:t>
+                        <a:t>Synthetic data for tabletop → portable</a:t>
                       </a:r>
                     </a:p>
                   </a:txBody>
-                  <a:tcPr marL="54864" marR="54864" marT="18288" marB="18288">
+                  <a:tcPr marL="64008" marR="64008" marT="22860" marB="22860">
                     <a:solidFill>
                       <a:srgbClr val="FFFFFF"/>
                     </a:solidFill>
@@ -6386,106 +6862,72 @@
                     <a:lstStyle/>
                     <a:p>
                       <a:pPr algn="ctr">
-                        <a:defRPr sz="1000" b="0">
+                        <a:defRPr sz="1100" b="0">
                           <a:solidFill>
                             <a:srgbClr val="1A1A1A"/>
                           </a:solidFill>
                         </a:defRPr>
                       </a:pPr>
                       <a:r>
-                        <a:rPr sz="1000" b="0">
+                        <a:rPr sz="1100" b="0">
                           <a:solidFill>
                             <a:srgbClr val="1A1A1A"/>
                           </a:solidFill>
                         </a:rPr>
-                        <a:t>Does not diagnose what breaks; does not separate</a:t>
+                        <a:t>Does not diagnose what breaks; no macular</a:t>
                       </a:r>
                     </a:p>
                     <a:p>
                       <a:pPr algn="ctr">
-                        <a:defRPr sz="1000" b="0">
+                        <a:defRPr sz="1100" b="0">
                           <a:solidFill>
                             <a:srgbClr val="1A1A1A"/>
                           </a:solidFill>
                         </a:defRPr>
                       </a:pPr>
                       <a:r>
-                        <a:rPr sz="1000" b="0">
+                        <a:rPr sz="1100" b="0">
                           <a:solidFill>
                             <a:srgbClr val="1A1A1A"/>
                           </a:solidFill>
                         </a:rPr>
-                        <a:t>image quality from camera identity; does not</a:t>
-                      </a:r>
-                    </a:p>
-                    <a:p>
-                      <a:pPr algn="ctr">
-                        <a:defRPr sz="1000" b="0">
-                          <a:solidFill>
-                            <a:srgbClr val="1A1A1A"/>
-                          </a:solidFill>
-                        </a:defRPr>
-                      </a:pPr>
-                      <a:r>
-                        <a:rPr sz="1000" b="0">
-                          <a:solidFill>
-                            <a:srgbClr val="1A1A1A"/>
-                          </a:solidFill>
-                        </a:rPr>
-                        <a:t>address macular edema or the decision cutoff</a:t>
+                        <a:t>edema; no decision-cutoff treatment</a:t>
                       </a:r>
                     </a:p>
                   </a:txBody>
-                  <a:tcPr marL="54864" marR="54864" marT="18288" marB="18288">
+                  <a:tcPr marL="64008" marR="64008" marT="22860" marB="22860">
                     <a:solidFill>
                       <a:srgbClr val="FFFFFF"/>
                     </a:solidFill>
                   </a:tcPr>
                 </a:tc>
               </a:tr>
-              <a:tr h="579120">
+              <a:tr h="457200">
                 <a:tc>
                   <a:txBody>
                     <a:bodyPr/>
                     <a:lstStyle/>
                     <a:p>
                       <a:pPr algn="l">
-                        <a:defRPr sz="1000" b="0">
+                        <a:defRPr sz="1100" b="0">
                           <a:solidFill>
                             <a:srgbClr val="1A1A1A"/>
                           </a:solidFill>
                         </a:defRPr>
                       </a:pPr>
                       <a:r>
-                        <a:rPr sz="1000" b="0">
+                        <a:rPr sz="1100" b="0">
                           <a:solidFill>
                             <a:srgbClr val="1A1A1A"/>
                           </a:solidFill>
                         </a:rPr>
-                        <a:t>IEEE ISBI 2026 — transferability of</a:t>
-                      </a:r>
-                    </a:p>
-                    <a:p>
-                      <a:pPr algn="l">
-                        <a:defRPr sz="1000" b="0">
-                          <a:solidFill>
-                            <a:srgbClr val="1A1A1A"/>
-                          </a:solidFill>
-                        </a:defRPr>
-                      </a:pPr>
-                      <a:r>
-                        <a:rPr sz="1000" b="0">
-                          <a:solidFill>
-                            <a:srgbClr val="1A1A1A"/>
-                          </a:solidFill>
-                        </a:rPr>
-                        <a:t>fundus-trained models to mobile imaging</a:t>
+                        <a:t>IEEE ISBI 2026</a:t>
                       </a:r>
                     </a:p>
                   </a:txBody>
-                  <a:tcPr marL="54864" marR="54864" marT="18288" marB="18288">
+                  <a:tcPr marL="64008" marR="64008" marT="22860" marB="22860">
                     <a:solidFill>
-                      <a:srgbClr val="F2F4F7"/>
+                      <a:srgbClr val="F3F5F8"/>
                     </a:solidFill>
                   </a:tcPr>
                 </a:tc>
@@ -6495,25 +6937,25 @@
                     <a:lstStyle/>
                     <a:p>
                       <a:pPr algn="ctr">
-                        <a:defRPr sz="1000" b="0">
+                        <a:defRPr sz="1100" b="0">
                           <a:solidFill>
                             <a:srgbClr val="1A1A1A"/>
                           </a:solidFill>
                         </a:defRPr>
                       </a:pPr>
                       <a:r>
-                        <a:rPr sz="1000" b="0">
+                        <a:rPr sz="1100" b="0">
                           <a:solidFill>
                             <a:srgbClr val="1A1A1A"/>
                           </a:solidFill>
                         </a:rPr>
-                        <a:t>Reports the BRSET → mBRSET performance drop</a:t>
+                        <a:t>Reports the BRSET → mBRSET drop</a:t>
                       </a:r>
                     </a:p>
                   </a:txBody>
-                  <a:tcPr marL="54864" marR="54864" marT="18288" marB="18288">
+                  <a:tcPr marL="64008" marR="64008" marT="22860" marB="22860">
                     <a:solidFill>
-                      <a:srgbClr val="F2F4F7"/>
+                      <a:srgbClr val="F3F5F8"/>
                     </a:solidFill>
                   </a:tcPr>
                 </a:tc>
@@ -6523,42 +6965,42 @@
                     <a:lstStyle/>
                     <a:p>
                       <a:pPr algn="ctr">
-                        <a:defRPr sz="1000" b="0">
+                        <a:defRPr sz="1100" b="0">
                           <a:solidFill>
                             <a:srgbClr val="1A1A1A"/>
                           </a:solidFill>
                         </a:defRPr>
                       </a:pPr>
                       <a:r>
-                        <a:rPr sz="1000" b="0">
+                        <a:rPr sz="1100" b="0">
                           <a:solidFill>
                             <a:srgbClr val="1A1A1A"/>
                           </a:solidFill>
                         </a:rPr>
-                        <a:t>Descriptive. Establishes that the drop exists,</a:t>
+                        <a:t>Descriptive — not what the drop is made of,</a:t>
                       </a:r>
                     </a:p>
                     <a:p>
                       <a:pPr algn="ctr">
-                        <a:defRPr sz="1000" b="0">
+                        <a:defRPr sz="1100" b="0">
                           <a:solidFill>
                             <a:srgbClr val="1A1A1A"/>
                           </a:solidFill>
                         </a:defRPr>
                       </a:pPr>
                       <a:r>
-                        <a:rPr sz="1000" b="0">
+                        <a:rPr sz="1100" b="0">
                           <a:solidFill>
                             <a:srgbClr val="1A1A1A"/>
                           </a:solidFill>
                         </a:rPr>
-                        <a:t>not what it is made of or how to close it</a:t>
+                        <a:t>nor how to close it</a:t>
                       </a:r>
                     </a:p>
                   </a:txBody>
-                  <a:tcPr marL="54864" marR="54864" marT="18288" marB="18288">
+                  <a:tcPr marL="64008" marR="64008" marT="22860" marB="22860">
                     <a:solidFill>
-                      <a:srgbClr val="F2F4F7"/>
+                      <a:srgbClr val="F3F5F8"/>
                     </a:solidFill>
                   </a:tcPr>
                 </a:tc>
@@ -6569,14 +7011,14 @@
       </p:graphicFrame>
       <p:sp>
         <p:nvSpPr>
-          <p:cNvPr id="4" name="TextBox 3"/>
+          <p:cNvPr id="5" name="TextBox 4"/>
           <p:cNvSpPr txBox="1"/>
           <p:nvPr/>
         </p:nvSpPr>
         <p:spPr>
           <a:xfrm>
-            <a:off x="548640" y="3429000"/>
-            <a:ext cx="11155680" cy="2423160"/>
+            <a:off x="594360" y="3291840"/>
+            <a:ext cx="11064240" cy="310896"/>
           </a:xfrm>
           <a:prstGeom prst="rect">
             <a:avLst/>
@@ -6589,92 +7031,89 @@
           </a:bodyPr>
           <a:lstStyle/>
           <a:p>
-            <a:pPr>
-              <a:spcAft>
-                <a:spcPts val="600"/>
-              </a:spcAft>
-              <a:defRPr sz="1200">
-                <a:solidFill>
-                  <a:srgbClr val="1A1A1A"/>
-                </a:solidFill>
-              </a:defRPr>
-            </a:pPr>
-            <a:r>
-              <a:t>• Three openings the review did not find addressed anywhere:</a:t>
-            </a:r>
-          </a:p>
-          <a:p>
-            <a:pPr lvl="1">
-              <a:spcAft>
-                <a:spcPts val="600"/>
-              </a:spcAft>
-              <a:defRPr sz="1100">
-                <a:solidFill>
-                  <a:srgbClr val="5A5A5A"/>
-                </a:solidFill>
-              </a:defRPr>
-            </a:pPr>
-            <a:r>
-              <a:t>– 1.  Decomposing a cross-device gap into prevalence, calibration and ranking components. Papers report a single number and attribute it to the model; we show the split is computable, and that in our case calibration is provably exhausted.</a:t>
-            </a:r>
-          </a:p>
-          <a:p>
-            <a:pPr lvl="1">
-              <a:spcAft>
-                <a:spcPts val="600"/>
-              </a:spcAft>
-              <a:defRPr sz="1100">
-                <a:solidFill>
-                  <a:srgbClr val="5A5A5A"/>
-                </a:solidFill>
-              </a:defRPr>
-            </a:pPr>
-            <a:r>
-              <a:t>– 2.  Label-shift correction for MULTI-LABEL sigmoid outputs. Every published method — BBSE (Lipton et al., ICML 2018), MLLS (Alexandari et al., ICML 2020; Garg et al., NeurIPS 2020) — is single-label multi-class. Diabetic retinopathy and macular edema co-occur, so per-label independent estimation is misspecified. No published extension exists.</a:t>
-            </a:r>
-          </a:p>
-          <a:p>
-            <a:pPr lvl="1">
-              <a:spcAft>
-                <a:spcPts val="600"/>
-              </a:spcAft>
-              <a:defRPr sz="1100">
-                <a:solidFill>
-                  <a:srgbClr val="5A5A5A"/>
-                </a:solidFill>
-              </a:defRPr>
-            </a:pPr>
-            <a:r>
-              <a:t>– 3.  The intersection where both published families break their own stated assumptions: the mammography method assumes prevalence is preserved (ours changes 6.6% → 23.3%) and the prevalence-shift work assumes p(x|y) is unchanged (our AUC drop shows it is not).</a:t>
-            </a:r>
-          </a:p>
-          <a:p>
-            <a:pPr>
-              <a:spcAft>
-                <a:spcPts val="600"/>
-              </a:spcAft>
-              <a:defRPr sz="1200">
-                <a:solidFill>
-                  <a:srgbClr val="1A1A1A"/>
-                </a:solidFill>
-              </a:defRPr>
-            </a:pPr>
-            <a:r>
-              <a:t>• Proposed next step, ordered by strength of published evidence rather than novelty: fundus degradation augmentation on the source (the only intervention with peer-reviewed evidence of raising AUC under real fundus device shift), with the gap decomposition as the scientific core.</a:t>
-            </a:r>
-          </a:p>
-        </p:txBody>
-      </p:sp>
-      <p:sp>
-        <p:nvSpPr>
-          <p:cNvPr id="5" name="TextBox 4"/>
+            <a:pPr algn="l">
+              <a:defRPr sz="1400" b="1">
+                <a:solidFill>
+                  <a:srgbClr val="1F4E79"/>
+                </a:solidFill>
+              </a:defRPr>
+            </a:pPr>
+            <a:r>
+              <a:t>Three openings the review did not find addressed</a:t>
+            </a:r>
+          </a:p>
+        </p:txBody>
+      </p:sp>
+      <p:sp>
+        <p:nvSpPr>
+          <p:cNvPr id="6" name="Rounded Rectangle 5"/>
+          <p:cNvSpPr/>
+          <p:nvPr/>
+        </p:nvSpPr>
+        <p:spPr>
+          <a:xfrm>
+            <a:off x="594360" y="3703320"/>
+            <a:ext cx="384048" cy="384048"/>
+          </a:xfrm>
+          <a:prstGeom prst="roundRect">
+            <a:avLst/>
+          </a:prstGeom>
+          <a:solidFill>
+            <a:srgbClr val="1F4E79"/>
+          </a:solidFill>
+          <a:ln>
+            <a:solidFill>
+              <a:srgbClr val="1F4E79"/>
+            </a:solidFill>
+          </a:ln>
+          <a:effectLst/>
+        </p:spPr>
+        <p:style>
+          <a:lnRef idx="1">
+            <a:schemeClr val="accent1"/>
+          </a:lnRef>
+          <a:fillRef idx="3">
+            <a:schemeClr val="accent1"/>
+          </a:fillRef>
+          <a:effectRef idx="2">
+            <a:schemeClr val="accent1"/>
+          </a:effectRef>
+          <a:fontRef idx="minor">
+            <a:schemeClr val="lt1"/>
+          </a:fontRef>
+        </p:style>
+        <p:txBody>
+          <a:bodyPr rtlCol="0" anchor="ctr" wrap="square"/>
+          <a:lstStyle/>
+          <a:p>
+            <a:pPr algn="ctr">
+              <a:defRPr sz="1300" b="1">
+                <a:solidFill>
+                  <a:srgbClr val="FFFFFF"/>
+                </a:solidFill>
+              </a:defRPr>
+            </a:pPr>
+            <a:r>
+              <a:rPr sz="1300" b="1">
+                <a:solidFill>
+                  <a:srgbClr val="FFFFFF"/>
+                </a:solidFill>
+              </a:rPr>
+              <a:t>1</a:t>
+            </a:r>
+          </a:p>
+        </p:txBody>
+      </p:sp>
+      <p:sp>
+        <p:nvSpPr>
+          <p:cNvPr id="7" name="TextBox 6"/>
           <p:cNvSpPr txBox="1"/>
           <p:nvPr/>
         </p:nvSpPr>
         <p:spPr>
           <a:xfrm>
-            <a:off x="548640" y="5897880"/>
-            <a:ext cx="11155680" cy="640080"/>
+            <a:off x="1115568" y="3685032"/>
+            <a:ext cx="10515600" cy="310896"/>
           </a:xfrm>
           <a:prstGeom prst="rect">
             <a:avLst/>
@@ -6687,6 +7126,231 @@
           </a:bodyPr>
           <a:lstStyle/>
           <a:p>
+            <a:pPr algn="l">
+              <a:defRPr sz="1250" b="0">
+                <a:solidFill>
+                  <a:srgbClr val="1A1A1A"/>
+                </a:solidFill>
+              </a:defRPr>
+            </a:pPr>
+            <a:r>
+              <a:t>Decomposing a cross-device gap into prevalence, calibration and ranking — and proving calibration is exhausted</a:t>
+            </a:r>
+          </a:p>
+        </p:txBody>
+      </p:sp>
+      <p:sp>
+        <p:nvSpPr>
+          <p:cNvPr id="8" name="Rounded Rectangle 7"/>
+          <p:cNvSpPr/>
+          <p:nvPr/>
+        </p:nvSpPr>
+        <p:spPr>
+          <a:xfrm>
+            <a:off x="594360" y="4325112"/>
+            <a:ext cx="384048" cy="384048"/>
+          </a:xfrm>
+          <a:prstGeom prst="roundRect">
+            <a:avLst/>
+          </a:prstGeom>
+          <a:solidFill>
+            <a:srgbClr val="1F4E79"/>
+          </a:solidFill>
+          <a:ln>
+            <a:solidFill>
+              <a:srgbClr val="1F4E79"/>
+            </a:solidFill>
+          </a:ln>
+          <a:effectLst/>
+        </p:spPr>
+        <p:style>
+          <a:lnRef idx="1">
+            <a:schemeClr val="accent1"/>
+          </a:lnRef>
+          <a:fillRef idx="3">
+            <a:schemeClr val="accent1"/>
+          </a:fillRef>
+          <a:effectRef idx="2">
+            <a:schemeClr val="accent1"/>
+          </a:effectRef>
+          <a:fontRef idx="minor">
+            <a:schemeClr val="lt1"/>
+          </a:fontRef>
+        </p:style>
+        <p:txBody>
+          <a:bodyPr rtlCol="0" anchor="ctr" wrap="square"/>
+          <a:lstStyle/>
+          <a:p>
+            <a:pPr algn="ctr">
+              <a:defRPr sz="1300" b="1">
+                <a:solidFill>
+                  <a:srgbClr val="FFFFFF"/>
+                </a:solidFill>
+              </a:defRPr>
+            </a:pPr>
+            <a:r>
+              <a:rPr sz="1300" b="1">
+                <a:solidFill>
+                  <a:srgbClr val="FFFFFF"/>
+                </a:solidFill>
+              </a:rPr>
+              <a:t>2</a:t>
+            </a:r>
+          </a:p>
+        </p:txBody>
+      </p:sp>
+      <p:sp>
+        <p:nvSpPr>
+          <p:cNvPr id="9" name="TextBox 8"/>
+          <p:cNvSpPr txBox="1"/>
+          <p:nvPr/>
+        </p:nvSpPr>
+        <p:spPr>
+          <a:xfrm>
+            <a:off x="1115568" y="4306824"/>
+            <a:ext cx="10515600" cy="310896"/>
+          </a:xfrm>
+          <a:prstGeom prst="rect">
+            <a:avLst/>
+          </a:prstGeom>
+          <a:noFill/>
+        </p:spPr>
+        <p:txBody>
+          <a:bodyPr wrap="square">
+            <a:spAutoFit/>
+          </a:bodyPr>
+          <a:lstStyle/>
+          <a:p>
+            <a:pPr algn="l">
+              <a:defRPr sz="1250" b="0">
+                <a:solidFill>
+                  <a:srgbClr val="1A1A1A"/>
+                </a:solidFill>
+              </a:defRPr>
+            </a:pPr>
+            <a:r>
+              <a:t>Label-shift correction for MULTI-LABEL sigmoid outputs. BBSE (ICML'18) and MLLS (ICML'20, NeurIPS'20) are all single-label. DR and ME co-occur, so per-label estimation is misspecified</a:t>
+            </a:r>
+          </a:p>
+        </p:txBody>
+      </p:sp>
+      <p:sp>
+        <p:nvSpPr>
+          <p:cNvPr id="10" name="Rounded Rectangle 9"/>
+          <p:cNvSpPr/>
+          <p:nvPr/>
+        </p:nvSpPr>
+        <p:spPr>
+          <a:xfrm>
+            <a:off x="594360" y="4946903"/>
+            <a:ext cx="384048" cy="384048"/>
+          </a:xfrm>
+          <a:prstGeom prst="roundRect">
+            <a:avLst/>
+          </a:prstGeom>
+          <a:solidFill>
+            <a:srgbClr val="1F4E79"/>
+          </a:solidFill>
+          <a:ln>
+            <a:solidFill>
+              <a:srgbClr val="1F4E79"/>
+            </a:solidFill>
+          </a:ln>
+          <a:effectLst/>
+        </p:spPr>
+        <p:style>
+          <a:lnRef idx="1">
+            <a:schemeClr val="accent1"/>
+          </a:lnRef>
+          <a:fillRef idx="3">
+            <a:schemeClr val="accent1"/>
+          </a:fillRef>
+          <a:effectRef idx="2">
+            <a:schemeClr val="accent1"/>
+          </a:effectRef>
+          <a:fontRef idx="minor">
+            <a:schemeClr val="lt1"/>
+          </a:fontRef>
+        </p:style>
+        <p:txBody>
+          <a:bodyPr rtlCol="0" anchor="ctr" wrap="square"/>
+          <a:lstStyle/>
+          <a:p>
+            <a:pPr algn="ctr">
+              <a:defRPr sz="1300" b="1">
+                <a:solidFill>
+                  <a:srgbClr val="FFFFFF"/>
+                </a:solidFill>
+              </a:defRPr>
+            </a:pPr>
+            <a:r>
+              <a:rPr sz="1300" b="1">
+                <a:solidFill>
+                  <a:srgbClr val="FFFFFF"/>
+                </a:solidFill>
+              </a:rPr>
+              <a:t>3</a:t>
+            </a:r>
+          </a:p>
+        </p:txBody>
+      </p:sp>
+      <p:sp>
+        <p:nvSpPr>
+          <p:cNvPr id="11" name="TextBox 10"/>
+          <p:cNvSpPr txBox="1"/>
+          <p:nvPr/>
+        </p:nvSpPr>
+        <p:spPr>
+          <a:xfrm>
+            <a:off x="1115568" y="4928616"/>
+            <a:ext cx="10515600" cy="310896"/>
+          </a:xfrm>
+          <a:prstGeom prst="rect">
+            <a:avLst/>
+          </a:prstGeom>
+          <a:noFill/>
+        </p:spPr>
+        <p:txBody>
+          <a:bodyPr wrap="square">
+            <a:spAutoFit/>
+          </a:bodyPr>
+          <a:lstStyle/>
+          <a:p>
+            <a:pPr algn="l">
+              <a:defRPr sz="1250" b="0">
+                <a:solidFill>
+                  <a:srgbClr val="1A1A1A"/>
+                </a:solidFill>
+              </a:defRPr>
+            </a:pPr>
+            <a:r>
+              <a:t>The intersection where both published families break their own assumptions — one assumes prevalence is fixed (ours changes 6.6% → 23.3%), the other assumes p(x|y) is fixed (our AUC fell)</a:t>
+            </a:r>
+          </a:p>
+        </p:txBody>
+      </p:sp>
+      <p:sp>
+        <p:nvSpPr>
+          <p:cNvPr id="12" name="TextBox 11"/>
+          <p:cNvSpPr txBox="1"/>
+          <p:nvPr/>
+        </p:nvSpPr>
+        <p:spPr>
+          <a:xfrm>
+            <a:off x="594360" y="5806440"/>
+            <a:ext cx="11064240" cy="594360"/>
+          </a:xfrm>
+          <a:prstGeom prst="rect">
+            <a:avLst/>
+          </a:prstGeom>
+          <a:noFill/>
+        </p:spPr>
+        <p:txBody>
+          <a:bodyPr wrap="square">
+            <a:spAutoFit/>
+          </a:bodyPr>
+          <a:lstStyle/>
+          <a:p>
             <a:pPr>
               <a:defRPr sz="1400" b="1">
                 <a:solidFill>
@@ -6695,7 +7359,7 @@
               </a:defRPr>
             </a:pPr>
             <a:r>
-              <a:t>The decomposition holds as a contribution even if every method underperforms — showing what the gap is made of is itself the result.</a:t>
+              <a:t>Next step: fundus degradation augmentation — the only intervention with published evidence of raising AUC here — with the decomposition as the scientific core.</a:t>
             </a:r>
           </a:p>
         </p:txBody>
@@ -6726,8 +7390,8 @@
         </p:nvSpPr>
         <p:spPr>
           <a:xfrm>
-            <a:off x="502920" y="320040"/>
-            <a:ext cx="11247120" cy="822960"/>
+            <a:off x="548640" y="347472"/>
+            <a:ext cx="11155680" cy="777240"/>
           </a:xfrm>
           <a:prstGeom prst="rect">
             <a:avLst/>
@@ -6741,7 +7405,7 @@
           <a:lstStyle/>
           <a:p>
             <a:pPr>
-              <a:defRPr sz="2700" b="1">
+              <a:defRPr sz="2800" b="1">
                 <a:solidFill>
                   <a:srgbClr val="1F4E79"/>
                 </a:solidFill>
@@ -6755,12 +7419,12 @@
             <a:pPr>
               <a:defRPr sz="1300">
                 <a:solidFill>
-                  <a:srgbClr val="5A5A5A"/>
-                </a:solidFill>
-              </a:defRPr>
-            </a:pPr>
-            <a:r>
-              <a:t>Peer-reviewed versions. Citation counts: Semantic Scholar Graph API, 7 Aug 2026.</a:t>
+                  <a:srgbClr val="6B6B6B"/>
+                </a:solidFill>
+              </a:defRPr>
+            </a:pPr>
+            <a:r>
+              <a:t>Peer-reviewed versions. Counts: Semantic Scholar, 7 Aug 2026.</a:t>
             </a:r>
           </a:p>
         </p:txBody>
@@ -6773,8 +7437,8 @@
         </p:nvSpPr>
         <p:spPr>
           <a:xfrm>
-            <a:off x="548640" y="1371600"/>
-            <a:ext cx="11155680" cy="5120640"/>
+            <a:off x="594360" y="1325880"/>
+            <a:ext cx="11064240" cy="5120640"/>
           </a:xfrm>
           <a:prstGeom prst="rect">
             <a:avLst/>
@@ -6798,7 +7462,7 @@
               </a:defRPr>
             </a:pPr>
             <a:r>
-              <a:t>[1]  Tellez et al. Quantifying the effects of data augmentation and stain color normalization in CNNs for computational pathology. Medical Image Analysis 58:101544, 2019.  656 cites.  doi.org/10.1016/j.media.2019.101544</a:t>
+              <a:t>[1]  Tellez et al. Quantifying the effects of data augmentation and stain color normalization in CNNs for computational pathology. Medical Image Analysis 58:101544, 2019. 656 cites. doi.org/10.1016/j.media.2019.101544</a:t>
             </a:r>
           </a:p>
           <a:p>
@@ -6813,7 +7477,7 @@
               </a:defRPr>
             </a:pPr>
             <a:r>
-              <a:t>[2]  Che, Cheng, Jin, Chen. Towards Generalizable Diabetic Retinopathy Grading in Unseen Domains. MICCAI 2023, pp. 430–440.  46 cites.  doi.org/10.1007/978-3-031-43904-9_42</a:t>
+              <a:t>[2]  Che, Cheng, Jin, Chen. Towards Generalizable Diabetic Retinopathy Grading in Unseen Domains. MICCAI 2023, 430–440. 46 cites. doi.org/10.1007/978-3-031-43904-9_42</a:t>
             </a:r>
           </a:p>
           <a:p>
@@ -6828,7 +7492,7 @@
               </a:defRPr>
             </a:pPr>
             <a:r>
-              <a:t>[3]  Lin, Shi, Zhang, Shang, He, Ge. Camera Adaptation for Fundus-Image-Based CVD Risk Estimation. MICCAI 2022, pp. 593–603.  5 cites.  doi.org/10.1007/978-3-031-16434-7_57</a:t>
+              <a:t>[3]  Lin, Shi, Zhang, Shang, He, Ge. Camera Adaptation for Fundus-Image-Based CVD Risk Estimation. MICCAI 2022, 593–603. 5 cites. doi.org/10.1007/978-3-031-16434-7_57</a:t>
             </a:r>
           </a:p>
           <a:p>
@@ -6843,7 +7507,7 @@
               </a:defRPr>
             </a:pPr>
             <a:r>
-              <a:t>[4]  Gulrajani, Lopez-Paz. In Search of Lost Domain Generalization. ICLR 2021.  1,504 cites.  openreview.net/forum?id=lQdXeXDoWtI</a:t>
+              <a:t>[4]  Gulrajani, Lopez-Paz. In Search of Lost Domain Generalization. ICLR 2021. 1,504 cites. openreview.net/forum?id=lQdXeXDoWtI</a:t>
             </a:r>
           </a:p>
           <a:p>
@@ -6858,7 +7522,7 @@
               </a:defRPr>
             </a:pPr>
             <a:r>
-              <a:t>[5]  Boudiaf, Mueller, Ben Ayed, Bertinetto. Parameter-free Online Test-time Adaptation. CVPR 2022, pp. 8344–8353.  250 cites.  doi.org/10.1109/CVPR52688.2022.00816</a:t>
+              <a:t>[5]  Boudiaf, Mueller, Ben Ayed, Bertinetto. Parameter-free Online Test-time Adaptation. CVPR 2022, 8344–8353. 250 cites. doi.org/10.1109/CVPR52688.2022.00816</a:t>
             </a:r>
           </a:p>
           <a:p>
@@ -6873,7 +7537,7 @@
               </a:defRPr>
             </a:pPr>
             <a:r>
-              <a:t>[6]  Roschewitz, Khara, Yearsley et al. Automatic correction of performance drift under acquisition shift in medical image classification. Nature Communications 14:6608, 2023.  42 cites.  doi.org/10.1038/s41467-023-42396-y</a:t>
+              <a:t>[6]  Roschewitz, Khara, Yearsley et al. Automatic correction of performance drift under acquisition shift in medical image classification. Nature Communications 14:6608, 2023. 42 cites. doi.org/10.1038/s41467-023-42396-y</a:t>
             </a:r>
           </a:p>
           <a:p>
@@ -6888,7 +7552,7 @@
               </a:defRPr>
             </a:pPr>
             <a:r>
-              <a:t>[7]  Godau, Kalinowski, Christodoulou et al. Deployment of Image Analysis Algorithms under Prevalence Shifts. MICCAI 2023 → Navigating prevalence shifts..., Medical Image Analysis 102:103504, 2025.  doi.org/10.1016/j.media.2025.103504</a:t>
+              <a:t>[7]  Godau, Kalinowski, Christodoulou et al. Navigating prevalence shifts in image analysis algorithm deployment. Medical Image Analysis 102:103504, 2025 (MICCAI 2023). doi.org/10.1016/j.media.2025.103504</a:t>
             </a:r>
           </a:p>
           <a:p>
@@ -6903,7 +7567,7 @@
               </a:defRPr>
             </a:pPr>
             <a:r>
-              <a:t>[8]  Lipton, Wang, Smola. Detecting and Correcting for Label Shift with Black Box Predictors. ICML 2018.  679 cites.  proceedings.mlr.press/v80/lipton18a.html</a:t>
+              <a:t>[8]  Lipton, Wang, Smola. Detecting and Correcting for Label Shift with Black Box Predictors. ICML 2018. 679 cites. proceedings.mlr.press/v80/lipton18a.html</a:t>
             </a:r>
           </a:p>
           <a:p>
@@ -6918,7 +7582,7 @@
               </a:defRPr>
             </a:pPr>
             <a:r>
-              <a:t>[9]  Alexandari, Kundaje, Shrikumar. Maximum Likelihood with Bias-Corrected Calibration is Hard-To-Beat at Label Shift Adaptation. ICML 2020, pp. 222–232.  proceedings.mlr.press/v119/alexandari20a.html</a:t>
+              <a:t>[9]  Alexandari, Kundaje, Shrikumar. Maximum Likelihood with Bias-Corrected Calibration is Hard-To-Beat at Label Shift Adaptation. ICML 2020, 222–232. proceedings.mlr.press/v119/alexandari20a.html</a:t>
             </a:r>
           </a:p>
           <a:p>
@@ -6933,7 +7597,7 @@
               </a:defRPr>
             </a:pPr>
             <a:r>
-              <a:t>[10]  Garg, Wu, Balakrishnan, Lipton. A Unified View of Label Shift Estimation. NeurIPS 2020.  179 cites.</a:t>
+              <a:t>[10]  Garg, Wu, Balakrishnan, Lipton. A Unified View of Label Shift Estimation. NeurIPS 2020. 179 cites.</a:t>
             </a:r>
           </a:p>
           <a:p>
@@ -6948,7 +7612,7 @@
               </a:defRPr>
             </a:pPr>
             <a:r>
-              <a:t>[11]  Fawcett. An introduction to ROC analysis. Pattern Recognition Letters 27(8):861–874, 2006.  21,726 cites.  doi.org/10.1016/j.patrec.2005.10.010</a:t>
+              <a:t>[11]  Fawcett. An introduction to ROC analysis. Pattern Recognition Letters 27(8):861–874, 2006. 21,726 cites. doi.org/10.1016/j.patrec.2005.10.010</a:t>
             </a:r>
           </a:p>
           <a:p>
@@ -6963,7 +7627,7 @@
               </a:defRPr>
             </a:pPr>
             <a:r>
-              <a:t>[12]  Wu, Jastrzębski, Park, Moy, Cho, Geras. Improving the Ability of Deep Neural Networks to Use Information from Multiple Views in Breast Cancer Screening. MIDL 2020, PMLR 121:827–842.</a:t>
+              <a:t>[12]  Wu, Jastrzębski, Park, Moy, Cho, Geras. Improving the Ability of DNNs to Use Information from Multiple Views in Breast Cancer Screening. MIDL 2020, PMLR 121:827–842.</a:t>
             </a:r>
           </a:p>
           <a:p>
@@ -6978,7 +7642,7 @@
               </a:defRPr>
             </a:pPr>
             <a:r>
-              <a:t>[13]  Ilse, Tomczak, Welling. Attention-based Deep Multiple Instance Learning. ICML 2018.  2,691 cites.</a:t>
+              <a:t>[13]  Ilse, Tomczak, Welling. Attention-based Deep Multiple Instance Learning. ICML 2018. 2,691 cites.</a:t>
             </a:r>
           </a:p>
           <a:p>
@@ -6993,7 +7657,7 @@
               </a:defRPr>
             </a:pPr>
             <a:r>
-              <a:t>[14]  Shuai, Wu, Tang, Restrepo, Morley, Nakayama. Enhancing AI-based diabetic retinopathy screening in low- and middle-income countries with synthetic data. J. Biomedical Informatics 172:104938, 2025.  doi.org/10.1016/j.jbi.2025.104938</a:t>
+              <a:t>[14]  Shuai, Wu, Tang, Restrepo, Morley, Nakayama. Enhancing AI-based diabetic retinopathy screening in LMICs with synthetic data. J. Biomedical Informatics 172:104938, 2025. doi.org/10.1016/j.jbi.2025.104938</a:t>
             </a:r>
           </a:p>
           <a:p>
@@ -7008,7 +7672,7 @@
               </a:defRPr>
             </a:pPr>
             <a:r>
-              <a:t>[15]  Nakayama, Restrepo et al. BRSET: A Brazilian Multilabel Ophthalmological Dataset. PLOS Digital Health 3(7):e0000454, 2024.   |   Wu, Restrepo, Nakayama et al. A portable retina fundus photos dataset. Scientific Data 12:340, 2025.</a:t>
+              <a:t>[15]  Nakayama, Restrepo et al. BRSET. PLOS Digital Health 3(7):e0000454, 2024.  |  Wu, Restrepo, Nakayama et al. A portable retina fundus photos dataset (mBRSET). Scientific Data 12:340, 2025.</a:t>
             </a:r>
           </a:p>
         </p:txBody>
